--- a/Presentation-Plan-Octobre-M365.pptx
+++ b/Presentation-Plan-Octobre-M365.pptx
@@ -16,9 +16,10 @@
     <p:sldId id="264" r:id="rId10"/>
     <p:sldId id="265" r:id="rId11"/>
     <p:sldId id="266" r:id="rId12"/>
+    <p:sldId id="267" r:id="rId13"/>
   </p:sldIdLst>
   <p:notesMasterIdLst>
-    <p:notesMasterId r:id="rId13"/>
+    <p:notesMasterId r:id="rId14"/>
   </p:notesMasterIdLst>
   <p:sldSz cx="9144000" cy="5143500"/>
   <p:notesSz cx="5143500" cy="9144000"/>
@@ -117,39 +118,40 @@
   <p:extLst>
     <p:ext uri="{521415D9-36F7-43E2-AB2F-B90AF26B5E84}">
       <p14:sectionLst xmlns:p14="http://schemas.microsoft.com/office/powerpoint/2010/main">
-        <p14:section name="Plan" id="{5022a95c-8675-ef1f-1136-e0557c261f42}">
+        <p14:section name="Plan" id="{702134fc-30bf-bea9-4a86-7924fde4b4f4}">
           <p14:sldIdLst>
             <p14:sldId id="256"/>
           </p14:sldIdLst>
         </p14:section>
-        <p14:section name="Vue d'ensemble" id="{9f8e784e-7b38-a901-282b-bbf15260d5ef}">
+        <p14:section name="Vue d'ensemble" id="{f18db184-2e51-f780-4de7-d2b64efb1ff2}">
           <p14:sldIdLst>
             <p14:sldId id="257"/>
             <p14:sldId id="258"/>
-          </p14:sldIdLst>
-        </p14:section>
-        <p14:section name="Rencontres" id="{5a384ec2-4e0f-5036-7ab3-b4c1c3b17083}">
-          <p14:sldIdLst>
             <p14:sldId id="259"/>
           </p14:sldIdLst>
         </p14:section>
-        <p14:section name="Réalisations" id="{b4c1c9ec-0c17-3311-4b2e-1a3d11a14687}">
+        <p14:section name="Rencontres" id="{c0ffc1e8-2a57-fa5b-d701-106402efa744}">
           <p14:sldIdLst>
             <p14:sldId id="260"/>
+          </p14:sldIdLst>
+        </p14:section>
+        <p14:section name="Réalisations" id="{d0405abb-9211-c140-4d44-7a1baca6c1a6}">
+          <p14:sldIdLst>
             <p14:sldId id="261"/>
             <p14:sldId id="262"/>
+            <p14:sldId id="263"/>
           </p14:sldIdLst>
         </p14:section>
-        <p14:section name="Ressources et suite" id="{80e503fd-3dc3-f7dc-b591-bfefbf9feaf9}">
+        <p14:section name="Ressources et suite" id="{d39431ba-7aab-044e-98a3-c0868e0375e0}">
           <p14:sldIdLst>
-            <p14:sldId id="263"/>
             <p14:sldId id="264"/>
             <p14:sldId id="265"/>
+            <p14:sldId id="266"/>
           </p14:sldIdLst>
         </p14:section>
-        <p14:section name="Conclusion" id="{c38bca3e-bf6d-bfe1-7ecb-02334492cd96}">
+        <p14:section name="Conclusion" id="{936b0b01-f271-dfc7-eb9d-5f5fcdc04b3b}">
           <p14:sldIdLst>
-            <p14:sldId id="266"/>
+            <p14:sldId id="267"/>
           </p14:sldIdLst>
         </p14:section>
       </p14:sectionLst>
@@ -756,6 +758,94 @@
             <a:fld id="{F7021451-1387-4CA6-816F-3879F97B5CBC}" type="slidenum">
               <a:rPr lang="en-US"/>
               <a:t>11</a:t>
+            </a:fld>
+            <a:endParaRPr lang="en-US"/>
+          </a:p>
+        </p:txBody>
+      </p:sp>
+    </p:spTree>
+    <p:extLst>
+      <p:ext uri="{BB962C8B-B14F-4D97-AF65-F5344CB8AC3E}">
+        <p14:creationId xmlns:p14="http://schemas.microsoft.com/office/powerpoint/2010/main" val="1024086991"/>
+      </p:ext>
+    </p:extLst>
+  </p:cSld>
+  <p:clrMapOvr>
+    <a:masterClrMapping/>
+  </p:clrMapOvr>
+</p:notes>
+</file>
+
+<file path=ppt/notesSlides/notesSlide12.xml><?xml version="1.0" encoding="utf-8"?>
+<p:notes xmlns:a="http://schemas.openxmlformats.org/drawingml/2006/main" xmlns:r="http://schemas.openxmlformats.org/officeDocument/2006/relationships" xmlns:p="http://schemas.openxmlformats.org/presentationml/2006/main">
+  <p:cSld>
+    <p:spTree>
+      <p:nvGrpSpPr>
+        <p:cNvPr id="1" name=""/>
+        <p:cNvGrpSpPr/>
+        <p:nvPr/>
+      </p:nvGrpSpPr>
+      <p:grpSpPr>
+        <a:xfrm>
+          <a:off x="0" y="0"/>
+          <a:ext cx="0" cy="0"/>
+          <a:chOff x="0" y="0"/>
+          <a:chExt cx="0" cy="0"/>
+        </a:xfrm>
+      </p:grpSpPr>
+      <p:sp>
+        <p:nvSpPr>
+          <p:cNvPr id="2" name="Slide Image Placeholder 1"/>
+          <p:cNvSpPr>
+            <a:spLocks noGrp="1" noRot="1" noChangeAspect="1"/>
+          </p:cNvSpPr>
+          <p:nvPr>
+            <p:ph type="sldImg"/>
+          </p:nvPr>
+        </p:nvSpPr>
+        <p:spPr/>
+      </p:sp>
+      <p:sp>
+        <p:nvSpPr>
+          <p:cNvPr id="3" name="Notes Placeholder 2"/>
+          <p:cNvSpPr>
+            <a:spLocks noGrp="1"/>
+          </p:cNvSpPr>
+          <p:nvPr>
+            <p:ph type="body" idx="1"/>
+          </p:nvPr>
+        </p:nvSpPr>
+        <p:spPr/>
+        <p:txBody>
+          <a:bodyPr/>
+          <a:lstStyle/>
+          <a:p>
+            <a:r>
+              <a:rPr lang="en-US" dirty="0"/>
+              <a:t/>
+            </a:r>
+            <a:endParaRPr lang="en-US" dirty="0"/>
+          </a:p>
+        </p:txBody>
+      </p:sp>
+      <p:sp>
+        <p:nvSpPr>
+          <p:cNvPr id="4" name="Slide Number Placeholder 3"/>
+          <p:cNvSpPr>
+            <a:spLocks noGrp="1"/>
+          </p:cNvSpPr>
+          <p:nvPr>
+            <p:ph type="sldNum" sz="quarter" idx="10"/>
+          </p:nvPr>
+        </p:nvSpPr>
+        <p:spPr/>
+        <p:txBody>
+          <a:bodyPr/>
+          <a:lstStyle/>
+          <a:p>
+            <a:fld id="{F7021451-1387-4CA6-816F-3879F97B5CBC}" type="slidenum">
+              <a:rPr lang="en-US"/>
+              <a:t>12</a:t>
             </a:fld>
             <a:endParaRPr lang="en-US"/>
           </a:p>
@@ -2238,6 +2328,1107 @@
                 <a:ea typeface="Cambria" pitchFamily="34" charset="-122"/>
                 <a:cs typeface="Cambria" pitchFamily="34" charset="-120"/>
               </a:rPr>
+              <a:t>Ce qui est livré le 30 octobre</a:t>
+            </a:r>
+            <a:endParaRPr lang="en-US" sz="3000" dirty="0"/>
+          </a:p>
+        </p:txBody>
+      </p:sp>
+      <p:sp>
+        <p:nvSpPr>
+          <p:cNvPr id="3" name="Carte"/>
+          <p:cNvSpPr/>
+          <p:nvPr/>
+        </p:nvSpPr>
+        <p:spPr>
+          <a:xfrm>
+            <a:off x="457200" y="1097280"/>
+            <a:ext cx="4023360" cy="731520"/>
+          </a:xfrm>
+          <a:prstGeom prst="roundRect">
+            <a:avLst>
+              <a:gd name="adj" fmla="val 10000"/>
+            </a:avLst>
+          </a:prstGeom>
+          <a:solidFill>
+            <a:schemeClr val="bg2"/>
+          </a:solidFill>
+          <a:ln w="12700">
+            <a:solidFill>
+              <a:schemeClr val="bg2"/>
+            </a:solidFill>
+            <a:prstDash val="solid"/>
+          </a:ln>
+        </p:spPr>
+      </p:sp>
+      <p:sp>
+        <p:nvSpPr>
+          <p:cNvPr id="4" name="Pastille"/>
+          <p:cNvSpPr/>
+          <p:nvPr/>
+        </p:nvSpPr>
+        <p:spPr>
+          <a:xfrm>
+            <a:off x="594360" y="1234440"/>
+            <a:ext cx="457200" cy="457200"/>
+          </a:xfrm>
+          <a:prstGeom prst="ellipse">
+            <a:avLst/>
+          </a:prstGeom>
+          <a:solidFill>
+            <a:schemeClr val="tx2"/>
+          </a:solidFill>
+          <a:ln w="12700">
+            <a:solidFill>
+              <a:schemeClr val="tx2"/>
+            </a:solidFill>
+            <a:prstDash val="solid"/>
+          </a:ln>
+        </p:spPr>
+      </p:sp>
+      <p:sp>
+        <p:nvSpPr>
+          <p:cNvPr id="5" name="Text 3"/>
+          <p:cNvSpPr txBox="1"/>
+          <p:nvPr/>
+        </p:nvSpPr>
+        <p:spPr>
+          <a:xfrm>
+            <a:off x="594360" y="1234440"/>
+            <a:ext cx="457200" cy="457200"/>
+          </a:xfrm>
+          <a:prstGeom prst="rect">
+            <a:avLst/>
+          </a:prstGeom>
+          <a:noFill/>
+          <a:ln/>
+        </p:spPr>
+        <p:txBody>
+          <a:bodyPr wrap="square" lIns="0" tIns="0" rIns="0" bIns="0" rtlCol="0" anchor="ctr"/>
+          <a:lstStyle/>
+          <a:p>
+            <a:pPr algn="ctr" indent="0" marL="0">
+              <a:buNone/>
+            </a:pPr>
+            <a:r>
+              <a:rPr lang="en-US" sz="1500" b="1" dirty="0">
+                <a:solidFill>
+                  <a:schemeClr val="bg1"/>
+                </a:solidFill>
+              </a:rPr>
+              <a:t>1</a:t>
+            </a:r>
+            <a:endParaRPr lang="en-US" sz="1500" dirty="0"/>
+          </a:p>
+        </p:txBody>
+      </p:sp>
+      <p:sp>
+        <p:nvSpPr>
+          <p:cNvPr id="6" name="Text 4"/>
+          <p:cNvSpPr txBox="1"/>
+          <p:nvPr/>
+        </p:nvSpPr>
+        <p:spPr>
+          <a:xfrm>
+            <a:off x="1188720" y="1143000"/>
+            <a:ext cx="3200400" cy="640080"/>
+          </a:xfrm>
+          <a:prstGeom prst="rect">
+            <a:avLst/>
+          </a:prstGeom>
+          <a:noFill/>
+          <a:ln/>
+        </p:spPr>
+        <p:txBody>
+          <a:bodyPr wrap="square" lIns="0" tIns="0" rIns="0" bIns="0" rtlCol="0" anchor="ctr"/>
+          <a:lstStyle/>
+          <a:p>
+            <a:pPr indent="0" marL="0">
+              <a:buNone/>
+            </a:pPr>
+            <a:r>
+              <a:rPr lang="en-US" sz="1300" dirty="0">
+                <a:solidFill>
+                  <a:schemeClr val="tx1"/>
+                </a:solidFill>
+              </a:rPr>
+              <a:t>Création libre bloquée en production</a:t>
+            </a:r>
+            <a:endParaRPr lang="en-US" sz="1300" dirty="0"/>
+          </a:p>
+        </p:txBody>
+      </p:sp>
+      <p:sp>
+        <p:nvSpPr>
+          <p:cNvPr id="7" name="Carte"/>
+          <p:cNvSpPr/>
+          <p:nvPr/>
+        </p:nvSpPr>
+        <p:spPr>
+          <a:xfrm>
+            <a:off x="4663440" y="1097280"/>
+            <a:ext cx="4023360" cy="731520"/>
+          </a:xfrm>
+          <a:prstGeom prst="roundRect">
+            <a:avLst>
+              <a:gd name="adj" fmla="val 10000"/>
+            </a:avLst>
+          </a:prstGeom>
+          <a:solidFill>
+            <a:schemeClr val="bg2"/>
+          </a:solidFill>
+          <a:ln w="12700">
+            <a:solidFill>
+              <a:schemeClr val="bg2"/>
+            </a:solidFill>
+            <a:prstDash val="solid"/>
+          </a:ln>
+        </p:spPr>
+      </p:sp>
+      <p:sp>
+        <p:nvSpPr>
+          <p:cNvPr id="8" name="Pastille"/>
+          <p:cNvSpPr/>
+          <p:nvPr/>
+        </p:nvSpPr>
+        <p:spPr>
+          <a:xfrm>
+            <a:off x="4800600" y="1234440"/>
+            <a:ext cx="457200" cy="457200"/>
+          </a:xfrm>
+          <a:prstGeom prst="ellipse">
+            <a:avLst/>
+          </a:prstGeom>
+          <a:solidFill>
+            <a:schemeClr val="accent1"/>
+          </a:solidFill>
+          <a:ln w="12700">
+            <a:solidFill>
+              <a:schemeClr val="accent1"/>
+            </a:solidFill>
+            <a:prstDash val="solid"/>
+          </a:ln>
+        </p:spPr>
+      </p:sp>
+      <p:sp>
+        <p:nvSpPr>
+          <p:cNvPr id="9" name="Text 7"/>
+          <p:cNvSpPr txBox="1"/>
+          <p:nvPr/>
+        </p:nvSpPr>
+        <p:spPr>
+          <a:xfrm>
+            <a:off x="4800600" y="1234440"/>
+            <a:ext cx="457200" cy="457200"/>
+          </a:xfrm>
+          <a:prstGeom prst="rect">
+            <a:avLst/>
+          </a:prstGeom>
+          <a:noFill/>
+          <a:ln/>
+        </p:spPr>
+        <p:txBody>
+          <a:bodyPr wrap="square" lIns="0" tIns="0" rIns="0" bIns="0" rtlCol="0" anchor="ctr"/>
+          <a:lstStyle/>
+          <a:p>
+            <a:pPr algn="ctr" indent="0" marL="0">
+              <a:buNone/>
+            </a:pPr>
+            <a:r>
+              <a:rPr lang="en-US" sz="1500" b="1" dirty="0">
+                <a:solidFill>
+                  <a:schemeClr val="bg1"/>
+                </a:solidFill>
+              </a:rPr>
+              <a:t>2</a:t>
+            </a:r>
+            <a:endParaRPr lang="en-US" sz="1500" dirty="0"/>
+          </a:p>
+        </p:txBody>
+      </p:sp>
+      <p:sp>
+        <p:nvSpPr>
+          <p:cNvPr id="10" name="Text 8"/>
+          <p:cNvSpPr txBox="1"/>
+          <p:nvPr/>
+        </p:nvSpPr>
+        <p:spPr>
+          <a:xfrm>
+            <a:off x="5394960" y="1143000"/>
+            <a:ext cx="3200400" cy="640080"/>
+          </a:xfrm>
+          <a:prstGeom prst="rect">
+            <a:avLst/>
+          </a:prstGeom>
+          <a:noFill/>
+          <a:ln/>
+        </p:spPr>
+        <p:txBody>
+          <a:bodyPr wrap="square" lIns="0" tIns="0" rIns="0" bIns="0" rtlCol="0" anchor="ctr"/>
+          <a:lstStyle/>
+          <a:p>
+            <a:pPr indent="0" marL="0">
+              <a:buNone/>
+            </a:pPr>
+            <a:r>
+              <a:rPr lang="en-US" sz="1300" dirty="0">
+                <a:solidFill>
+                  <a:schemeClr val="tx1"/>
+                </a:solidFill>
+              </a:rPr>
+              <a:t>Inventaire du tenant et rapport de surpartage priorisé</a:t>
+            </a:r>
+            <a:endParaRPr lang="en-US" sz="1300" dirty="0"/>
+          </a:p>
+        </p:txBody>
+      </p:sp>
+      <p:sp>
+        <p:nvSpPr>
+          <p:cNvPr id="11" name="Carte"/>
+          <p:cNvSpPr/>
+          <p:nvPr/>
+        </p:nvSpPr>
+        <p:spPr>
+          <a:xfrm>
+            <a:off x="457200" y="1938528"/>
+            <a:ext cx="4023360" cy="731520"/>
+          </a:xfrm>
+          <a:prstGeom prst="roundRect">
+            <a:avLst>
+              <a:gd name="adj" fmla="val 10000"/>
+            </a:avLst>
+          </a:prstGeom>
+          <a:solidFill>
+            <a:schemeClr val="bg2"/>
+          </a:solidFill>
+          <a:ln w="12700">
+            <a:solidFill>
+              <a:schemeClr val="bg2"/>
+            </a:solidFill>
+            <a:prstDash val="solid"/>
+          </a:ln>
+        </p:spPr>
+      </p:sp>
+      <p:sp>
+        <p:nvSpPr>
+          <p:cNvPr id="12" name="Pastille"/>
+          <p:cNvSpPr/>
+          <p:nvPr/>
+        </p:nvSpPr>
+        <p:spPr>
+          <a:xfrm>
+            <a:off x="594360" y="2075688"/>
+            <a:ext cx="457200" cy="457200"/>
+          </a:xfrm>
+          <a:prstGeom prst="ellipse">
+            <a:avLst/>
+          </a:prstGeom>
+          <a:solidFill>
+            <a:schemeClr val="tx2"/>
+          </a:solidFill>
+          <a:ln w="12700">
+            <a:solidFill>
+              <a:schemeClr val="tx2"/>
+            </a:solidFill>
+            <a:prstDash val="solid"/>
+          </a:ln>
+        </p:spPr>
+      </p:sp>
+      <p:sp>
+        <p:nvSpPr>
+          <p:cNvPr id="13" name="Text 11"/>
+          <p:cNvSpPr txBox="1"/>
+          <p:nvPr/>
+        </p:nvSpPr>
+        <p:spPr>
+          <a:xfrm>
+            <a:off x="594360" y="2075688"/>
+            <a:ext cx="457200" cy="457200"/>
+          </a:xfrm>
+          <a:prstGeom prst="rect">
+            <a:avLst/>
+          </a:prstGeom>
+          <a:noFill/>
+          <a:ln/>
+        </p:spPr>
+        <p:txBody>
+          <a:bodyPr wrap="square" lIns="0" tIns="0" rIns="0" bIns="0" rtlCol="0" anchor="ctr"/>
+          <a:lstStyle/>
+          <a:p>
+            <a:pPr algn="ctr" indent="0" marL="0">
+              <a:buNone/>
+            </a:pPr>
+            <a:r>
+              <a:rPr lang="en-US" sz="1500" b="1" dirty="0">
+                <a:solidFill>
+                  <a:schemeClr val="bg1"/>
+                </a:solidFill>
+              </a:rPr>
+              <a:t>3</a:t>
+            </a:r>
+            <a:endParaRPr lang="en-US" sz="1500" dirty="0"/>
+          </a:p>
+        </p:txBody>
+      </p:sp>
+      <p:sp>
+        <p:nvSpPr>
+          <p:cNvPr id="14" name="Text 12"/>
+          <p:cNvSpPr txBox="1"/>
+          <p:nvPr/>
+        </p:nvSpPr>
+        <p:spPr>
+          <a:xfrm>
+            <a:off x="1188720" y="1984248"/>
+            <a:ext cx="3200400" cy="640080"/>
+          </a:xfrm>
+          <a:prstGeom prst="rect">
+            <a:avLst/>
+          </a:prstGeom>
+          <a:noFill/>
+          <a:ln/>
+        </p:spPr>
+        <p:txBody>
+          <a:bodyPr wrap="square" lIns="0" tIns="0" rIns="0" bIns="0" rtlCol="0" anchor="ctr"/>
+          <a:lstStyle/>
+          <a:p>
+            <a:pPr indent="0" marL="0">
+              <a:buNone/>
+            </a:pPr>
+            <a:r>
+              <a:rPr lang="en-US" sz="1300" dirty="0">
+                <a:solidFill>
+                  <a:schemeClr val="tx1"/>
+                </a:solidFill>
+              </a:rPr>
+              <a:t>Prototype de portail fonctionnel, de la demande à l'espace de test créé</a:t>
+            </a:r>
+            <a:endParaRPr lang="en-US" sz="1300" dirty="0"/>
+          </a:p>
+        </p:txBody>
+      </p:sp>
+      <p:sp>
+        <p:nvSpPr>
+          <p:cNvPr id="15" name="Carte"/>
+          <p:cNvSpPr/>
+          <p:nvPr/>
+        </p:nvSpPr>
+        <p:spPr>
+          <a:xfrm>
+            <a:off x="4663440" y="1938528"/>
+            <a:ext cx="4023360" cy="731520"/>
+          </a:xfrm>
+          <a:prstGeom prst="roundRect">
+            <a:avLst>
+              <a:gd name="adj" fmla="val 10000"/>
+            </a:avLst>
+          </a:prstGeom>
+          <a:solidFill>
+            <a:schemeClr val="bg2"/>
+          </a:solidFill>
+          <a:ln w="12700">
+            <a:solidFill>
+              <a:schemeClr val="bg2"/>
+            </a:solidFill>
+            <a:prstDash val="solid"/>
+          </a:ln>
+        </p:spPr>
+      </p:sp>
+      <p:sp>
+        <p:nvSpPr>
+          <p:cNvPr id="16" name="Pastille"/>
+          <p:cNvSpPr/>
+          <p:nvPr/>
+        </p:nvSpPr>
+        <p:spPr>
+          <a:xfrm>
+            <a:off x="4800600" y="2075688"/>
+            <a:ext cx="457200" cy="457200"/>
+          </a:xfrm>
+          <a:prstGeom prst="ellipse">
+            <a:avLst/>
+          </a:prstGeom>
+          <a:solidFill>
+            <a:schemeClr val="accent1"/>
+          </a:solidFill>
+          <a:ln w="12700">
+            <a:solidFill>
+              <a:schemeClr val="accent1"/>
+            </a:solidFill>
+            <a:prstDash val="solid"/>
+          </a:ln>
+        </p:spPr>
+      </p:sp>
+      <p:sp>
+        <p:nvSpPr>
+          <p:cNvPr id="17" name="Text 15"/>
+          <p:cNvSpPr txBox="1"/>
+          <p:nvPr/>
+        </p:nvSpPr>
+        <p:spPr>
+          <a:xfrm>
+            <a:off x="4800600" y="2075688"/>
+            <a:ext cx="457200" cy="457200"/>
+          </a:xfrm>
+          <a:prstGeom prst="rect">
+            <a:avLst/>
+          </a:prstGeom>
+          <a:noFill/>
+          <a:ln/>
+        </p:spPr>
+        <p:txBody>
+          <a:bodyPr wrap="square" lIns="0" tIns="0" rIns="0" bIns="0" rtlCol="0" anchor="ctr"/>
+          <a:lstStyle/>
+          <a:p>
+            <a:pPr algn="ctr" indent="0" marL="0">
+              <a:buNone/>
+            </a:pPr>
+            <a:r>
+              <a:rPr lang="en-US" sz="1500" b="1" dirty="0">
+                <a:solidFill>
+                  <a:schemeClr val="bg1"/>
+                </a:solidFill>
+              </a:rPr>
+              <a:t>4</a:t>
+            </a:r>
+            <a:endParaRPr lang="en-US" sz="1500" dirty="0"/>
+          </a:p>
+        </p:txBody>
+      </p:sp>
+      <p:sp>
+        <p:nvSpPr>
+          <p:cNvPr id="18" name="Text 16"/>
+          <p:cNvSpPr txBox="1"/>
+          <p:nvPr/>
+        </p:nvSpPr>
+        <p:spPr>
+          <a:xfrm>
+            <a:off x="5394960" y="1984248"/>
+            <a:ext cx="3200400" cy="640080"/>
+          </a:xfrm>
+          <a:prstGeom prst="rect">
+            <a:avLst/>
+          </a:prstGeom>
+          <a:noFill/>
+          <a:ln/>
+        </p:spPr>
+        <p:txBody>
+          <a:bodyPr wrap="square" lIns="0" tIns="0" rIns="0" bIns="0" rtlCol="0" anchor="ctr"/>
+          <a:lstStyle/>
+          <a:p>
+            <a:pPr indent="0" marL="0">
+              <a:buNone/>
+            </a:pPr>
+            <a:r>
+              <a:rPr lang="en-US" sz="1300" dirty="0">
+                <a:solidFill>
+                  <a:schemeClr val="tx1"/>
+                </a:solidFill>
+              </a:rPr>
+              <a:t>Gabarit Équipe créé par code ; gabarit Projet spécifié</a:t>
+            </a:r>
+            <a:endParaRPr lang="en-US" sz="1300" dirty="0"/>
+          </a:p>
+        </p:txBody>
+      </p:sp>
+      <p:sp>
+        <p:nvSpPr>
+          <p:cNvPr id="19" name="Carte"/>
+          <p:cNvSpPr/>
+          <p:nvPr/>
+        </p:nvSpPr>
+        <p:spPr>
+          <a:xfrm>
+            <a:off x="457200" y="2779776"/>
+            <a:ext cx="4023360" cy="731520"/>
+          </a:xfrm>
+          <a:prstGeom prst="roundRect">
+            <a:avLst>
+              <a:gd name="adj" fmla="val 10000"/>
+            </a:avLst>
+          </a:prstGeom>
+          <a:solidFill>
+            <a:schemeClr val="bg2"/>
+          </a:solidFill>
+          <a:ln w="12700">
+            <a:solidFill>
+              <a:schemeClr val="bg2"/>
+            </a:solidFill>
+            <a:prstDash val="solid"/>
+          </a:ln>
+        </p:spPr>
+      </p:sp>
+      <p:sp>
+        <p:nvSpPr>
+          <p:cNvPr id="20" name="Pastille"/>
+          <p:cNvSpPr/>
+          <p:nvPr/>
+        </p:nvSpPr>
+        <p:spPr>
+          <a:xfrm>
+            <a:off x="594360" y="2916936"/>
+            <a:ext cx="457200" cy="457200"/>
+          </a:xfrm>
+          <a:prstGeom prst="ellipse">
+            <a:avLst/>
+          </a:prstGeom>
+          <a:solidFill>
+            <a:schemeClr val="tx2"/>
+          </a:solidFill>
+          <a:ln w="12700">
+            <a:solidFill>
+              <a:schemeClr val="tx2"/>
+            </a:solidFill>
+            <a:prstDash val="solid"/>
+          </a:ln>
+        </p:spPr>
+      </p:sp>
+      <p:sp>
+        <p:nvSpPr>
+          <p:cNvPr id="21" name="Text 19"/>
+          <p:cNvSpPr txBox="1"/>
+          <p:nvPr/>
+        </p:nvSpPr>
+        <p:spPr>
+          <a:xfrm>
+            <a:off x="594360" y="2916936"/>
+            <a:ext cx="457200" cy="457200"/>
+          </a:xfrm>
+          <a:prstGeom prst="rect">
+            <a:avLst/>
+          </a:prstGeom>
+          <a:noFill/>
+          <a:ln/>
+        </p:spPr>
+        <p:txBody>
+          <a:bodyPr wrap="square" lIns="0" tIns="0" rIns="0" bIns="0" rtlCol="0" anchor="ctr"/>
+          <a:lstStyle/>
+          <a:p>
+            <a:pPr algn="ctr" indent="0" marL="0">
+              <a:buNone/>
+            </a:pPr>
+            <a:r>
+              <a:rPr lang="en-US" sz="1500" b="1" dirty="0">
+                <a:solidFill>
+                  <a:schemeClr val="bg1"/>
+                </a:solidFill>
+              </a:rPr>
+              <a:t>5</a:t>
+            </a:r>
+            <a:endParaRPr lang="en-US" sz="1500" dirty="0"/>
+          </a:p>
+        </p:txBody>
+      </p:sp>
+      <p:sp>
+        <p:nvSpPr>
+          <p:cNvPr id="22" name="Text 20"/>
+          <p:cNvSpPr txBox="1"/>
+          <p:nvPr/>
+        </p:nvSpPr>
+        <p:spPr>
+          <a:xfrm>
+            <a:off x="1188720" y="2825496"/>
+            <a:ext cx="3200400" cy="640080"/>
+          </a:xfrm>
+          <a:prstGeom prst="rect">
+            <a:avLst/>
+          </a:prstGeom>
+          <a:noFill/>
+          <a:ln/>
+        </p:spPr>
+        <p:txBody>
+          <a:bodyPr wrap="square" lIns="0" tIns="0" rIns="0" bIns="0" rtlCol="0" anchor="ctr"/>
+          <a:lstStyle/>
+          <a:p>
+            <a:pPr indent="0" marL="0">
+              <a:buNone/>
+            </a:pPr>
+            <a:r>
+              <a:rPr lang="en-US" sz="1300" dirty="0">
+                <a:solidFill>
+                  <a:schemeClr val="tx1"/>
+                </a:solidFill>
+              </a:rPr>
+              <a:t>Partage externe validé en test, processus invités documenté</a:t>
+            </a:r>
+            <a:endParaRPr lang="en-US" sz="1300" dirty="0"/>
+          </a:p>
+        </p:txBody>
+      </p:sp>
+      <p:sp>
+        <p:nvSpPr>
+          <p:cNvPr id="23" name="Carte"/>
+          <p:cNvSpPr/>
+          <p:nvPr/>
+        </p:nvSpPr>
+        <p:spPr>
+          <a:xfrm>
+            <a:off x="4663440" y="2779776"/>
+            <a:ext cx="4023360" cy="731520"/>
+          </a:xfrm>
+          <a:prstGeom prst="roundRect">
+            <a:avLst>
+              <a:gd name="adj" fmla="val 10000"/>
+            </a:avLst>
+          </a:prstGeom>
+          <a:solidFill>
+            <a:schemeClr val="bg2"/>
+          </a:solidFill>
+          <a:ln w="12700">
+            <a:solidFill>
+              <a:schemeClr val="bg2"/>
+            </a:solidFill>
+            <a:prstDash val="solid"/>
+          </a:ln>
+        </p:spPr>
+      </p:sp>
+      <p:sp>
+        <p:nvSpPr>
+          <p:cNvPr id="24" name="Pastille"/>
+          <p:cNvSpPr/>
+          <p:nvPr/>
+        </p:nvSpPr>
+        <p:spPr>
+          <a:xfrm>
+            <a:off x="4800600" y="2916936"/>
+            <a:ext cx="457200" cy="457200"/>
+          </a:xfrm>
+          <a:prstGeom prst="ellipse">
+            <a:avLst/>
+          </a:prstGeom>
+          <a:solidFill>
+            <a:schemeClr val="accent1"/>
+          </a:solidFill>
+          <a:ln w="12700">
+            <a:solidFill>
+              <a:schemeClr val="accent1"/>
+            </a:solidFill>
+            <a:prstDash val="solid"/>
+          </a:ln>
+        </p:spPr>
+      </p:sp>
+      <p:sp>
+        <p:nvSpPr>
+          <p:cNvPr id="25" name="Text 23"/>
+          <p:cNvSpPr txBox="1"/>
+          <p:nvPr/>
+        </p:nvSpPr>
+        <p:spPr>
+          <a:xfrm>
+            <a:off x="4800600" y="2916936"/>
+            <a:ext cx="457200" cy="457200"/>
+          </a:xfrm>
+          <a:prstGeom prst="rect">
+            <a:avLst/>
+          </a:prstGeom>
+          <a:noFill/>
+          <a:ln/>
+        </p:spPr>
+        <p:txBody>
+          <a:bodyPr wrap="square" lIns="0" tIns="0" rIns="0" bIns="0" rtlCol="0" anchor="ctr"/>
+          <a:lstStyle/>
+          <a:p>
+            <a:pPr algn="ctr" indent="0" marL="0">
+              <a:buNone/>
+            </a:pPr>
+            <a:r>
+              <a:rPr lang="en-US" sz="1500" b="1" dirty="0">
+                <a:solidFill>
+                  <a:schemeClr val="bg1"/>
+                </a:solidFill>
+              </a:rPr>
+              <a:t>6</a:t>
+            </a:r>
+            <a:endParaRPr lang="en-US" sz="1500" dirty="0"/>
+          </a:p>
+        </p:txBody>
+      </p:sp>
+      <p:sp>
+        <p:nvSpPr>
+          <p:cNvPr id="26" name="Text 24"/>
+          <p:cNvSpPr txBox="1"/>
+          <p:nvPr/>
+        </p:nvSpPr>
+        <p:spPr>
+          <a:xfrm>
+            <a:off x="5394960" y="2825496"/>
+            <a:ext cx="3200400" cy="640080"/>
+          </a:xfrm>
+          <a:prstGeom prst="rect">
+            <a:avLst/>
+          </a:prstGeom>
+          <a:noFill/>
+          <a:ln/>
+        </p:spPr>
+        <p:txBody>
+          <a:bodyPr wrap="square" lIns="0" tIns="0" rIns="0" bIns="0" rtlCol="0" anchor="ctr"/>
+          <a:lstStyle/>
+          <a:p>
+            <a:pPr indent="0" marL="0">
+              <a:buNone/>
+            </a:pPr>
+            <a:r>
+              <a:rPr lang="en-US" sz="1300" dirty="0">
+                <a:solidFill>
+                  <a:schemeClr val="tx1"/>
+                </a:solidFill>
+              </a:rPr>
+              <a:t>Étiquettes créées, plans de rétention et DLP validés ; accès conditionnel en rapport</a:t>
+            </a:r>
+            <a:endParaRPr lang="en-US" sz="1300" dirty="0"/>
+          </a:p>
+        </p:txBody>
+      </p:sp>
+      <p:sp>
+        <p:nvSpPr>
+          <p:cNvPr id="27" name="Carte"/>
+          <p:cNvSpPr/>
+          <p:nvPr/>
+        </p:nvSpPr>
+        <p:spPr>
+          <a:xfrm>
+            <a:off x="457200" y="3621024"/>
+            <a:ext cx="4023360" cy="731520"/>
+          </a:xfrm>
+          <a:prstGeom prst="roundRect">
+            <a:avLst>
+              <a:gd name="adj" fmla="val 10000"/>
+            </a:avLst>
+          </a:prstGeom>
+          <a:solidFill>
+            <a:schemeClr val="bg2"/>
+          </a:solidFill>
+          <a:ln w="12700">
+            <a:solidFill>
+              <a:schemeClr val="bg2"/>
+            </a:solidFill>
+            <a:prstDash val="solid"/>
+          </a:ln>
+        </p:spPr>
+      </p:sp>
+      <p:sp>
+        <p:nvSpPr>
+          <p:cNvPr id="28" name="Pastille"/>
+          <p:cNvSpPr/>
+          <p:nvPr/>
+        </p:nvSpPr>
+        <p:spPr>
+          <a:xfrm>
+            <a:off x="594360" y="3758184"/>
+            <a:ext cx="457200" cy="457200"/>
+          </a:xfrm>
+          <a:prstGeom prst="ellipse">
+            <a:avLst/>
+          </a:prstGeom>
+          <a:solidFill>
+            <a:schemeClr val="tx2"/>
+          </a:solidFill>
+          <a:ln w="12700">
+            <a:solidFill>
+              <a:schemeClr val="tx2"/>
+            </a:solidFill>
+            <a:prstDash val="solid"/>
+          </a:ln>
+        </p:spPr>
+      </p:sp>
+      <p:sp>
+        <p:nvSpPr>
+          <p:cNvPr id="29" name="Text 27"/>
+          <p:cNvSpPr txBox="1"/>
+          <p:nvPr/>
+        </p:nvSpPr>
+        <p:spPr>
+          <a:xfrm>
+            <a:off x="594360" y="3758184"/>
+            <a:ext cx="457200" cy="457200"/>
+          </a:xfrm>
+          <a:prstGeom prst="rect">
+            <a:avLst/>
+          </a:prstGeom>
+          <a:noFill/>
+          <a:ln/>
+        </p:spPr>
+        <p:txBody>
+          <a:bodyPr wrap="square" lIns="0" tIns="0" rIns="0" bIns="0" rtlCol="0" anchor="ctr"/>
+          <a:lstStyle/>
+          <a:p>
+            <a:pPr algn="ctr" indent="0" marL="0">
+              <a:buNone/>
+            </a:pPr>
+            <a:r>
+              <a:rPr lang="en-US" sz="1500" b="1" dirty="0">
+                <a:solidFill>
+                  <a:schemeClr val="bg1"/>
+                </a:solidFill>
+              </a:rPr>
+              <a:t>7</a:t>
+            </a:r>
+            <a:endParaRPr lang="en-US" sz="1500" dirty="0"/>
+          </a:p>
+        </p:txBody>
+      </p:sp>
+      <p:sp>
+        <p:nvSpPr>
+          <p:cNvPr id="30" name="Text 28"/>
+          <p:cNvSpPr txBox="1"/>
+          <p:nvPr/>
+        </p:nvSpPr>
+        <p:spPr>
+          <a:xfrm>
+            <a:off x="1188720" y="3666744"/>
+            <a:ext cx="3200400" cy="640080"/>
+          </a:xfrm>
+          <a:prstGeom prst="rect">
+            <a:avLst/>
+          </a:prstGeom>
+          <a:noFill/>
+          <a:ln/>
+        </p:spPr>
+        <p:txBody>
+          <a:bodyPr wrap="square" lIns="0" tIns="0" rIns="0" bIns="0" rtlCol="0" anchor="ctr"/>
+          <a:lstStyle/>
+          <a:p>
+            <a:pPr indent="0" marL="0">
+              <a:buNone/>
+            </a:pPr>
+            <a:r>
+              <a:rPr lang="en-US" sz="1300" dirty="0">
+                <a:solidFill>
+                  <a:schemeClr val="tx1"/>
+                </a:solidFill>
+              </a:rPr>
+              <a:t>Registre des espaces et détection automatique des orphelins</a:t>
+            </a:r>
+            <a:endParaRPr lang="en-US" sz="1300" dirty="0"/>
+          </a:p>
+        </p:txBody>
+      </p:sp>
+      <p:sp>
+        <p:nvSpPr>
+          <p:cNvPr id="31" name="Carte"/>
+          <p:cNvSpPr/>
+          <p:nvPr/>
+        </p:nvSpPr>
+        <p:spPr>
+          <a:xfrm>
+            <a:off x="4663440" y="3621024"/>
+            <a:ext cx="4023360" cy="731520"/>
+          </a:xfrm>
+          <a:prstGeom prst="roundRect">
+            <a:avLst>
+              <a:gd name="adj" fmla="val 10000"/>
+            </a:avLst>
+          </a:prstGeom>
+          <a:solidFill>
+            <a:schemeClr val="bg2"/>
+          </a:solidFill>
+          <a:ln w="12700">
+            <a:solidFill>
+              <a:schemeClr val="bg2"/>
+            </a:solidFill>
+            <a:prstDash val="solid"/>
+          </a:ln>
+        </p:spPr>
+      </p:sp>
+      <p:sp>
+        <p:nvSpPr>
+          <p:cNvPr id="32" name="Pastille"/>
+          <p:cNvSpPr/>
+          <p:nvPr/>
+        </p:nvSpPr>
+        <p:spPr>
+          <a:xfrm>
+            <a:off x="4800600" y="3758184"/>
+            <a:ext cx="457200" cy="457200"/>
+          </a:xfrm>
+          <a:prstGeom prst="ellipse">
+            <a:avLst/>
+          </a:prstGeom>
+          <a:solidFill>
+            <a:schemeClr val="accent1"/>
+          </a:solidFill>
+          <a:ln w="12700">
+            <a:solidFill>
+              <a:schemeClr val="accent1"/>
+            </a:solidFill>
+            <a:prstDash val="solid"/>
+          </a:ln>
+        </p:spPr>
+      </p:sp>
+      <p:sp>
+        <p:nvSpPr>
+          <p:cNvPr id="33" name="Text 31"/>
+          <p:cNvSpPr txBox="1"/>
+          <p:nvPr/>
+        </p:nvSpPr>
+        <p:spPr>
+          <a:xfrm>
+            <a:off x="4800600" y="3758184"/>
+            <a:ext cx="457200" cy="457200"/>
+          </a:xfrm>
+          <a:prstGeom prst="rect">
+            <a:avLst/>
+          </a:prstGeom>
+          <a:noFill/>
+          <a:ln/>
+        </p:spPr>
+        <p:txBody>
+          <a:bodyPr wrap="square" lIns="0" tIns="0" rIns="0" bIns="0" rtlCol="0" anchor="ctr"/>
+          <a:lstStyle/>
+          <a:p>
+            <a:pPr algn="ctr" indent="0" marL="0">
+              <a:buNone/>
+            </a:pPr>
+            <a:r>
+              <a:rPr lang="en-US" sz="1500" b="1" dirty="0">
+                <a:solidFill>
+                  <a:schemeClr val="bg1"/>
+                </a:solidFill>
+              </a:rPr>
+              <a:t>8</a:t>
+            </a:r>
+            <a:endParaRPr lang="en-US" sz="1500" dirty="0"/>
+          </a:p>
+        </p:txBody>
+      </p:sp>
+      <p:sp>
+        <p:nvSpPr>
+          <p:cNvPr id="34" name="Text 32"/>
+          <p:cNvSpPr txBox="1"/>
+          <p:nvPr/>
+        </p:nvSpPr>
+        <p:spPr>
+          <a:xfrm>
+            <a:off x="5394960" y="3666744"/>
+            <a:ext cx="3200400" cy="640080"/>
+          </a:xfrm>
+          <a:prstGeom prst="rect">
+            <a:avLst/>
+          </a:prstGeom>
+          <a:noFill/>
+          <a:ln/>
+        </p:spPr>
+        <p:txBody>
+          <a:bodyPr wrap="square" lIns="0" tIns="0" rIns="0" bIns="0" rtlCol="0" anchor="ctr"/>
+          <a:lstStyle/>
+          <a:p>
+            <a:pPr indent="0" marL="0">
+              <a:buNone/>
+            </a:pPr>
+            <a:r>
+              <a:rPr lang="en-US" sz="1300" dirty="0">
+                <a:solidFill>
+                  <a:schemeClr val="tx1"/>
+                </a:solidFill>
+              </a:rPr>
+              <a:t>RACI, charte du comité, plan d'exécution novembre à janvier</a:t>
+            </a:r>
+            <a:endParaRPr lang="en-US" sz="1300" dirty="0"/>
+          </a:p>
+        </p:txBody>
+      </p:sp>
+      <p:sp>
+        <p:nvSpPr>
+          <p:cNvPr id="25" name="Slide Number Placeholder 0"/>
+          <p:cNvSpPr>
+            <a:spLocks noGrp="1"/>
+          </p:cNvSpPr>
+          <p:nvPr>
+            <p:ph type="sldNum" sz="quarter" idx="4294967295"/>
+          </p:nvPr>
+        </p:nvSpPr>
+        <p:spPr>
+          <a:xfrm>
+            <a:off x="8229600" y="4800600"/>
+            <a:ext cx="457200" cy="228600"/>
+          </a:xfrm>
+          <a:prstGeom prst="rect">
+            <a:avLst/>
+          </a:prstGeom>
+          <a:extLst>
+            <a:ext uri="{C572A759-6A51-4108-AA02-DFA0A04FC94B}">
+              <ma14:wrappingTextBoxFlag xmlns:ma14="http://schemas.microsoft.com/office/mac/drawingml/2011/main" val="0"/>
+            </a:ext>
+          </a:extLst>
+        </p:spPr>
+        <p:txBody>
+          <a:bodyPr lIns="0" tIns="0" rIns="0" bIns="0"/>
+          <a:lstStyle>
+            <a:lvl1pPr>
+              <a:defRPr sz="1000">
+                <a:solidFill>
+                  <a:schemeClr val="accent6"/>
+                </a:solidFill>
+              </a:defRPr>
+            </a:lvl1pPr>
+          </a:lstStyle>
+          <a:p>
+            <a:pPr algn="r"/>
+            <a:fld id="{F7021451-1387-4CA6-816F-3879F97B5CBC}" type="slidenum">
+              <a:rPr b="0" lang="en-US"/>
+              <a:t>10</a:t>
+            </a:fld>
+            <a:endParaRPr lang="en-US"/>
+          </a:p>
+        </p:txBody>
+      </p:sp>
+    </p:spTree>
+  </p:cSld>
+  <p:clrMapOvr>
+    <a:masterClrMapping/>
+  </p:clrMapOvr>
+</p:sld>
+</file>
+
+<file path=ppt/slides/slide11.xml><?xml version="1.0" encoding="utf-8"?>
+<p:sld xmlns:a="http://schemas.openxmlformats.org/drawingml/2006/main" xmlns:r="http://schemas.openxmlformats.org/officeDocument/2006/relationships" xmlns:p="http://schemas.openxmlformats.org/presentationml/2006/main">
+  <p:cSld name="Slide 11">
+    <p:spTree>
+      <p:nvGrpSpPr>
+        <p:cNvPr id="1" name=""/>
+        <p:cNvGrpSpPr/>
+        <p:nvPr/>
+      </p:nvGrpSpPr>
+      <p:grpSpPr>
+        <a:xfrm>
+          <a:off x="0" y="0"/>
+          <a:ext cx="0" cy="0"/>
+          <a:chOff x="0" y="0"/>
+          <a:chExt cx="0" cy="0"/>
+        </a:xfrm>
+      </p:grpSpPr>
+      <p:sp>
+        <p:nvSpPr>
+          <p:cNvPr id="2" name="Titre"/>
+          <p:cNvSpPr txBox="1"/>
+          <p:nvPr/>
+        </p:nvSpPr>
+        <p:spPr>
+          <a:xfrm>
+            <a:off x="457200" y="274320"/>
+            <a:ext cx="8229600" cy="640080"/>
+          </a:xfrm>
+          <a:prstGeom prst="rect">
+            <a:avLst/>
+          </a:prstGeom>
+          <a:noFill/>
+          <a:ln/>
+        </p:spPr>
+        <p:txBody>
+          <a:bodyPr wrap="square" lIns="0" tIns="0" rIns="0" bIns="0" rtlCol="0" anchor="ctr"/>
+          <a:lstStyle/>
+          <a:p>
+            <a:pPr indent="0" marL="0">
+              <a:buNone/>
+            </a:pPr>
+            <a:r>
+              <a:rPr lang="en-US" sz="3000" b="1" dirty="0">
+                <a:solidFill>
+                  <a:schemeClr val="tx2"/>
+                </a:solidFill>
+                <a:latin typeface="Cambria" pitchFamily="34" charset="0"/>
+                <a:ea typeface="Cambria" pitchFamily="34" charset="-122"/>
+                <a:cs typeface="Cambria" pitchFamily="34" charset="-120"/>
+              </a:rPr>
               <a:t>Suite : novembre à janvier</a:t>
             </a:r>
             <a:endParaRPr lang="en-US" sz="3000" dirty="0"/>
@@ -2246,7 +3437,7 @@
       </p:sp>
       <p:graphicFrame>
         <p:nvGraphicFramePr>
-          <p:cNvPr id="11" name="Table 0"/>
+          <p:cNvPr id="12" name="Table 0"/>
           <p:cNvGraphicFramePr>
             <a:graphicFrameLocks noGrp="1"/>
           </p:cNvGraphicFramePr>
@@ -2527,7 +3718,7 @@
                             <a:schemeClr val="tx1"/>
                           </a:solidFill>
                         </a:rPr>
-                        <a:t>3 gabarits restants (Communication, Communauté, Extranet)</a:t>
+                        <a:t>4 gabarits restants (Projet, Communication, Communauté, Extranet)</a:t>
                       </a:r>
                       <a:endParaRPr lang="en-US" sz="1300" dirty="0"/>
                     </a:p>
@@ -2585,7 +3776,7 @@
                             <a:schemeClr val="tx1"/>
                           </a:solidFill>
                         </a:rPr>
-                        <a:t>6 à 9 j-p</a:t>
+                        <a:t>8 à 12 j-p</a:t>
                       </a:r>
                       <a:endParaRPr lang="en-US" sz="1300" dirty="0"/>
                     </a:p>
@@ -3018,7 +4209,7 @@
                   <a:schemeClr val="accent1"/>
                 </a:solidFill>
               </a:rPr>
-              <a:t>Ordres de grandeur à affiner avec le rapport de surpartage et l'inventaire.</a:t>
+              <a:t>Ordres de grandeur à affiner. À 3 personnes, la suite dépasse 4 mois : prévoir du renfort TI ou un phasage plus long.</a:t>
             </a:r>
             <a:endParaRPr lang="en-US" sz="1200" dirty="0"/>
           </a:p>
@@ -3063,7 +4254,7 @@
             <a:pPr algn="r"/>
             <a:fld id="{F7021451-1387-4CA6-816F-3879F97B5CBC}" type="slidenum">
               <a:rPr b="0" lang="en-US"/>
-              <a:t>10</a:t>
+              <a:t>11</a:t>
             </a:fld>
             <a:endParaRPr lang="en-US"/>
           </a:p>
@@ -3077,9 +4268,9 @@
 </p:sld>
 </file>
 
-<file path=ppt/slides/slide11.xml><?xml version="1.0" encoding="utf-8"?>
+<file path=ppt/slides/slide12.xml><?xml version="1.0" encoding="utf-8"?>
 <p:sld xmlns:a="http://schemas.openxmlformats.org/drawingml/2006/main" xmlns:r="http://schemas.openxmlformats.org/officeDocument/2006/relationships" xmlns:p="http://schemas.openxmlformats.org/presentationml/2006/main">
-  <p:cSld name="Slide 11">
+  <p:cSld name="Slide 12">
     <p:spTree>
       <p:nvGrpSpPr>
         <p:cNvPr id="1" name=""/>
@@ -3232,7 +4423,7 @@
         <p:spPr>
           <a:xfrm>
             <a:off x="1280160" y="1554480"/>
-            <a:ext cx="5943600" cy="457200"/>
+            <a:ext cx="6766560" cy="548640"/>
           </a:xfrm>
           <a:prstGeom prst="rect">
             <a:avLst/>
@@ -3248,14 +4439,14 @@
               <a:buNone/>
             </a:pPr>
             <a:r>
-              <a:rPr lang="en-US" sz="1600" dirty="0">
+              <a:rPr lang="en-US" sz="1500" dirty="0">
                 <a:solidFill>
                   <a:schemeClr val="bg1"/>
                 </a:solidFill>
               </a:rPr>
               <a:t>Réserver les 8 rencontres aux dates proposées</a:t>
             </a:r>
-            <a:endParaRPr lang="en-US" sz="1600" dirty="0"/>
+            <a:endParaRPr lang="en-US" sz="1500" dirty="0"/>
           </a:p>
         </p:txBody>
       </p:sp>
@@ -3329,7 +4520,7 @@
         <p:spPr>
           <a:xfrm>
             <a:off x="1280160" y="2286000"/>
-            <a:ext cx="5943600" cy="457200"/>
+            <a:ext cx="6766560" cy="548640"/>
           </a:xfrm>
           <a:prstGeom prst="rect">
             <a:avLst/>
@@ -3345,14 +4536,14 @@
               <a:buNone/>
             </a:pPr>
             <a:r>
-              <a:rPr lang="en-US" sz="1600" dirty="0">
+              <a:rPr lang="en-US" sz="1500" dirty="0">
                 <a:solidFill>
                   <a:schemeClr val="bg1"/>
                 </a:solidFill>
               </a:rPr>
-              <a:t>Mobiliser 2 à 3 personnes TI à temps plein pour les lots 1 à 9</a:t>
+              <a:t>Confirmer la capacité de l'équipe (30 h, 30 h, 21 h par semaine) et l'appui sécurité, gestion documentaire et TI (~48 h)</a:t>
             </a:r>
-            <a:endParaRPr lang="en-US" sz="1600" dirty="0"/>
+            <a:endParaRPr lang="en-US" sz="1500" dirty="0"/>
           </a:p>
         </p:txBody>
       </p:sp>
@@ -3426,7 +4617,7 @@
         <p:spPr>
           <a:xfrm>
             <a:off x="1280160" y="3017520"/>
-            <a:ext cx="5943600" cy="457200"/>
+            <a:ext cx="6766560" cy="548640"/>
           </a:xfrm>
           <a:prstGeom prst="rect">
             <a:avLst/>
@@ -3442,14 +4633,14 @@
               <a:buNone/>
             </a:pPr>
             <a:r>
-              <a:rPr lang="en-US" sz="1600" dirty="0">
+              <a:rPr lang="en-US" sz="1500" dirty="0">
                 <a:solidFill>
                   <a:schemeClr val="bg1"/>
                 </a:solidFill>
               </a:rPr>
-              <a:t>Fournir un environnement de test pour les lots 2 à 5</a:t>
+              <a:t>Fournir un environnement de test et les droits d'administration</a:t>
             </a:r>
-            <a:endParaRPr lang="en-US" sz="1600" dirty="0"/>
+            <a:endParaRPr lang="en-US" sz="1500" dirty="0"/>
           </a:p>
         </p:txBody>
       </p:sp>
@@ -3523,7 +4714,7 @@
         <p:spPr>
           <a:xfrm>
             <a:off x="1280160" y="3749040"/>
-            <a:ext cx="5943600" cy="457200"/>
+            <a:ext cx="6766560" cy="548640"/>
           </a:xfrm>
           <a:prstGeom prst="rect">
             <a:avLst/>
@@ -3539,14 +4730,14 @@
               <a:buNone/>
             </a:pPr>
             <a:r>
-              <a:rPr lang="en-US" sz="1600" dirty="0">
+              <a:rPr lang="en-US" sz="1500" dirty="0">
                 <a:solidFill>
                   <a:schemeClr val="bg1"/>
                 </a:solidFill>
               </a:rPr>
               <a:t>Réserver le comité exécutif du 30 octobre pour la décision d'exécution</a:t>
             </a:r>
-            <a:endParaRPr lang="en-US" sz="1600" dirty="0"/>
+            <a:endParaRPr lang="en-US" sz="1500" dirty="0"/>
           </a:p>
         </p:txBody>
       </p:sp>
@@ -3674,7 +4865,7 @@
                 <a:ea typeface="Cambria" pitchFamily="34" charset="-122"/>
                 <a:cs typeface="Cambria" pitchFamily="34" charset="-120"/>
               </a:rPr>
-              <a:t>8</a:t>
+              <a:t>10,5 h</a:t>
             </a:r>
             <a:endParaRPr lang="en-US" sz="4000" dirty="0"/>
           </a:p>
@@ -3710,7 +4901,7 @@
                   <a:schemeClr val="tx1"/>
                 </a:solidFill>
               </a:rPr>
-              <a:t>rencontres, environ 12 h (au lieu de 18)</a:t>
+              <a:t>en 8 rencontres (au lieu de 31 h)</a:t>
             </a:r>
             <a:endParaRPr lang="en-US" sz="1300" dirty="0"/>
           </a:p>
@@ -3878,7 +5069,7 @@
                 <a:ea typeface="Cambria" pitchFamily="34" charset="-122"/>
                 <a:cs typeface="Cambria" pitchFamily="34" charset="-120"/>
               </a:rPr>
-              <a:t>≈ 42</a:t>
+              <a:t>254 h</a:t>
             </a:r>
             <a:endParaRPr lang="en-US" sz="4000" dirty="0"/>
           </a:p>
@@ -3914,7 +5105,7 @@
                   <a:schemeClr val="tx1"/>
                 </a:solidFill>
               </a:rPr>
-              <a:t>jours-personne sur 16 jours ouvrables</a:t>
+              <a:t>de travail planifié, sur 259 h de capacité</a:t>
             </a:r>
             <a:endParaRPr lang="en-US" sz="1300" dirty="0"/>
           </a:p>
@@ -4030,8 +5221,8 @@
         </p:nvSpPr>
         <p:spPr>
           <a:xfrm>
-            <a:off x="457200" y="3108960"/>
-            <a:ext cx="8229600" cy="1463040"/>
+            <a:off x="457200" y="3063240"/>
+            <a:ext cx="8229600" cy="1645920"/>
           </a:xfrm>
           <a:prstGeom prst="rect">
             <a:avLst/>
@@ -4051,14 +5242,14 @@
               <a:buChar char="•"/>
             </a:pPr>
             <a:r>
-              <a:rPr lang="en-US" sz="1500" dirty="0">
+              <a:rPr lang="en-US" sz="1400" dirty="0">
                 <a:solidFill>
                   <a:schemeClr val="tx1"/>
                 </a:solidFill>
               </a:rPr>
               <a:t>Les rencontres servent à décider, valider et débloquer, pas à produire</a:t>
             </a:r>
-            <a:endParaRPr lang="en-US" sz="1500" dirty="0"/>
+            <a:endParaRPr lang="en-US" sz="1400" dirty="0"/>
           </a:p>
           <a:p>
             <a:pPr marL="342900" indent="-342900">
@@ -4069,14 +5260,14 @@
               <a:buChar char="•"/>
             </a:pPr>
             <a:r>
-              <a:rPr lang="en-US" sz="1500" dirty="0">
+              <a:rPr lang="en-US" sz="1400" dirty="0">
                 <a:solidFill>
                   <a:schemeClr val="tx1"/>
                 </a:solidFill>
               </a:rPr>
               <a:t>Préparation écrite : documents d'options de 2 pages envoyés 48 h avant</a:t>
             </a:r>
-            <a:endParaRPr lang="en-US" sz="1500" dirty="0"/>
+            <a:endParaRPr lang="en-US" sz="1400" dirty="0"/>
           </a:p>
           <a:p>
             <a:pPr marL="342900" indent="-342900">
@@ -4087,14 +5278,14 @@
               <a:buChar char="•"/>
             </a:pPr>
             <a:r>
-              <a:rPr lang="en-US" sz="1500" dirty="0">
+              <a:rPr lang="en-US" sz="1400" dirty="0">
                 <a:solidFill>
                   <a:schemeClr val="tx1"/>
                 </a:solidFill>
               </a:rPr>
               <a:t>Décisions de détail par courriel sous 24 h</a:t>
             </a:r>
-            <a:endParaRPr lang="en-US" sz="1500" dirty="0"/>
+            <a:endParaRPr lang="en-US" sz="1400" dirty="0"/>
           </a:p>
           <a:p>
             <a:pPr marL="342900" indent="-342900">
@@ -4105,14 +5296,32 @@
               <a:buChar char="•"/>
             </a:pPr>
             <a:r>
-              <a:rPr lang="en-US" sz="1500" dirty="0">
+              <a:rPr lang="en-US" sz="1400" dirty="0">
+                <a:solidFill>
+                  <a:schemeClr val="tx1"/>
+                </a:solidFill>
+              </a:rPr>
+              <a:t>Équipe : 2 architectes à 30 h/sem. et un chargé de projet à 21 h/sem.</a:t>
+            </a:r>
+            <a:endParaRPr lang="en-US" sz="1400" dirty="0"/>
+          </a:p>
+          <a:p>
+            <a:pPr marL="342900" indent="-342900">
+              <a:spcAft>
+                <a:spcPts val="400"/>
+              </a:spcAft>
+              <a:buSzPct val="100000"/>
+              <a:buChar char="•"/>
+            </a:pPr>
+            <a:r>
+              <a:rPr lang="en-US" sz="1400" dirty="0">
                 <a:solidFill>
                   <a:schemeClr val="tx1"/>
                 </a:solidFill>
               </a:rPr>
               <a:t>Configurations testées d'abord en environnement de test, activées en production après validation du sponsor</a:t>
             </a:r>
-            <a:endParaRPr lang="en-US" sz="1500" dirty="0"/>
+            <a:endParaRPr lang="en-US" sz="1400" dirty="0"/>
           </a:p>
         </p:txBody>
       </p:sp>
@@ -5428,15 +6637,538 @@
                 <a:ea typeface="Cambria" pitchFamily="34" charset="-122"/>
                 <a:cs typeface="Cambria" pitchFamily="34" charset="-120"/>
               </a:rPr>
-              <a:t>Huit rencontres, environ 12 heures</a:t>
+              <a:t>Une équipe de trois, des rôles clairs</a:t>
             </a:r>
             <a:endParaRPr lang="en-US" sz="3000" dirty="0"/>
           </a:p>
         </p:txBody>
       </p:sp>
+      <p:sp>
+        <p:nvSpPr>
+          <p:cNvPr id="3" name="Carte rôle"/>
+          <p:cNvSpPr/>
+          <p:nvPr/>
+        </p:nvSpPr>
+        <p:spPr>
+          <a:xfrm>
+            <a:off x="457200" y="1097280"/>
+            <a:ext cx="2651760" cy="3383280"/>
+          </a:xfrm>
+          <a:prstGeom prst="roundRect">
+            <a:avLst>
+              <a:gd name="adj" fmla="val 2759"/>
+            </a:avLst>
+          </a:prstGeom>
+          <a:solidFill>
+            <a:schemeClr val="bg2"/>
+          </a:solidFill>
+          <a:ln w="12700">
+            <a:solidFill>
+              <a:schemeClr val="bg2"/>
+            </a:solidFill>
+            <a:prstDash val="solid"/>
+          </a:ln>
+        </p:spPr>
+      </p:sp>
+      <p:sp>
+        <p:nvSpPr>
+          <p:cNvPr id="4" name="Text 2"/>
+          <p:cNvSpPr txBox="1"/>
+          <p:nvPr/>
+        </p:nvSpPr>
+        <p:spPr>
+          <a:xfrm>
+            <a:off x="594360" y="1234440"/>
+            <a:ext cx="2377440" cy="640080"/>
+          </a:xfrm>
+          <a:prstGeom prst="rect">
+            <a:avLst/>
+          </a:prstGeom>
+          <a:noFill/>
+          <a:ln/>
+        </p:spPr>
+        <p:txBody>
+          <a:bodyPr wrap="square" lIns="0" tIns="0" rIns="0" bIns="0" rtlCol="0" anchor="t"/>
+          <a:lstStyle/>
+          <a:p>
+            <a:pPr indent="0" marL="0">
+              <a:buNone/>
+            </a:pPr>
+            <a:r>
+              <a:rPr lang="en-US" sz="1700" b="1" dirty="0">
+                <a:solidFill>
+                  <a:schemeClr val="tx2"/>
+                </a:solidFill>
+                <a:latin typeface="Cambria" pitchFamily="34" charset="0"/>
+                <a:ea typeface="Cambria" pitchFamily="34" charset="-122"/>
+                <a:cs typeface="Cambria" pitchFamily="34" charset="-120"/>
+              </a:rPr>
+              <a:t>Architecte applicatif</a:t>
+            </a:r>
+            <a:endParaRPr lang="en-US" sz="1700" dirty="0"/>
+          </a:p>
+        </p:txBody>
+      </p:sp>
+      <p:sp>
+        <p:nvSpPr>
+          <p:cNvPr id="5" name="Text 3"/>
+          <p:cNvSpPr txBox="1"/>
+          <p:nvPr/>
+        </p:nvSpPr>
+        <p:spPr>
+          <a:xfrm>
+            <a:off x="594360" y="1874520"/>
+            <a:ext cx="2377440" cy="365760"/>
+          </a:xfrm>
+          <a:prstGeom prst="rect">
+            <a:avLst/>
+          </a:prstGeom>
+          <a:noFill/>
+          <a:ln/>
+        </p:spPr>
+        <p:txBody>
+          <a:bodyPr wrap="square" lIns="0" tIns="0" rIns="0" bIns="0" rtlCol="0" anchor="ctr"/>
+          <a:lstStyle/>
+          <a:p>
+            <a:pPr indent="0" marL="0">
+              <a:buNone/>
+            </a:pPr>
+            <a:r>
+              <a:rPr lang="en-US" sz="2200" b="1" dirty="0">
+                <a:solidFill>
+                  <a:schemeClr val="accent1"/>
+                </a:solidFill>
+              </a:rPr>
+              <a:t>30 h/sem.</a:t>
+            </a:r>
+            <a:endParaRPr lang="en-US" sz="2200" dirty="0"/>
+          </a:p>
+        </p:txBody>
+      </p:sp>
+      <p:sp>
+        <p:nvSpPr>
+          <p:cNvPr id="6" name="Text 4"/>
+          <p:cNvSpPr txBox="1"/>
+          <p:nvPr/>
+        </p:nvSpPr>
+        <p:spPr>
+          <a:xfrm>
+            <a:off x="594360" y="2377440"/>
+            <a:ext cx="2377440" cy="2011680"/>
+          </a:xfrm>
+          <a:prstGeom prst="rect">
+            <a:avLst/>
+          </a:prstGeom>
+          <a:noFill/>
+          <a:ln/>
+        </p:spPr>
+        <p:txBody>
+          <a:bodyPr wrap="square" lIns="0" tIns="0" rIns="0" bIns="0" rtlCol="0" anchor="t"/>
+          <a:lstStyle/>
+          <a:p>
+            <a:pPr indent="0" marL="0">
+              <a:buNone/>
+            </a:pPr>
+            <a:r>
+              <a:rPr lang="en-US" sz="1300" dirty="0">
+                <a:solidFill>
+                  <a:schemeClr val="tx1"/>
+                </a:solidFill>
+              </a:rPr>
+              <a:t>Prototype du portail (Power Apps, Power Automate, Graph), gabarits SharePoint et Teams, étiquettes et rétention, registre des espaces</a:t>
+            </a:r>
+            <a:endParaRPr lang="en-US" sz="1300" dirty="0"/>
+          </a:p>
+        </p:txBody>
+      </p:sp>
+      <p:sp>
+        <p:nvSpPr>
+          <p:cNvPr id="7" name="Carte rôle"/>
+          <p:cNvSpPr/>
+          <p:nvPr/>
+        </p:nvSpPr>
+        <p:spPr>
+          <a:xfrm>
+            <a:off x="3246120" y="1097280"/>
+            <a:ext cx="2651760" cy="3383280"/>
+          </a:xfrm>
+          <a:prstGeom prst="roundRect">
+            <a:avLst>
+              <a:gd name="adj" fmla="val 2759"/>
+            </a:avLst>
+          </a:prstGeom>
+          <a:solidFill>
+            <a:schemeClr val="tx2"/>
+          </a:solidFill>
+          <a:ln w="12700">
+            <a:solidFill>
+              <a:schemeClr val="tx2"/>
+            </a:solidFill>
+            <a:prstDash val="solid"/>
+          </a:ln>
+        </p:spPr>
+      </p:sp>
+      <p:sp>
+        <p:nvSpPr>
+          <p:cNvPr id="8" name="Text 6"/>
+          <p:cNvSpPr txBox="1"/>
+          <p:nvPr/>
+        </p:nvSpPr>
+        <p:spPr>
+          <a:xfrm>
+            <a:off x="3383280" y="1234440"/>
+            <a:ext cx="2377440" cy="640080"/>
+          </a:xfrm>
+          <a:prstGeom prst="rect">
+            <a:avLst/>
+          </a:prstGeom>
+          <a:noFill/>
+          <a:ln/>
+        </p:spPr>
+        <p:txBody>
+          <a:bodyPr wrap="square" lIns="0" tIns="0" rIns="0" bIns="0" rtlCol="0" anchor="t"/>
+          <a:lstStyle/>
+          <a:p>
+            <a:pPr indent="0" marL="0">
+              <a:buNone/>
+            </a:pPr>
+            <a:r>
+              <a:rPr lang="en-US" sz="1700" b="1" dirty="0">
+                <a:solidFill>
+                  <a:schemeClr val="accent2"/>
+                </a:solidFill>
+                <a:latin typeface="Cambria" pitchFamily="34" charset="0"/>
+                <a:ea typeface="Cambria" pitchFamily="34" charset="-122"/>
+                <a:cs typeface="Cambria" pitchFamily="34" charset="-120"/>
+              </a:rPr>
+              <a:t>Architecte technologique</a:t>
+            </a:r>
+            <a:endParaRPr lang="en-US" sz="1700" dirty="0"/>
+          </a:p>
+        </p:txBody>
+      </p:sp>
+      <p:sp>
+        <p:nvSpPr>
+          <p:cNvPr id="9" name="Text 7"/>
+          <p:cNvSpPr txBox="1"/>
+          <p:nvPr/>
+        </p:nvSpPr>
+        <p:spPr>
+          <a:xfrm>
+            <a:off x="3383280" y="1874520"/>
+            <a:ext cx="2377440" cy="365760"/>
+          </a:xfrm>
+          <a:prstGeom prst="rect">
+            <a:avLst/>
+          </a:prstGeom>
+          <a:noFill/>
+          <a:ln/>
+        </p:spPr>
+        <p:txBody>
+          <a:bodyPr wrap="square" lIns="0" tIns="0" rIns="0" bIns="0" rtlCol="0" anchor="ctr"/>
+          <a:lstStyle/>
+          <a:p>
+            <a:pPr indent="0" marL="0">
+              <a:buNone/>
+            </a:pPr>
+            <a:r>
+              <a:rPr lang="en-US" sz="2200" b="1" dirty="0">
+                <a:solidFill>
+                  <a:schemeClr val="accent1"/>
+                </a:solidFill>
+              </a:rPr>
+              <a:t>30 h/sem.</a:t>
+            </a:r>
+            <a:endParaRPr lang="en-US" sz="2200" dirty="0"/>
+          </a:p>
+        </p:txBody>
+      </p:sp>
+      <p:sp>
+        <p:nvSpPr>
+          <p:cNvPr id="10" name="Text 8"/>
+          <p:cNvSpPr txBox="1"/>
+          <p:nvPr/>
+        </p:nvSpPr>
+        <p:spPr>
+          <a:xfrm>
+            <a:off x="3383280" y="2377440"/>
+            <a:ext cx="2377440" cy="2011680"/>
+          </a:xfrm>
+          <a:prstGeom prst="rect">
+            <a:avLst/>
+          </a:prstGeom>
+          <a:noFill/>
+          <a:ln/>
+        </p:spPr>
+        <p:txBody>
+          <a:bodyPr wrap="square" lIns="0" tIns="0" rIns="0" bIns="0" rtlCol="0" anchor="t"/>
+          <a:lstStyle/>
+          <a:p>
+            <a:pPr indent="0" marL="0">
+              <a:buNone/>
+            </a:pPr>
+            <a:r>
+              <a:rPr lang="en-US" sz="1300" dirty="0">
+                <a:solidFill>
+                  <a:schemeClr val="bg1"/>
+                </a:solidFill>
+              </a:rPr>
+              <a:t>Inventaire du tenant, blocage de la création libre, partage externe, rapport de surpartage, accès conditionnel, identités applicatives</a:t>
+            </a:r>
+            <a:endParaRPr lang="en-US" sz="1300" dirty="0"/>
+          </a:p>
+        </p:txBody>
+      </p:sp>
+      <p:sp>
+        <p:nvSpPr>
+          <p:cNvPr id="11" name="Carte rôle"/>
+          <p:cNvSpPr/>
+          <p:nvPr/>
+        </p:nvSpPr>
+        <p:spPr>
+          <a:xfrm>
+            <a:off x="6035040" y="1097280"/>
+            <a:ext cx="2651760" cy="3383280"/>
+          </a:xfrm>
+          <a:prstGeom prst="roundRect">
+            <a:avLst>
+              <a:gd name="adj" fmla="val 2759"/>
+            </a:avLst>
+          </a:prstGeom>
+          <a:solidFill>
+            <a:schemeClr val="bg2"/>
+          </a:solidFill>
+          <a:ln w="12700">
+            <a:solidFill>
+              <a:schemeClr val="bg2"/>
+            </a:solidFill>
+            <a:prstDash val="solid"/>
+          </a:ln>
+        </p:spPr>
+      </p:sp>
+      <p:sp>
+        <p:nvSpPr>
+          <p:cNvPr id="12" name="Text 10"/>
+          <p:cNvSpPr txBox="1"/>
+          <p:nvPr/>
+        </p:nvSpPr>
+        <p:spPr>
+          <a:xfrm>
+            <a:off x="6172200" y="1234440"/>
+            <a:ext cx="2377440" cy="640080"/>
+          </a:xfrm>
+          <a:prstGeom prst="rect">
+            <a:avLst/>
+          </a:prstGeom>
+          <a:noFill/>
+          <a:ln/>
+        </p:spPr>
+        <p:txBody>
+          <a:bodyPr wrap="square" lIns="0" tIns="0" rIns="0" bIns="0" rtlCol="0" anchor="t"/>
+          <a:lstStyle/>
+          <a:p>
+            <a:pPr indent="0" marL="0">
+              <a:buNone/>
+            </a:pPr>
+            <a:r>
+              <a:rPr lang="en-US" sz="1700" b="1" dirty="0">
+                <a:solidFill>
+                  <a:schemeClr val="tx2"/>
+                </a:solidFill>
+                <a:latin typeface="Cambria" pitchFamily="34" charset="0"/>
+                <a:ea typeface="Cambria" pitchFamily="34" charset="-122"/>
+                <a:cs typeface="Cambria" pitchFamily="34" charset="-120"/>
+              </a:rPr>
+              <a:t>Chargé de projet</a:t>
+            </a:r>
+            <a:endParaRPr lang="en-US" sz="1700" dirty="0"/>
+          </a:p>
+        </p:txBody>
+      </p:sp>
+      <p:sp>
+        <p:nvSpPr>
+          <p:cNvPr id="13" name="Text 11"/>
+          <p:cNvSpPr txBox="1"/>
+          <p:nvPr/>
+        </p:nvSpPr>
+        <p:spPr>
+          <a:xfrm>
+            <a:off x="6172200" y="1874520"/>
+            <a:ext cx="2377440" cy="365760"/>
+          </a:xfrm>
+          <a:prstGeom prst="rect">
+            <a:avLst/>
+          </a:prstGeom>
+          <a:noFill/>
+          <a:ln/>
+        </p:spPr>
+        <p:txBody>
+          <a:bodyPr wrap="square" lIns="0" tIns="0" rIns="0" bIns="0" rtlCol="0" anchor="ctr"/>
+          <a:lstStyle/>
+          <a:p>
+            <a:pPr indent="0" marL="0">
+              <a:buNone/>
+            </a:pPr>
+            <a:r>
+              <a:rPr lang="en-US" sz="2200" b="1" dirty="0">
+                <a:solidFill>
+                  <a:schemeClr val="accent1"/>
+                </a:solidFill>
+              </a:rPr>
+              <a:t>21 h/sem.</a:t>
+            </a:r>
+            <a:endParaRPr lang="en-US" sz="2200" dirty="0"/>
+          </a:p>
+        </p:txBody>
+      </p:sp>
+      <p:sp>
+        <p:nvSpPr>
+          <p:cNvPr id="14" name="Text 12"/>
+          <p:cNvSpPr txBox="1"/>
+          <p:nvPr/>
+        </p:nvSpPr>
+        <p:spPr>
+          <a:xfrm>
+            <a:off x="6172200" y="2377440"/>
+            <a:ext cx="2377440" cy="2011680"/>
+          </a:xfrm>
+          <a:prstGeom prst="rect">
+            <a:avLst/>
+          </a:prstGeom>
+          <a:noFill/>
+          <a:ln/>
+        </p:spPr>
+        <p:txBody>
+          <a:bodyPr wrap="square" lIns="0" tIns="0" rIns="0" bIns="0" rtlCol="0" anchor="t"/>
+          <a:lstStyle/>
+          <a:p>
+            <a:pPr indent="0" marL="0">
+              <a:buNone/>
+            </a:pPr>
+            <a:r>
+              <a:rPr lang="en-US" sz="1300" dirty="0">
+                <a:solidFill>
+                  <a:schemeClr val="tx1"/>
+                </a:solidFill>
+              </a:rPr>
+              <a:t>Pilotage et comités, recette du prototype, spécifications du catalogue, coordination sécurité / gestion documentaire / juridique, documentation</a:t>
+            </a:r>
+            <a:endParaRPr lang="en-US" sz="1300" dirty="0"/>
+          </a:p>
+        </p:txBody>
+      </p:sp>
+      <p:sp>
+        <p:nvSpPr>
+          <p:cNvPr id="25" name="Slide Number Placeholder 0"/>
+          <p:cNvSpPr>
+            <a:spLocks noGrp="1"/>
+          </p:cNvSpPr>
+          <p:nvPr>
+            <p:ph type="sldNum" sz="quarter" idx="4294967295"/>
+          </p:nvPr>
+        </p:nvSpPr>
+        <p:spPr>
+          <a:xfrm>
+            <a:off x="8229600" y="4800600"/>
+            <a:ext cx="457200" cy="228600"/>
+          </a:xfrm>
+          <a:prstGeom prst="rect">
+            <a:avLst/>
+          </a:prstGeom>
+          <a:extLst>
+            <a:ext uri="{C572A759-6A51-4108-AA02-DFA0A04FC94B}">
+              <ma14:wrappingTextBoxFlag xmlns:ma14="http://schemas.microsoft.com/office/mac/drawingml/2011/main" val="0"/>
+            </a:ext>
+          </a:extLst>
+        </p:spPr>
+        <p:txBody>
+          <a:bodyPr lIns="0" tIns="0" rIns="0" bIns="0"/>
+          <a:lstStyle>
+            <a:lvl1pPr>
+              <a:defRPr sz="1000">
+                <a:solidFill>
+                  <a:schemeClr val="accent6"/>
+                </a:solidFill>
+              </a:defRPr>
+            </a:lvl1pPr>
+          </a:lstStyle>
+          <a:p>
+            <a:pPr algn="r"/>
+            <a:fld id="{F7021451-1387-4CA6-816F-3879F97B5CBC}" type="slidenum">
+              <a:rPr b="0" lang="en-US"/>
+              <a:t>4</a:t>
+            </a:fld>
+            <a:endParaRPr lang="en-US"/>
+          </a:p>
+        </p:txBody>
+      </p:sp>
+    </p:spTree>
+  </p:cSld>
+  <p:clrMapOvr>
+    <a:masterClrMapping/>
+  </p:clrMapOvr>
+</p:sld>
+</file>
+
+<file path=ppt/slides/slide5.xml><?xml version="1.0" encoding="utf-8"?>
+<p:sld xmlns:a="http://schemas.openxmlformats.org/drawingml/2006/main" xmlns:r="http://schemas.openxmlformats.org/officeDocument/2006/relationships" xmlns:p="http://schemas.openxmlformats.org/presentationml/2006/main">
+  <p:cSld name="Slide 5">
+    <p:spTree>
+      <p:nvGrpSpPr>
+        <p:cNvPr id="1" name=""/>
+        <p:cNvGrpSpPr/>
+        <p:nvPr/>
+      </p:nvGrpSpPr>
+      <p:grpSpPr>
+        <a:xfrm>
+          <a:off x="0" y="0"/>
+          <a:ext cx="0" cy="0"/>
+          <a:chOff x="0" y="0"/>
+          <a:chExt cx="0" cy="0"/>
+        </a:xfrm>
+      </p:grpSpPr>
+      <p:sp>
+        <p:nvSpPr>
+          <p:cNvPr id="2" name="Titre"/>
+          <p:cNvSpPr txBox="1"/>
+          <p:nvPr/>
+        </p:nvSpPr>
+        <p:spPr>
+          <a:xfrm>
+            <a:off x="457200" y="274320"/>
+            <a:ext cx="8229600" cy="640080"/>
+          </a:xfrm>
+          <a:prstGeom prst="rect">
+            <a:avLst/>
+          </a:prstGeom>
+          <a:noFill/>
+          <a:ln/>
+        </p:spPr>
+        <p:txBody>
+          <a:bodyPr wrap="square" lIns="0" tIns="0" rIns="0" bIns="0" rtlCol="0" anchor="ctr"/>
+          <a:lstStyle/>
+          <a:p>
+            <a:pPr indent="0" marL="0">
+              <a:buNone/>
+            </a:pPr>
+            <a:r>
+              <a:rPr lang="en-US" sz="3000" b="1" dirty="0">
+                <a:solidFill>
+                  <a:schemeClr val="tx2"/>
+                </a:solidFill>
+                <a:latin typeface="Cambria" pitchFamily="34" charset="0"/>
+                <a:ea typeface="Cambria" pitchFamily="34" charset="-122"/>
+                <a:cs typeface="Cambria" pitchFamily="34" charset="-120"/>
+              </a:rPr>
+              <a:t>Huit rencontres, 10,5 heures</a:t>
+            </a:r>
+            <a:endParaRPr lang="en-US" sz="3000" dirty="0"/>
+          </a:p>
+        </p:txBody>
+      </p:sp>
       <p:graphicFrame>
         <p:nvGraphicFramePr>
-          <p:cNvPr id="5" name="Table 0"/>
+          <p:cNvPr id="6" name="Table 0"/>
           <p:cNvGraphicFramePr>
             <a:graphicFrameLocks noGrp="1"/>
           </p:cNvGraphicFramePr>
@@ -6017,7 +7749,7 @@
                             <a:schemeClr val="tx1"/>
                           </a:solidFill>
                         </a:rPr>
-                        <a:t>Sponsor, AR, CP, TI, SEC</a:t>
+                        <a:t>Sponsor, AA, AT, CP, SEC</a:t>
                       </a:r>
                       <a:endParaRPr lang="en-US" sz="1100" dirty="0"/>
                     </a:p>
@@ -6309,7 +8041,7 @@
                             <a:schemeClr val="tx1"/>
                           </a:solidFill>
                         </a:rPr>
-                        <a:t>Sponsor, AR, CP, SEC, TI, DIR</a:t>
+                        <a:t>Sponsor, AA, AT, CP, SEC, DIR</a:t>
                       </a:r>
                       <a:endParaRPr lang="en-US" sz="1100" dirty="0"/>
                     </a:p>
@@ -6601,7 +8333,7 @@
                             <a:schemeClr val="tx1"/>
                           </a:solidFill>
                         </a:rPr>
-                        <a:t>Sponsor, CP, AR</a:t>
+                        <a:t>Sponsor, AA, AT, CP</a:t>
                       </a:r>
                       <a:endParaRPr lang="en-US" sz="1100" dirty="0"/>
                     </a:p>
@@ -6893,7 +8625,7 @@
                             <a:schemeClr val="tx1"/>
                           </a:solidFill>
                         </a:rPr>
-                        <a:t>AR, TI, GD, SEC, DIR</a:t>
+                        <a:t>AA, AT, CP, GD, SEC, DIR</a:t>
                       </a:r>
                       <a:endParaRPr lang="en-US" sz="1100" dirty="0"/>
                     </a:p>
@@ -7185,7 +8917,7 @@
                             <a:schemeClr val="tx1"/>
                           </a:solidFill>
                         </a:rPr>
-                        <a:t>AR, SEC, TI, GD, JUR</a:t>
+                        <a:t>AA, AT, CP, SEC, GD, JUR</a:t>
                       </a:r>
                       <a:endParaRPr lang="en-US" sz="1100" dirty="0"/>
                     </a:p>
@@ -7477,7 +9209,7 @@
                             <a:schemeClr val="tx1"/>
                           </a:solidFill>
                         </a:rPr>
-                        <a:t>Sponsor, CP, AR</a:t>
+                        <a:t>Sponsor, AA, AT, CP</a:t>
                       </a:r>
                       <a:endParaRPr lang="en-US" sz="1100" dirty="0"/>
                     </a:p>
@@ -7769,7 +9501,7 @@
                             <a:schemeClr val="tx1"/>
                           </a:solidFill>
                         </a:rPr>
-                        <a:t>AR, CP, TI, SEC, GD, DIR, Sponsor</a:t>
+                        <a:t>AA, AT, CP, TI, SEC, GD, DIR, Sponsor</a:t>
                       </a:r>
                       <a:endParaRPr lang="en-US" sz="1100" dirty="0"/>
                     </a:p>
@@ -8061,7 +9793,7 @@
                             <a:schemeClr val="tx1"/>
                           </a:solidFill>
                         </a:rPr>
-                        <a:t>Comité ADM, Sponsor, AR, CP</a:t>
+                        <a:t>Comité ADM, Sponsor, AA, AT, CP</a:t>
                       </a:r>
                       <a:endParaRPr lang="en-US" sz="1100" dirty="0"/>
                     </a:p>
@@ -8140,7 +9872,7 @@
                   <a:schemeClr val="accent6"/>
                 </a:solidFill>
               </a:rPr>
-              <a:t>AR = architecte M365 · CP = chef de projet · TI = équipe TI M365 · SEC = sécurité · GD = gestion documentaire · JUR = juridique · DIR = directions</a:t>
+              <a:t>AA = architecte applicatif · AT = architecte technologique · CP = chargé de projet · TI = équipe TI M365 · SEC = sécurité · GD = gestion documentaire · JUR = juridique · DIR = directions</a:t>
             </a:r>
             <a:endParaRPr lang="en-US" sz="1000" dirty="0"/>
           </a:p>
@@ -8185,7 +9917,7 @@
             <a:pPr algn="r"/>
             <a:fld id="{F7021451-1387-4CA6-816F-3879F97B5CBC}" type="slidenum">
               <a:rPr b="0" lang="en-US"/>
-              <a:t>4</a:t>
+              <a:t>5</a:t>
             </a:fld>
             <a:endParaRPr lang="en-US"/>
           </a:p>
@@ -8199,9 +9931,9 @@
 </p:sld>
 </file>
 
-<file path=ppt/slides/slide5.xml><?xml version="1.0" encoding="utf-8"?>
+<file path=ppt/slides/slide6.xml><?xml version="1.0" encoding="utf-8"?>
 <p:sld xmlns:a="http://schemas.openxmlformats.org/drawingml/2006/main" xmlns:r="http://schemas.openxmlformats.org/officeDocument/2006/relationships" xmlns:p="http://schemas.openxmlformats.org/presentationml/2006/main">
-  <p:cSld name="Slide 5">
+  <p:cSld name="Slide 6">
     <p:spTree>
       <p:nvGrpSpPr>
         <p:cNvPr id="1" name=""/>
@@ -8257,7 +9989,7 @@
       </p:sp>
       <p:graphicFrame>
         <p:nvGraphicFramePr>
-          <p:cNvPr id="6" name="Table 0"/>
+          <p:cNvPr id="7" name="Table 0"/>
           <p:cNvGraphicFramePr>
             <a:graphicFrameLocks noGrp="1"/>
           </p:cNvGraphicFramePr>
@@ -8281,8 +10013,8 @@
                 <a:gridCol w="457200"/>
                 <a:gridCol w="2103120"/>
                 <a:gridCol w="1463040"/>
-                <a:gridCol w="3657600"/>
-                <a:gridCol w="548640"/>
+                <a:gridCol w="3474720"/>
+                <a:gridCol w="731520"/>
               </a:tblGrid>
               <a:tr h="365760">
                 <a:tc>
@@ -8543,7 +10275,7 @@
                             <a:schemeClr val="bg1"/>
                           </a:solidFill>
                         </a:rPr>
-                        <a:t>j-p</a:t>
+                        <a:t>Heures</a:t>
                       </a:r>
                       <a:endParaRPr lang="en-US" sz="1200" dirty="0"/>
                     </a:p>
@@ -8838,7 +10570,7 @@
                             <a:schemeClr val="tx1"/>
                           </a:solidFill>
                         </a:rPr>
-                        <a:t>4</a:t>
+                        <a:t>21 h</a:t>
                       </a:r>
                       <a:endParaRPr lang="en-US" sz="1200" dirty="0"/>
                     </a:p>
@@ -9130,7 +10862,7 @@
                             <a:schemeClr val="tx1"/>
                           </a:solidFill>
                         </a:rPr>
-                        <a:t>2</a:t>
+                        <a:t>12 h</a:t>
                       </a:r>
                       <a:endParaRPr lang="en-US" sz="1200" dirty="0"/>
                     </a:p>
@@ -9306,7 +11038,7 @@
                             <a:schemeClr val="tx1"/>
                           </a:solidFill>
                         </a:rPr>
-                        <a:t>13 - 26 oct.</a:t>
+                        <a:t>8 - 27 oct.</a:t>
                       </a:r>
                       <a:endParaRPr lang="en-US" sz="1200" dirty="0"/>
                     </a:p>
@@ -9364,7 +11096,7 @@
                             <a:schemeClr val="tx1"/>
                           </a:solidFill>
                         </a:rPr>
-                        <a:t>Une demande de bout en bout crée un espace conforme (2 propriétaires)</a:t>
+                        <a:t>Formulaire, flux d'approbation et création d'un espace de test conforme ; recette</a:t>
                       </a:r>
                       <a:endParaRPr lang="en-US" sz="1200" dirty="0"/>
                     </a:p>
@@ -9422,7 +11154,7 @@
                             <a:schemeClr val="tx1"/>
                           </a:solidFill>
                         </a:rPr>
-                        <a:t>8</a:t>
+                        <a:t>44 h</a:t>
                       </a:r>
                       <a:endParaRPr lang="en-US" sz="1200" dirty="0"/>
                     </a:p>
@@ -9540,7 +11272,7 @@
                             <a:schemeClr val="tx1"/>
                           </a:solidFill>
                         </a:rPr>
-                        <a:t>Gabarits Équipe et Projet (v1)</a:t>
+                        <a:t>Gabarit Équipe (v1)</a:t>
                       </a:r>
                       <a:endParaRPr lang="en-US" sz="1200" dirty="0"/>
                     </a:p>
@@ -9656,7 +11388,7 @@
                             <a:schemeClr val="tx1"/>
                           </a:solidFill>
                         </a:rPr>
-                        <a:t>2 gabarits en code, création en moins de 15 min sans configuration manuelle</a:t>
+                        <a:t>1 gabarit en code (création en moins de 15 min) ; gabarit Projet spécifié</a:t>
                       </a:r>
                       <a:endParaRPr lang="en-US" sz="1200" dirty="0"/>
                     </a:p>
@@ -9714,7 +11446,7 @@
                             <a:schemeClr val="tx1"/>
                           </a:solidFill>
                         </a:rPr>
-                        <a:t>6</a:t>
+                        <a:t>32 h</a:t>
                       </a:r>
                       <a:endParaRPr lang="en-US" sz="1200" dirty="0"/>
                     </a:p>
@@ -10006,7 +11738,7 @@
                             <a:schemeClr val="tx1"/>
                           </a:solidFill>
                         </a:rPr>
-                        <a:t>3</a:t>
+                        <a:t>15 h</a:t>
                       </a:r>
                       <a:endParaRPr lang="en-US" sz="1200" dirty="0"/>
                     </a:p>
@@ -10094,7 +11826,7 @@
             <a:pPr algn="r"/>
             <a:fld id="{F7021451-1387-4CA6-816F-3879F97B5CBC}" type="slidenum">
               <a:rPr b="0" lang="en-US"/>
-              <a:t>5</a:t>
+              <a:t>6</a:t>
             </a:fld>
             <a:endParaRPr lang="en-US"/>
           </a:p>
@@ -10108,9 +11840,9 @@
 </p:sld>
 </file>
 
-<file path=ppt/slides/slide6.xml><?xml version="1.0" encoding="utf-8"?>
+<file path=ppt/slides/slide7.xml><?xml version="1.0" encoding="utf-8"?>
 <p:sld xmlns:a="http://schemas.openxmlformats.org/drawingml/2006/main" xmlns:r="http://schemas.openxmlformats.org/officeDocument/2006/relationships" xmlns:p="http://schemas.openxmlformats.org/presentationml/2006/main">
-  <p:cSld name="Slide 6">
+  <p:cSld name="Slide 7">
     <p:spTree>
       <p:nvGrpSpPr>
         <p:cNvPr id="1" name=""/>
@@ -10166,7 +11898,7 @@
       </p:sp>
       <p:graphicFrame>
         <p:nvGraphicFramePr>
-          <p:cNvPr id="7" name="Table 0"/>
+          <p:cNvPr id="8" name="Table 0"/>
           <p:cNvGraphicFramePr>
             <a:graphicFrameLocks noGrp="1"/>
           </p:cNvGraphicFramePr>
@@ -10190,8 +11922,8 @@
                 <a:gridCol w="457200"/>
                 <a:gridCol w="2103120"/>
                 <a:gridCol w="1463040"/>
-                <a:gridCol w="3657600"/>
-                <a:gridCol w="548640"/>
+                <a:gridCol w="3474720"/>
+                <a:gridCol w="731520"/>
               </a:tblGrid>
               <a:tr h="365760">
                 <a:tc>
@@ -10452,7 +12184,7 @@
                             <a:schemeClr val="bg1"/>
                           </a:solidFill>
                         </a:rPr>
-                        <a:t>j-p</a:t>
+                        <a:t>Heures</a:t>
                       </a:r>
                       <a:endParaRPr lang="en-US" sz="1200" dirty="0"/>
                     </a:p>
@@ -10573,7 +12305,7 @@
                             <a:schemeClr val="tx1"/>
                           </a:solidFill>
                         </a:rPr>
-                        <a:t>Étiquettes de sensibilité et DLP</a:t>
+                        <a:t>Étiquettes et rétention</a:t>
                       </a:r>
                       <a:endParaRPr lang="en-US" sz="1200" dirty="0"/>
                     </a:p>
@@ -10689,7 +12421,7 @@
                             <a:schemeClr val="tx1"/>
                           </a:solidFill>
                         </a:rPr>
-                        <a:t>4 étiquettes non publiées, DLP en simulation, plan de rétention</a:t>
+                        <a:t>4 étiquettes créées (non publiées), plans de rétention et DLP validés</a:t>
                       </a:r>
                       <a:endParaRPr lang="en-US" sz="1200" dirty="0"/>
                     </a:p>
@@ -10747,7 +12479,7 @@
                             <a:schemeClr val="tx1"/>
                           </a:solidFill>
                         </a:rPr>
-                        <a:t>5</a:t>
+                        <a:t>24 h</a:t>
                       </a:r>
                       <a:endParaRPr lang="en-US" sz="1200" dirty="0"/>
                     </a:p>
@@ -11039,7 +12771,7 @@
                             <a:schemeClr val="tx1"/>
                           </a:solidFill>
                         </a:rPr>
-                        <a:t>3</a:t>
+                        <a:t>12 h</a:t>
                       </a:r>
                       <a:endParaRPr lang="en-US" sz="1200" dirty="0"/>
                     </a:p>
@@ -11273,7 +13005,7 @@
                             <a:schemeClr val="tx1"/>
                           </a:solidFill>
                         </a:rPr>
-                        <a:t>Politiques MFA, appareils et invités ; impact mesuré sur 5 jours</a:t>
+                        <a:t>3 politiques (MFA, appareils, invités) ; impact mesuré sur 5 jours</a:t>
                       </a:r>
                       <a:endParaRPr lang="en-US" sz="1200" dirty="0"/>
                     </a:p>
@@ -11331,7 +13063,7 @@
                             <a:schemeClr val="tx1"/>
                           </a:solidFill>
                         </a:rPr>
-                        <a:t>2</a:t>
+                        <a:t>10 h</a:t>
                       </a:r>
                       <a:endParaRPr lang="en-US" sz="1200" dirty="0"/>
                     </a:p>
@@ -11507,7 +13239,7 @@
                             <a:schemeClr val="tx1"/>
                           </a:solidFill>
                         </a:rPr>
-                        <a:t>19 - 26 oct.</a:t>
+                        <a:t>13 - 26 oct.</a:t>
                       </a:r>
                       <a:endParaRPr lang="en-US" sz="1200" dirty="0"/>
                     </a:p>
@@ -11623,7 +13355,7 @@
                             <a:schemeClr val="tx1"/>
                           </a:solidFill>
                         </a:rPr>
-                        <a:t>2</a:t>
+                        <a:t>9 h</a:t>
                       </a:r>
                       <a:endParaRPr lang="en-US" sz="1200" dirty="0"/>
                     </a:p>
@@ -11915,7 +13647,7 @@
                             <a:schemeClr val="tx1"/>
                           </a:solidFill>
                         </a:rPr>
-                        <a:t>3</a:t>
+                        <a:t>19 h</a:t>
                       </a:r>
                       <a:endParaRPr lang="en-US" sz="1200" dirty="0"/>
                     </a:p>
@@ -11994,1020 +13726,9 @@
                   <a:schemeClr val="accent1"/>
                 </a:solidFill>
               </a:rPr>
-              <a:t>Total réalisations : 38 jours-personne, plus environ 4 jours-personne de pilotage : environ 42 jours-personne.</a:t>
+              <a:t>Réalisations : 198 h. Avec rencontres, préparation et pilotage : 253,5 h sur 259 h de capacité.</a:t>
             </a:r>
             <a:endParaRPr lang="en-US" sz="1300" dirty="0"/>
-          </a:p>
-        </p:txBody>
-      </p:sp>
-      <p:sp>
-        <p:nvSpPr>
-          <p:cNvPr id="25" name="Slide Number Placeholder 0"/>
-          <p:cNvSpPr>
-            <a:spLocks noGrp="1"/>
-          </p:cNvSpPr>
-          <p:nvPr>
-            <p:ph type="sldNum" sz="quarter" idx="4294967295"/>
-          </p:nvPr>
-        </p:nvSpPr>
-        <p:spPr>
-          <a:xfrm>
-            <a:off x="8229600" y="4800600"/>
-            <a:ext cx="457200" cy="228600"/>
-          </a:xfrm>
-          <a:prstGeom prst="rect">
-            <a:avLst/>
-          </a:prstGeom>
-          <a:extLst>
-            <a:ext uri="{C572A759-6A51-4108-AA02-DFA0A04FC94B}">
-              <ma14:wrappingTextBoxFlag xmlns:ma14="http://schemas.microsoft.com/office/mac/drawingml/2011/main" val="0"/>
-            </a:ext>
-          </a:extLst>
-        </p:spPr>
-        <p:txBody>
-          <a:bodyPr lIns="0" tIns="0" rIns="0" bIns="0"/>
-          <a:lstStyle>
-            <a:lvl1pPr>
-              <a:defRPr sz="1000">
-                <a:solidFill>
-                  <a:schemeClr val="accent6"/>
-                </a:solidFill>
-              </a:defRPr>
-            </a:lvl1pPr>
-          </a:lstStyle>
-          <a:p>
-            <a:pPr algn="r"/>
-            <a:fld id="{F7021451-1387-4CA6-816F-3879F97B5CBC}" type="slidenum">
-              <a:rPr b="0" lang="en-US"/>
-              <a:t>6</a:t>
-            </a:fld>
-            <a:endParaRPr lang="en-US"/>
-          </a:p>
-        </p:txBody>
-      </p:sp>
-    </p:spTree>
-  </p:cSld>
-  <p:clrMapOvr>
-    <a:masterClrMapping/>
-  </p:clrMapOvr>
-</p:sld>
-</file>
-
-<file path=ppt/slides/slide7.xml><?xml version="1.0" encoding="utf-8"?>
-<p:sld xmlns:a="http://schemas.openxmlformats.org/drawingml/2006/main" xmlns:r="http://schemas.openxmlformats.org/officeDocument/2006/relationships" xmlns:p="http://schemas.openxmlformats.org/presentationml/2006/main">
-  <p:cSld name="Slide 7">
-    <p:spTree>
-      <p:nvGrpSpPr>
-        <p:cNvPr id="1" name=""/>
-        <p:cNvGrpSpPr/>
-        <p:nvPr/>
-      </p:nvGrpSpPr>
-      <p:grpSpPr>
-        <a:xfrm>
-          <a:off x="0" y="0"/>
-          <a:ext cx="0" cy="0"/>
-          <a:chOff x="0" y="0"/>
-          <a:chExt cx="0" cy="0"/>
-        </a:xfrm>
-      </p:grpSpPr>
-      <p:sp>
-        <p:nvSpPr>
-          <p:cNvPr id="2" name="Titre"/>
-          <p:cNvSpPr txBox="1"/>
-          <p:nvPr/>
-        </p:nvSpPr>
-        <p:spPr>
-          <a:xfrm>
-            <a:off x="457200" y="274320"/>
-            <a:ext cx="8229600" cy="640080"/>
-          </a:xfrm>
-          <a:prstGeom prst="rect">
-            <a:avLst/>
-          </a:prstGeom>
-          <a:noFill/>
-          <a:ln/>
-        </p:spPr>
-        <p:txBody>
-          <a:bodyPr wrap="square" lIns="0" tIns="0" rIns="0" bIns="0" rtlCol="0" anchor="ctr"/>
-          <a:lstStyle/>
-          <a:p>
-            <a:pPr indent="0" marL="0">
-              <a:buNone/>
-            </a:pPr>
-            <a:r>
-              <a:rPr lang="en-US" sz="3000" b="1" dirty="0">
-                <a:solidFill>
-                  <a:schemeClr val="tx2"/>
-                </a:solidFill>
-                <a:latin typeface="Cambria" pitchFamily="34" charset="0"/>
-                <a:ea typeface="Cambria" pitchFamily="34" charset="-122"/>
-                <a:cs typeface="Cambria" pitchFamily="34" charset="-120"/>
-              </a:rPr>
-              <a:t>Calendrier des lots</a:t>
-            </a:r>
-            <a:endParaRPr lang="en-US" sz="3000" dirty="0"/>
-          </a:p>
-        </p:txBody>
-      </p:sp>
-      <p:sp>
-        <p:nvSpPr>
-          <p:cNvPr id="3" name="Text 1"/>
-          <p:cNvSpPr txBox="1"/>
-          <p:nvPr/>
-        </p:nvSpPr>
-        <p:spPr>
-          <a:xfrm>
-            <a:off x="3108960" y="1005840"/>
-            <a:ext cx="1188720" cy="228600"/>
-          </a:xfrm>
-          <a:prstGeom prst="rect">
-            <a:avLst/>
-          </a:prstGeom>
-          <a:noFill/>
-          <a:ln/>
-        </p:spPr>
-        <p:txBody>
-          <a:bodyPr wrap="square" lIns="0" tIns="0" rIns="0" bIns="0" rtlCol="0" anchor="ctr"/>
-          <a:lstStyle/>
-          <a:p>
-            <a:pPr indent="0" marL="0">
-              <a:buNone/>
-            </a:pPr>
-            <a:r>
-              <a:rPr lang="en-US" sz="1100" b="1" dirty="0">
-                <a:solidFill>
-                  <a:schemeClr val="tx2"/>
-                </a:solidFill>
-              </a:rPr>
-              <a:t>8-9 oct.</a:t>
-            </a:r>
-            <a:endParaRPr lang="en-US" sz="1100" dirty="0"/>
-          </a:p>
-        </p:txBody>
-      </p:sp>
-      <p:sp>
-        <p:nvSpPr>
-          <p:cNvPr id="4" name="Repère semaine"/>
-          <p:cNvSpPr/>
-          <p:nvPr/>
-        </p:nvSpPr>
-        <p:spPr>
-          <a:xfrm>
-            <a:off x="3108960" y="1261872"/>
-            <a:ext cx="0" cy="3291840"/>
-          </a:xfrm>
-          <a:prstGeom prst="line">
-            <a:avLst/>
-          </a:prstGeom>
-          <a:noFill/>
-          <a:ln w="9525">
-            <a:solidFill>
-              <a:srgbClr val="D5DDE3"/>
-            </a:solidFill>
-            <a:prstDash val="solid"/>
-          </a:ln>
-        </p:spPr>
-      </p:sp>
-      <p:sp>
-        <p:nvSpPr>
-          <p:cNvPr id="5" name="Text 3"/>
-          <p:cNvSpPr txBox="1"/>
-          <p:nvPr/>
-        </p:nvSpPr>
-        <p:spPr>
-          <a:xfrm>
-            <a:off x="4321534" y="1005840"/>
-            <a:ext cx="1188720" cy="228600"/>
-          </a:xfrm>
-          <a:prstGeom prst="rect">
-            <a:avLst/>
-          </a:prstGeom>
-          <a:noFill/>
-          <a:ln/>
-        </p:spPr>
-        <p:txBody>
-          <a:bodyPr wrap="square" lIns="0" tIns="0" rIns="0" bIns="0" rtlCol="0" anchor="ctr"/>
-          <a:lstStyle/>
-          <a:p>
-            <a:pPr indent="0" marL="0">
-              <a:buNone/>
-            </a:pPr>
-            <a:r>
-              <a:rPr lang="en-US" sz="1100" b="1" dirty="0">
-                <a:solidFill>
-                  <a:schemeClr val="tx2"/>
-                </a:solidFill>
-              </a:rPr>
-              <a:t>13-16 oct.</a:t>
-            </a:r>
-            <a:endParaRPr lang="en-US" sz="1100" dirty="0"/>
-          </a:p>
-        </p:txBody>
-      </p:sp>
-      <p:sp>
-        <p:nvSpPr>
-          <p:cNvPr id="6" name="Repère semaine"/>
-          <p:cNvSpPr/>
-          <p:nvPr/>
-        </p:nvSpPr>
-        <p:spPr>
-          <a:xfrm>
-            <a:off x="4321534" y="1261872"/>
-            <a:ext cx="0" cy="3291840"/>
-          </a:xfrm>
-          <a:prstGeom prst="line">
-            <a:avLst/>
-          </a:prstGeom>
-          <a:noFill/>
-          <a:ln w="9525">
-            <a:solidFill>
-              <a:srgbClr val="D5DDE3"/>
-            </a:solidFill>
-            <a:prstDash val="solid"/>
-          </a:ln>
-        </p:spPr>
-      </p:sp>
-      <p:sp>
-        <p:nvSpPr>
-          <p:cNvPr id="7" name="Text 5"/>
-          <p:cNvSpPr txBox="1"/>
-          <p:nvPr/>
-        </p:nvSpPr>
-        <p:spPr>
-          <a:xfrm>
-            <a:off x="5776623" y="1005840"/>
-            <a:ext cx="1188720" cy="228600"/>
-          </a:xfrm>
-          <a:prstGeom prst="rect">
-            <a:avLst/>
-          </a:prstGeom>
-          <a:noFill/>
-          <a:ln/>
-        </p:spPr>
-        <p:txBody>
-          <a:bodyPr wrap="square" lIns="0" tIns="0" rIns="0" bIns="0" rtlCol="0" anchor="ctr"/>
-          <a:lstStyle/>
-          <a:p>
-            <a:pPr indent="0" marL="0">
-              <a:buNone/>
-            </a:pPr>
-            <a:r>
-              <a:rPr lang="en-US" sz="1100" b="1" dirty="0">
-                <a:solidFill>
-                  <a:schemeClr val="tx2"/>
-                </a:solidFill>
-              </a:rPr>
-              <a:t>19-23 oct.</a:t>
-            </a:r>
-            <a:endParaRPr lang="en-US" sz="1100" dirty="0"/>
-          </a:p>
-        </p:txBody>
-      </p:sp>
-      <p:sp>
-        <p:nvSpPr>
-          <p:cNvPr id="8" name="Repère semaine"/>
-          <p:cNvSpPr/>
-          <p:nvPr/>
-        </p:nvSpPr>
-        <p:spPr>
-          <a:xfrm>
-            <a:off x="5776623" y="1261872"/>
-            <a:ext cx="0" cy="3291840"/>
-          </a:xfrm>
-          <a:prstGeom prst="line">
-            <a:avLst/>
-          </a:prstGeom>
-          <a:noFill/>
-          <a:ln w="9525">
-            <a:solidFill>
-              <a:srgbClr val="D5DDE3"/>
-            </a:solidFill>
-            <a:prstDash val="solid"/>
-          </a:ln>
-        </p:spPr>
-      </p:sp>
-      <p:sp>
-        <p:nvSpPr>
-          <p:cNvPr id="9" name="Text 7"/>
-          <p:cNvSpPr txBox="1"/>
-          <p:nvPr/>
-        </p:nvSpPr>
-        <p:spPr>
-          <a:xfrm>
-            <a:off x="7474226" y="1005840"/>
-            <a:ext cx="1188720" cy="228600"/>
-          </a:xfrm>
-          <a:prstGeom prst="rect">
-            <a:avLst/>
-          </a:prstGeom>
-          <a:noFill/>
-          <a:ln/>
-        </p:spPr>
-        <p:txBody>
-          <a:bodyPr wrap="square" lIns="0" tIns="0" rIns="0" bIns="0" rtlCol="0" anchor="ctr"/>
-          <a:lstStyle/>
-          <a:p>
-            <a:pPr indent="0" marL="0">
-              <a:buNone/>
-            </a:pPr>
-            <a:r>
-              <a:rPr lang="en-US" sz="1100" b="1" dirty="0">
-                <a:solidFill>
-                  <a:schemeClr val="tx2"/>
-                </a:solidFill>
-              </a:rPr>
-              <a:t>26-30 oct.</a:t>
-            </a:r>
-            <a:endParaRPr lang="en-US" sz="1100" dirty="0"/>
-          </a:p>
-        </p:txBody>
-      </p:sp>
-      <p:sp>
-        <p:nvSpPr>
-          <p:cNvPr id="10" name="Repère semaine"/>
-          <p:cNvSpPr/>
-          <p:nvPr/>
-        </p:nvSpPr>
-        <p:spPr>
-          <a:xfrm>
-            <a:off x="7474226" y="1261872"/>
-            <a:ext cx="0" cy="3291840"/>
-          </a:xfrm>
-          <a:prstGeom prst="line">
-            <a:avLst/>
-          </a:prstGeom>
-          <a:noFill/>
-          <a:ln w="9525">
-            <a:solidFill>
-              <a:srgbClr val="D5DDE3"/>
-            </a:solidFill>
-            <a:prstDash val="solid"/>
-          </a:ln>
-        </p:spPr>
-      </p:sp>
-      <p:sp>
-        <p:nvSpPr>
-          <p:cNvPr id="11" name="Text 9"/>
-          <p:cNvSpPr txBox="1"/>
-          <p:nvPr/>
-        </p:nvSpPr>
-        <p:spPr>
-          <a:xfrm>
-            <a:off x="457200" y="1325880"/>
-            <a:ext cx="2606040" cy="274320"/>
-          </a:xfrm>
-          <a:prstGeom prst="rect">
-            <a:avLst/>
-          </a:prstGeom>
-          <a:noFill/>
-          <a:ln/>
-        </p:spPr>
-        <p:txBody>
-          <a:bodyPr wrap="square" lIns="0" tIns="0" rIns="0" bIns="0" rtlCol="0" anchor="ctr"/>
-          <a:lstStyle/>
-          <a:p>
-            <a:pPr indent="0" marL="0">
-              <a:buNone/>
-            </a:pPr>
-            <a:r>
-              <a:rPr lang="en-US" sz="1200" dirty="0">
-                <a:solidFill>
-                  <a:schemeClr val="tx1"/>
-                </a:solidFill>
-              </a:rPr>
-              <a:t>1. Inventaire du tenant</a:t>
-            </a:r>
-            <a:endParaRPr lang="en-US" sz="1200" dirty="0"/>
-          </a:p>
-        </p:txBody>
-      </p:sp>
-      <p:sp>
-        <p:nvSpPr>
-          <p:cNvPr id="12" name="Barre lot"/>
-          <p:cNvSpPr/>
-          <p:nvPr/>
-        </p:nvSpPr>
-        <p:spPr>
-          <a:xfrm>
-            <a:off x="3108960" y="1353312"/>
-            <a:ext cx="1940118" cy="219456"/>
-          </a:xfrm>
-          <a:prstGeom prst="roundRect">
-            <a:avLst>
-              <a:gd name="adj" fmla="val 20833"/>
-            </a:avLst>
-          </a:prstGeom>
-          <a:solidFill>
-            <a:schemeClr val="tx2"/>
-          </a:solidFill>
-          <a:ln w="12700">
-            <a:solidFill>
-              <a:schemeClr val="tx2"/>
-            </a:solidFill>
-            <a:prstDash val="solid"/>
-          </a:ln>
-        </p:spPr>
-      </p:sp>
-      <p:sp>
-        <p:nvSpPr>
-          <p:cNvPr id="13" name="Text 11"/>
-          <p:cNvSpPr txBox="1"/>
-          <p:nvPr/>
-        </p:nvSpPr>
-        <p:spPr>
-          <a:xfrm>
-            <a:off x="457200" y="1645920"/>
-            <a:ext cx="2606040" cy="274320"/>
-          </a:xfrm>
-          <a:prstGeom prst="rect">
-            <a:avLst/>
-          </a:prstGeom>
-          <a:noFill/>
-          <a:ln/>
-        </p:spPr>
-        <p:txBody>
-          <a:bodyPr wrap="square" lIns="0" tIns="0" rIns="0" bIns="0" rtlCol="0" anchor="ctr"/>
-          <a:lstStyle/>
-          <a:p>
-            <a:pPr indent="0" marL="0">
-              <a:buNone/>
-            </a:pPr>
-            <a:r>
-              <a:rPr lang="en-US" sz="1200" dirty="0">
-                <a:solidFill>
-                  <a:schemeClr val="tx1"/>
-                </a:solidFill>
-              </a:rPr>
-              <a:t>2. Blocage création libre</a:t>
-            </a:r>
-            <a:endParaRPr lang="en-US" sz="1200" dirty="0"/>
-          </a:p>
-        </p:txBody>
-      </p:sp>
-      <p:sp>
-        <p:nvSpPr>
-          <p:cNvPr id="14" name="Barre lot"/>
-          <p:cNvSpPr/>
-          <p:nvPr/>
-        </p:nvSpPr>
-        <p:spPr>
-          <a:xfrm>
-            <a:off x="4321534" y="1673352"/>
-            <a:ext cx="1697603" cy="219456"/>
-          </a:xfrm>
-          <a:prstGeom prst="roundRect">
-            <a:avLst>
-              <a:gd name="adj" fmla="val 20833"/>
-            </a:avLst>
-          </a:prstGeom>
-          <a:solidFill>
-            <a:schemeClr val="accent1"/>
-          </a:solidFill>
-          <a:ln w="12700">
-            <a:solidFill>
-              <a:schemeClr val="accent1"/>
-            </a:solidFill>
-            <a:prstDash val="solid"/>
-          </a:ln>
-        </p:spPr>
-      </p:sp>
-      <p:sp>
-        <p:nvSpPr>
-          <p:cNvPr id="15" name="Text 13"/>
-          <p:cNvSpPr txBox="1"/>
-          <p:nvPr/>
-        </p:nvSpPr>
-        <p:spPr>
-          <a:xfrm>
-            <a:off x="457200" y="1965960"/>
-            <a:ext cx="2606040" cy="274320"/>
-          </a:xfrm>
-          <a:prstGeom prst="rect">
-            <a:avLst/>
-          </a:prstGeom>
-          <a:noFill/>
-          <a:ln/>
-        </p:spPr>
-        <p:txBody>
-          <a:bodyPr wrap="square" lIns="0" tIns="0" rIns="0" bIns="0" rtlCol="0" anchor="ctr"/>
-          <a:lstStyle/>
-          <a:p>
-            <a:pPr indent="0" marL="0">
-              <a:buNone/>
-            </a:pPr>
-            <a:r>
-              <a:rPr lang="en-US" sz="1200" dirty="0">
-                <a:solidFill>
-                  <a:schemeClr val="tx1"/>
-                </a:solidFill>
-              </a:rPr>
-              <a:t>3. Prototype du portail</a:t>
-            </a:r>
-            <a:endParaRPr lang="en-US" sz="1200" dirty="0"/>
-          </a:p>
-        </p:txBody>
-      </p:sp>
-      <p:sp>
-        <p:nvSpPr>
-          <p:cNvPr id="16" name="Barre lot"/>
-          <p:cNvSpPr/>
-          <p:nvPr/>
-        </p:nvSpPr>
-        <p:spPr>
-          <a:xfrm>
-            <a:off x="4321534" y="1993392"/>
-            <a:ext cx="3395207" cy="219456"/>
-          </a:xfrm>
-          <a:prstGeom prst="roundRect">
-            <a:avLst>
-              <a:gd name="adj" fmla="val 20833"/>
-            </a:avLst>
-          </a:prstGeom>
-          <a:solidFill>
-            <a:schemeClr val="tx2"/>
-          </a:solidFill>
-          <a:ln w="12700">
-            <a:solidFill>
-              <a:schemeClr val="tx2"/>
-            </a:solidFill>
-            <a:prstDash val="solid"/>
-          </a:ln>
-        </p:spPr>
-      </p:sp>
-      <p:sp>
-        <p:nvSpPr>
-          <p:cNvPr id="17" name="Text 15"/>
-          <p:cNvSpPr txBox="1"/>
-          <p:nvPr/>
-        </p:nvSpPr>
-        <p:spPr>
-          <a:xfrm>
-            <a:off x="457200" y="2286000"/>
-            <a:ext cx="2606040" cy="274320"/>
-          </a:xfrm>
-          <a:prstGeom prst="rect">
-            <a:avLst/>
-          </a:prstGeom>
-          <a:noFill/>
-          <a:ln/>
-        </p:spPr>
-        <p:txBody>
-          <a:bodyPr wrap="square" lIns="0" tIns="0" rIns="0" bIns="0" rtlCol="0" anchor="ctr"/>
-          <a:lstStyle/>
-          <a:p>
-            <a:pPr indent="0" marL="0">
-              <a:buNone/>
-            </a:pPr>
-            <a:r>
-              <a:rPr lang="en-US" sz="1200" dirty="0">
-                <a:solidFill>
-                  <a:schemeClr val="tx1"/>
-                </a:solidFill>
-              </a:rPr>
-              <a:t>4. Gabarits Équipe et Projet</a:t>
-            </a:r>
-            <a:endParaRPr lang="en-US" sz="1200" dirty="0"/>
-          </a:p>
-        </p:txBody>
-      </p:sp>
-      <p:sp>
-        <p:nvSpPr>
-          <p:cNvPr id="18" name="Barre lot"/>
-          <p:cNvSpPr/>
-          <p:nvPr/>
-        </p:nvSpPr>
-        <p:spPr>
-          <a:xfrm>
-            <a:off x="4806563" y="2313432"/>
-            <a:ext cx="3152692" cy="219456"/>
-          </a:xfrm>
-          <a:prstGeom prst="roundRect">
-            <a:avLst>
-              <a:gd name="adj" fmla="val 20833"/>
-            </a:avLst>
-          </a:prstGeom>
-          <a:solidFill>
-            <a:schemeClr val="accent1"/>
-          </a:solidFill>
-          <a:ln w="12700">
-            <a:solidFill>
-              <a:schemeClr val="accent1"/>
-            </a:solidFill>
-            <a:prstDash val="solid"/>
-          </a:ln>
-        </p:spPr>
-      </p:sp>
-      <p:sp>
-        <p:nvSpPr>
-          <p:cNvPr id="19" name="Text 17"/>
-          <p:cNvSpPr txBox="1"/>
-          <p:nvPr/>
-        </p:nvSpPr>
-        <p:spPr>
-          <a:xfrm>
-            <a:off x="457200" y="2606040"/>
-            <a:ext cx="2606040" cy="274320"/>
-          </a:xfrm>
-          <a:prstGeom prst="rect">
-            <a:avLst/>
-          </a:prstGeom>
-          <a:noFill/>
-          <a:ln/>
-        </p:spPr>
-        <p:txBody>
-          <a:bodyPr wrap="square" lIns="0" tIns="0" rIns="0" bIns="0" rtlCol="0" anchor="ctr"/>
-          <a:lstStyle/>
-          <a:p>
-            <a:pPr indent="0" marL="0">
-              <a:buNone/>
-            </a:pPr>
-            <a:r>
-              <a:rPr lang="en-US" sz="1200" dirty="0">
-                <a:solidFill>
-                  <a:schemeClr val="tx1"/>
-                </a:solidFill>
-              </a:rPr>
-              <a:t>5. Partage externe</a:t>
-            </a:r>
-            <a:endParaRPr lang="en-US" sz="1200" dirty="0"/>
-          </a:p>
-        </p:txBody>
-      </p:sp>
-      <p:sp>
-        <p:nvSpPr>
-          <p:cNvPr id="20" name="Barre lot"/>
-          <p:cNvSpPr/>
-          <p:nvPr/>
-        </p:nvSpPr>
-        <p:spPr>
-          <a:xfrm>
-            <a:off x="6019137" y="2633472"/>
-            <a:ext cx="970059" cy="219456"/>
-          </a:xfrm>
-          <a:prstGeom prst="roundRect">
-            <a:avLst>
-              <a:gd name="adj" fmla="val 20833"/>
-            </a:avLst>
-          </a:prstGeom>
-          <a:solidFill>
-            <a:schemeClr val="tx2"/>
-          </a:solidFill>
-          <a:ln w="12700">
-            <a:solidFill>
-              <a:schemeClr val="tx2"/>
-            </a:solidFill>
-            <a:prstDash val="solid"/>
-          </a:ln>
-        </p:spPr>
-      </p:sp>
-      <p:sp>
-        <p:nvSpPr>
-          <p:cNvPr id="21" name="Text 19"/>
-          <p:cNvSpPr txBox="1"/>
-          <p:nvPr/>
-        </p:nvSpPr>
-        <p:spPr>
-          <a:xfrm>
-            <a:off x="457200" y="2926080"/>
-            <a:ext cx="2606040" cy="274320"/>
-          </a:xfrm>
-          <a:prstGeom prst="rect">
-            <a:avLst/>
-          </a:prstGeom>
-          <a:noFill/>
-          <a:ln/>
-        </p:spPr>
-        <p:txBody>
-          <a:bodyPr wrap="square" lIns="0" tIns="0" rIns="0" bIns="0" rtlCol="0" anchor="ctr"/>
-          <a:lstStyle/>
-          <a:p>
-            <a:pPr indent="0" marL="0">
-              <a:buNone/>
-            </a:pPr>
-            <a:r>
-              <a:rPr lang="en-US" sz="1200" dirty="0">
-                <a:solidFill>
-                  <a:schemeClr val="tx1"/>
-                </a:solidFill>
-              </a:rPr>
-              <a:t>6. Étiquettes et DLP</a:t>
-            </a:r>
-            <a:endParaRPr lang="en-US" sz="1200" dirty="0"/>
-          </a:p>
-        </p:txBody>
-      </p:sp>
-      <p:sp>
-        <p:nvSpPr>
-          <p:cNvPr id="22" name="Barre lot"/>
-          <p:cNvSpPr/>
-          <p:nvPr/>
-        </p:nvSpPr>
-        <p:spPr>
-          <a:xfrm>
-            <a:off x="6019137" y="2953512"/>
-            <a:ext cx="2182633" cy="219456"/>
-          </a:xfrm>
-          <a:prstGeom prst="roundRect">
-            <a:avLst>
-              <a:gd name="adj" fmla="val 20833"/>
-            </a:avLst>
-          </a:prstGeom>
-          <a:solidFill>
-            <a:schemeClr val="accent1"/>
-          </a:solidFill>
-          <a:ln w="12700">
-            <a:solidFill>
-              <a:schemeClr val="accent1"/>
-            </a:solidFill>
-            <a:prstDash val="solid"/>
-          </a:ln>
-        </p:spPr>
-      </p:sp>
-      <p:sp>
-        <p:nvSpPr>
-          <p:cNvPr id="23" name="Text 21"/>
-          <p:cNvSpPr txBox="1"/>
-          <p:nvPr/>
-        </p:nvSpPr>
-        <p:spPr>
-          <a:xfrm>
-            <a:off x="457200" y="3246120"/>
-            <a:ext cx="2606040" cy="274320"/>
-          </a:xfrm>
-          <a:prstGeom prst="rect">
-            <a:avLst/>
-          </a:prstGeom>
-          <a:noFill/>
-          <a:ln/>
-        </p:spPr>
-        <p:txBody>
-          <a:bodyPr wrap="square" lIns="0" tIns="0" rIns="0" bIns="0" rtlCol="0" anchor="ctr"/>
-          <a:lstStyle/>
-          <a:p>
-            <a:pPr indent="0" marL="0">
-              <a:buNone/>
-            </a:pPr>
-            <a:r>
-              <a:rPr lang="en-US" sz="1200" dirty="0">
-                <a:solidFill>
-                  <a:schemeClr val="tx1"/>
-                </a:solidFill>
-              </a:rPr>
-              <a:t>7. Rapport de surpartage</a:t>
-            </a:r>
-            <a:endParaRPr lang="en-US" sz="1200" dirty="0"/>
-          </a:p>
-        </p:txBody>
-      </p:sp>
-      <p:sp>
-        <p:nvSpPr>
-          <p:cNvPr id="24" name="Barre lot"/>
-          <p:cNvSpPr/>
-          <p:nvPr/>
-        </p:nvSpPr>
-        <p:spPr>
-          <a:xfrm>
-            <a:off x="5776623" y="3273552"/>
-            <a:ext cx="1212574" cy="219456"/>
-          </a:xfrm>
-          <a:prstGeom prst="roundRect">
-            <a:avLst>
-              <a:gd name="adj" fmla="val 20833"/>
-            </a:avLst>
-          </a:prstGeom>
-          <a:solidFill>
-            <a:schemeClr val="tx2"/>
-          </a:solidFill>
-          <a:ln w="12700">
-            <a:solidFill>
-              <a:schemeClr val="tx2"/>
-            </a:solidFill>
-            <a:prstDash val="solid"/>
-          </a:ln>
-        </p:spPr>
-      </p:sp>
-      <p:sp>
-        <p:nvSpPr>
-          <p:cNvPr id="25" name="Text 23"/>
-          <p:cNvSpPr txBox="1"/>
-          <p:nvPr/>
-        </p:nvSpPr>
-        <p:spPr>
-          <a:xfrm>
-            <a:off x="457200" y="3566160"/>
-            <a:ext cx="2606040" cy="274320"/>
-          </a:xfrm>
-          <a:prstGeom prst="rect">
-            <a:avLst/>
-          </a:prstGeom>
-          <a:noFill/>
-          <a:ln/>
-        </p:spPr>
-        <p:txBody>
-          <a:bodyPr wrap="square" lIns="0" tIns="0" rIns="0" bIns="0" rtlCol="0" anchor="ctr"/>
-          <a:lstStyle/>
-          <a:p>
-            <a:pPr indent="0" marL="0">
-              <a:buNone/>
-            </a:pPr>
-            <a:r>
-              <a:rPr lang="en-US" sz="1200" dirty="0">
-                <a:solidFill>
-                  <a:schemeClr val="tx1"/>
-                </a:solidFill>
-              </a:rPr>
-              <a:t>8. Accès conditionnel (rapport)</a:t>
-            </a:r>
-            <a:endParaRPr lang="en-US" sz="1200" dirty="0"/>
-          </a:p>
-        </p:txBody>
-      </p:sp>
-      <p:sp>
-        <p:nvSpPr>
-          <p:cNvPr id="26" name="Barre lot"/>
-          <p:cNvSpPr/>
-          <p:nvPr/>
-        </p:nvSpPr>
-        <p:spPr>
-          <a:xfrm>
-            <a:off x="6019137" y="3593592"/>
-            <a:ext cx="2182633" cy="219456"/>
-          </a:xfrm>
-          <a:prstGeom prst="roundRect">
-            <a:avLst>
-              <a:gd name="adj" fmla="val 20833"/>
-            </a:avLst>
-          </a:prstGeom>
-          <a:solidFill>
-            <a:schemeClr val="accent1"/>
-          </a:solidFill>
-          <a:ln w="12700">
-            <a:solidFill>
-              <a:schemeClr val="accent1"/>
-            </a:solidFill>
-            <a:prstDash val="solid"/>
-          </a:ln>
-        </p:spPr>
-      </p:sp>
-      <p:sp>
-        <p:nvSpPr>
-          <p:cNvPr id="27" name="Text 25"/>
-          <p:cNvSpPr txBox="1"/>
-          <p:nvPr/>
-        </p:nvSpPr>
-        <p:spPr>
-          <a:xfrm>
-            <a:off x="457200" y="3886200"/>
-            <a:ext cx="2606040" cy="274320"/>
-          </a:xfrm>
-          <a:prstGeom prst="rect">
-            <a:avLst/>
-          </a:prstGeom>
-          <a:noFill/>
-          <a:ln/>
-        </p:spPr>
-        <p:txBody>
-          <a:bodyPr wrap="square" lIns="0" tIns="0" rIns="0" bIns="0" rtlCol="0" anchor="ctr"/>
-          <a:lstStyle/>
-          <a:p>
-            <a:pPr indent="0" marL="0">
-              <a:buNone/>
-            </a:pPr>
-            <a:r>
-              <a:rPr lang="en-US" sz="1200" dirty="0">
-                <a:solidFill>
-                  <a:schemeClr val="tx1"/>
-                </a:solidFill>
-              </a:rPr>
-              <a:t>9. Registre et orphelins</a:t>
-            </a:r>
-            <a:endParaRPr lang="en-US" sz="1200" dirty="0"/>
-          </a:p>
-        </p:txBody>
-      </p:sp>
-      <p:sp>
-        <p:nvSpPr>
-          <p:cNvPr id="28" name="Barre lot"/>
-          <p:cNvSpPr/>
-          <p:nvPr/>
-        </p:nvSpPr>
-        <p:spPr>
-          <a:xfrm>
-            <a:off x="5776623" y="3913632"/>
-            <a:ext cx="1940118" cy="219456"/>
-          </a:xfrm>
-          <a:prstGeom prst="roundRect">
-            <a:avLst>
-              <a:gd name="adj" fmla="val 20833"/>
-            </a:avLst>
-          </a:prstGeom>
-          <a:solidFill>
-            <a:schemeClr val="tx2"/>
-          </a:solidFill>
-          <a:ln w="12700">
-            <a:solidFill>
-              <a:schemeClr val="tx2"/>
-            </a:solidFill>
-            <a:prstDash val="solid"/>
-          </a:ln>
-        </p:spPr>
-      </p:sp>
-      <p:sp>
-        <p:nvSpPr>
-          <p:cNvPr id="29" name="Text 27"/>
-          <p:cNvSpPr txBox="1"/>
-          <p:nvPr/>
-        </p:nvSpPr>
-        <p:spPr>
-          <a:xfrm>
-            <a:off x="457200" y="4206240"/>
-            <a:ext cx="2606040" cy="274320"/>
-          </a:xfrm>
-          <a:prstGeom prst="rect">
-            <a:avLst/>
-          </a:prstGeom>
-          <a:noFill/>
-          <a:ln/>
-        </p:spPr>
-        <p:txBody>
-          <a:bodyPr wrap="square" lIns="0" tIns="0" rIns="0" bIns="0" rtlCol="0" anchor="ctr"/>
-          <a:lstStyle/>
-          <a:p>
-            <a:pPr indent="0" marL="0">
-              <a:buNone/>
-            </a:pPr>
-            <a:r>
-              <a:rPr lang="en-US" sz="1200" dirty="0">
-                <a:solidFill>
-                  <a:schemeClr val="tx1"/>
-                </a:solidFill>
-              </a:rPr>
-              <a:t>10. Documentation et plan</a:t>
-            </a:r>
-            <a:endParaRPr lang="en-US" sz="1200" dirty="0"/>
-          </a:p>
-        </p:txBody>
-      </p:sp>
-      <p:sp>
-        <p:nvSpPr>
-          <p:cNvPr id="30" name="Barre lot"/>
-          <p:cNvSpPr/>
-          <p:nvPr/>
-        </p:nvSpPr>
-        <p:spPr>
-          <a:xfrm>
-            <a:off x="7474226" y="4233672"/>
-            <a:ext cx="970059" cy="219456"/>
-          </a:xfrm>
-          <a:prstGeom prst="roundRect">
-            <a:avLst>
-              <a:gd name="adj" fmla="val 20833"/>
-            </a:avLst>
-          </a:prstGeom>
-          <a:solidFill>
-            <a:schemeClr val="accent1"/>
-          </a:solidFill>
-          <a:ln w="12700">
-            <a:solidFill>
-              <a:schemeClr val="accent1"/>
-            </a:solidFill>
-            <a:prstDash val="solid"/>
-          </a:ln>
-        </p:spPr>
-      </p:sp>
-      <p:sp>
-        <p:nvSpPr>
-          <p:cNvPr id="31" name="Text 29"/>
-          <p:cNvSpPr txBox="1"/>
-          <p:nvPr/>
-        </p:nvSpPr>
-        <p:spPr>
-          <a:xfrm>
-            <a:off x="457200" y="4572000"/>
-            <a:ext cx="8229600" cy="201168"/>
-          </a:xfrm>
-          <a:prstGeom prst="rect">
-            <a:avLst/>
-          </a:prstGeom>
-          <a:noFill/>
-          <a:ln/>
-        </p:spPr>
-        <p:txBody>
-          <a:bodyPr wrap="square" lIns="0" tIns="0" rIns="0" bIns="0" rtlCol="0" anchor="ctr"/>
-          <a:lstStyle/>
-          <a:p>
-            <a:pPr indent="0" marL="0">
-              <a:buNone/>
-            </a:pPr>
-            <a:r>
-              <a:rPr lang="en-US" sz="1000" dirty="0">
-                <a:solidFill>
-                  <a:schemeClr val="accent6"/>
-                </a:solidFill>
-              </a:rPr>
-              <a:t>Rencontres : 8 (lancement), 9 (décisions), 21-22 (ateliers), 27 (démonstration), 30 (comité ADM)</a:t>
-            </a:r>
-            <a:endParaRPr lang="en-US" sz="1000" dirty="0"/>
           </a:p>
         </p:txBody>
       </p:sp>
@@ -13114,2162 +13835,914 @@
                 <a:ea typeface="Cambria" pitchFamily="34" charset="-122"/>
                 <a:cs typeface="Cambria" pitchFamily="34" charset="-120"/>
               </a:rPr>
-              <a:t>Ressources à réserver</a:t>
+              <a:t>Calendrier des lots</a:t>
             </a:r>
             <a:endParaRPr lang="en-US" sz="3000" dirty="0"/>
           </a:p>
         </p:txBody>
       </p:sp>
-      <p:graphicFrame>
-        <p:nvGraphicFramePr>
-          <p:cNvPr id="9" name="Table 0"/>
-          <p:cNvGraphicFramePr>
-            <a:graphicFrameLocks noGrp="1"/>
-          </p:cNvGraphicFramePr>
-          <p:nvPr>
-            <p:extLst>
-              <p:ext uri="{D42A27DB-BD31-4B8C-83A1-F6EECF244321}">
-                <p14:modId xmlns:p14="http://schemas.microsoft.com/office/powerpoint/2010/main" val="1579011935"/>
-              </p:ext>
-            </p:extLst>
-          </p:nvPr>
-        </p:nvGraphicFramePr>
-        <p:xfrm>
-          <a:off x="457200" y="1051560"/>
-          <a:ext cx="8229600" cy="914400"/>
-        </p:xfrm>
-        <a:graphic>
-          <a:graphicData uri="http://schemas.openxmlformats.org/drawingml/2006/table">
-            <a:tbl>
-              <a:tblPr/>
-              <a:tblGrid>
-                <a:gridCol w="2926080"/>
-                <a:gridCol w="1371600"/>
-                <a:gridCol w="1371600"/>
-                <a:gridCol w="2560320"/>
-              </a:tblGrid>
-              <a:tr h="384048">
-                <a:tc>
-                  <a:txBody>
-                    <a:bodyPr/>
-                    <a:lstStyle/>
-                    <a:p>
-                      <a:pPr indent="0" marL="0">
-                        <a:buNone/>
-                      </a:pPr>
-                      <a:r>
-                        <a:rPr lang="en-US" sz="1200" b="1" dirty="0">
-                          <a:solidFill>
-                            <a:schemeClr val="bg1"/>
-                          </a:solidFill>
-                        </a:rPr>
-                        <a:t>Ressource</a:t>
-                      </a:r>
-                      <a:endParaRPr lang="en-US" sz="1200" dirty="0"/>
-                    </a:p>
-                  </a:txBody>
-                  <a:tcPr marL="54864" marR="54864" marT="27432" marB="27432" anchor="ctr">
-                    <a:lnL w="9525" cap="flat" cmpd="sng" algn="ctr">
-                      <a:solidFill>
-                        <a:srgbClr val="D5DDE3"/>
-                      </a:solidFill>
-                      <a:prstDash val="solid"/>
-                      <a:round/>
-                      <a:headEnd type="none" w="med" len="med"/>
-                      <a:tailEnd type="none" w="med" len="med"/>
-                    </a:lnL>
-                    <a:lnR w="9525" cap="flat" cmpd="sng" algn="ctr">
-                      <a:solidFill>
-                        <a:srgbClr val="D5DDE3"/>
-                      </a:solidFill>
-                      <a:prstDash val="solid"/>
-                      <a:round/>
-                      <a:headEnd type="none" w="med" len="med"/>
-                      <a:tailEnd type="none" w="med" len="med"/>
-                    </a:lnR>
-                    <a:lnT w="9525" cap="flat" cmpd="sng" algn="ctr">
-                      <a:solidFill>
-                        <a:srgbClr val="D5DDE3"/>
-                      </a:solidFill>
-                      <a:prstDash val="solid"/>
-                      <a:round/>
-                      <a:headEnd type="none" w="med" len="med"/>
-                      <a:tailEnd type="none" w="med" len="med"/>
-                    </a:lnT>
-                    <a:lnB w="9525" cap="flat" cmpd="sng" algn="ctr">
-                      <a:solidFill>
-                        <a:srgbClr val="D5DDE3"/>
-                      </a:solidFill>
-                      <a:prstDash val="solid"/>
-                      <a:round/>
-                      <a:headEnd type="none" w="med" len="med"/>
-                      <a:tailEnd type="none" w="med" len="med"/>
-                    </a:lnB>
-                    <a:solidFill>
-                      <a:schemeClr val="tx2"/>
-                    </a:solidFill>
-                  </a:tcPr>
-                </a:tc>
-                <a:tc>
-                  <a:txBody>
-                    <a:bodyPr/>
-                    <a:lstStyle/>
-                    <a:p>
-                      <a:pPr indent="0" marL="0">
-                        <a:buNone/>
-                      </a:pPr>
-                      <a:r>
-                        <a:rPr lang="en-US" sz="1200" b="1" dirty="0">
-                          <a:solidFill>
-                            <a:schemeClr val="bg1"/>
-                          </a:solidFill>
-                        </a:rPr>
-                        <a:t>Rencontres</a:t>
-                      </a:r>
-                      <a:endParaRPr lang="en-US" sz="1200" dirty="0"/>
-                    </a:p>
-                  </a:txBody>
-                  <a:tcPr marL="54864" marR="54864" marT="27432" marB="27432" anchor="ctr">
-                    <a:lnL w="9525" cap="flat" cmpd="sng" algn="ctr">
-                      <a:solidFill>
-                        <a:srgbClr val="D5DDE3"/>
-                      </a:solidFill>
-                      <a:prstDash val="solid"/>
-                      <a:round/>
-                      <a:headEnd type="none" w="med" len="med"/>
-                      <a:tailEnd type="none" w="med" len="med"/>
-                    </a:lnL>
-                    <a:lnR w="9525" cap="flat" cmpd="sng" algn="ctr">
-                      <a:solidFill>
-                        <a:srgbClr val="D5DDE3"/>
-                      </a:solidFill>
-                      <a:prstDash val="solid"/>
-                      <a:round/>
-                      <a:headEnd type="none" w="med" len="med"/>
-                      <a:tailEnd type="none" w="med" len="med"/>
-                    </a:lnR>
-                    <a:lnT w="9525" cap="flat" cmpd="sng" algn="ctr">
-                      <a:solidFill>
-                        <a:srgbClr val="D5DDE3"/>
-                      </a:solidFill>
-                      <a:prstDash val="solid"/>
-                      <a:round/>
-                      <a:headEnd type="none" w="med" len="med"/>
-                      <a:tailEnd type="none" w="med" len="med"/>
-                    </a:lnT>
-                    <a:lnB w="9525" cap="flat" cmpd="sng" algn="ctr">
-                      <a:solidFill>
-                        <a:srgbClr val="D5DDE3"/>
-                      </a:solidFill>
-                      <a:prstDash val="solid"/>
-                      <a:round/>
-                      <a:headEnd type="none" w="med" len="med"/>
-                      <a:tailEnd type="none" w="med" len="med"/>
-                    </a:lnB>
-                    <a:solidFill>
-                      <a:schemeClr val="tx2"/>
-                    </a:solidFill>
-                  </a:tcPr>
-                </a:tc>
-                <a:tc>
-                  <a:txBody>
-                    <a:bodyPr/>
-                    <a:lstStyle/>
-                    <a:p>
-                      <a:pPr indent="0" marL="0">
-                        <a:buNone/>
-                      </a:pPr>
-                      <a:r>
-                        <a:rPr lang="en-US" sz="1200" b="1" dirty="0">
-                          <a:solidFill>
-                            <a:schemeClr val="bg1"/>
-                          </a:solidFill>
-                        </a:rPr>
-                        <a:t>Réalisations</a:t>
-                      </a:r>
-                      <a:endParaRPr lang="en-US" sz="1200" dirty="0"/>
-                    </a:p>
-                  </a:txBody>
-                  <a:tcPr marL="54864" marR="54864" marT="27432" marB="27432" anchor="ctr">
-                    <a:lnL w="9525" cap="flat" cmpd="sng" algn="ctr">
-                      <a:solidFill>
-                        <a:srgbClr val="D5DDE3"/>
-                      </a:solidFill>
-                      <a:prstDash val="solid"/>
-                      <a:round/>
-                      <a:headEnd type="none" w="med" len="med"/>
-                      <a:tailEnd type="none" w="med" len="med"/>
-                    </a:lnL>
-                    <a:lnR w="9525" cap="flat" cmpd="sng" algn="ctr">
-                      <a:solidFill>
-                        <a:srgbClr val="D5DDE3"/>
-                      </a:solidFill>
-                      <a:prstDash val="solid"/>
-                      <a:round/>
-                      <a:headEnd type="none" w="med" len="med"/>
-                      <a:tailEnd type="none" w="med" len="med"/>
-                    </a:lnR>
-                    <a:lnT w="9525" cap="flat" cmpd="sng" algn="ctr">
-                      <a:solidFill>
-                        <a:srgbClr val="D5DDE3"/>
-                      </a:solidFill>
-                      <a:prstDash val="solid"/>
-                      <a:round/>
-                      <a:headEnd type="none" w="med" len="med"/>
-                      <a:tailEnd type="none" w="med" len="med"/>
-                    </a:lnT>
-                    <a:lnB w="9525" cap="flat" cmpd="sng" algn="ctr">
-                      <a:solidFill>
-                        <a:srgbClr val="D5DDE3"/>
-                      </a:solidFill>
-                      <a:prstDash val="solid"/>
-                      <a:round/>
-                      <a:headEnd type="none" w="med" len="med"/>
-                      <a:tailEnd type="none" w="med" len="med"/>
-                    </a:lnB>
-                    <a:solidFill>
-                      <a:schemeClr val="tx2"/>
-                    </a:solidFill>
-                  </a:tcPr>
-                </a:tc>
-                <a:tc>
-                  <a:txBody>
-                    <a:bodyPr/>
-                    <a:lstStyle/>
-                    <a:p>
-                      <a:pPr indent="0" marL="0">
-                        <a:buNone/>
-                      </a:pPr>
-                      <a:r>
-                        <a:rPr lang="en-US" sz="1200" b="1" dirty="0">
-                          <a:solidFill>
-                            <a:schemeClr val="bg1"/>
-                          </a:solidFill>
-                        </a:rPr>
-                        <a:t>Réservation conseillée</a:t>
-                      </a:r>
-                      <a:endParaRPr lang="en-US" sz="1200" dirty="0"/>
-                    </a:p>
-                  </a:txBody>
-                  <a:tcPr marL="54864" marR="54864" marT="27432" marB="27432" anchor="ctr">
-                    <a:lnL w="9525" cap="flat" cmpd="sng" algn="ctr">
-                      <a:solidFill>
-                        <a:srgbClr val="D5DDE3"/>
-                      </a:solidFill>
-                      <a:prstDash val="solid"/>
-                      <a:round/>
-                      <a:headEnd type="none" w="med" len="med"/>
-                      <a:tailEnd type="none" w="med" len="med"/>
-                    </a:lnL>
-                    <a:lnR w="9525" cap="flat" cmpd="sng" algn="ctr">
-                      <a:solidFill>
-                        <a:srgbClr val="D5DDE3"/>
-                      </a:solidFill>
-                      <a:prstDash val="solid"/>
-                      <a:round/>
-                      <a:headEnd type="none" w="med" len="med"/>
-                      <a:tailEnd type="none" w="med" len="med"/>
-                    </a:lnR>
-                    <a:lnT w="9525" cap="flat" cmpd="sng" algn="ctr">
-                      <a:solidFill>
-                        <a:srgbClr val="D5DDE3"/>
-                      </a:solidFill>
-                      <a:prstDash val="solid"/>
-                      <a:round/>
-                      <a:headEnd type="none" w="med" len="med"/>
-                      <a:tailEnd type="none" w="med" len="med"/>
-                    </a:lnT>
-                    <a:lnB w="9525" cap="flat" cmpd="sng" algn="ctr">
-                      <a:solidFill>
-                        <a:srgbClr val="D5DDE3"/>
-                      </a:solidFill>
-                      <a:prstDash val="solid"/>
-                      <a:round/>
-                      <a:headEnd type="none" w="med" len="med"/>
-                      <a:tailEnd type="none" w="med" len="med"/>
-                    </a:lnB>
-                    <a:solidFill>
-                      <a:schemeClr val="tx2"/>
-                    </a:solidFill>
-                  </a:tcPr>
-                </a:tc>
-              </a:tr>
-              <a:tr h="384048">
-                <a:tc>
-                  <a:txBody>
-                    <a:bodyPr/>
-                    <a:lstStyle/>
-                    <a:p>
-                      <a:pPr indent="0" marL="0">
-                        <a:buNone/>
-                      </a:pPr>
-                      <a:r>
-                        <a:rPr lang="en-US" sz="1200" b="1" dirty="0">
-                          <a:solidFill>
-                            <a:schemeClr val="tx1"/>
-                          </a:solidFill>
-                        </a:rPr>
-                        <a:t>Architecte M365</a:t>
-                      </a:r>
-                      <a:endParaRPr lang="en-US" sz="1200" dirty="0"/>
-                    </a:p>
-                  </a:txBody>
-                  <a:tcPr marL="54864" marR="54864" marT="27432" marB="27432" anchor="ctr">
-                    <a:lnL w="9525" cap="flat" cmpd="sng" algn="ctr">
-                      <a:solidFill>
-                        <a:srgbClr val="D5DDE3"/>
-                      </a:solidFill>
-                      <a:prstDash val="solid"/>
-                      <a:round/>
-                      <a:headEnd type="none" w="med" len="med"/>
-                      <a:tailEnd type="none" w="med" len="med"/>
-                    </a:lnL>
-                    <a:lnR w="9525" cap="flat" cmpd="sng" algn="ctr">
-                      <a:solidFill>
-                        <a:srgbClr val="D5DDE3"/>
-                      </a:solidFill>
-                      <a:prstDash val="solid"/>
-                      <a:round/>
-                      <a:headEnd type="none" w="med" len="med"/>
-                      <a:tailEnd type="none" w="med" len="med"/>
-                    </a:lnR>
-                    <a:lnT w="9525" cap="flat" cmpd="sng" algn="ctr">
-                      <a:solidFill>
-                        <a:srgbClr val="D5DDE3"/>
-                      </a:solidFill>
-                      <a:prstDash val="solid"/>
-                      <a:round/>
-                      <a:headEnd type="none" w="med" len="med"/>
-                      <a:tailEnd type="none" w="med" len="med"/>
-                    </a:lnT>
-                    <a:lnB w="9525" cap="flat" cmpd="sng" algn="ctr">
-                      <a:solidFill>
-                        <a:srgbClr val="D5DDE3"/>
-                      </a:solidFill>
-                      <a:prstDash val="solid"/>
-                      <a:round/>
-                      <a:headEnd type="none" w="med" len="med"/>
-                      <a:tailEnd type="none" w="med" len="med"/>
-                    </a:lnB>
-                  </a:tcPr>
-                </a:tc>
-                <a:tc>
-                  <a:txBody>
-                    <a:bodyPr/>
-                    <a:lstStyle/>
-                    <a:p>
-                      <a:pPr indent="0" marL="0">
-                        <a:buNone/>
-                      </a:pPr>
-                      <a:r>
-                        <a:rPr lang="en-US" sz="1200" dirty="0">
-                          <a:solidFill>
-                            <a:schemeClr val="tx1"/>
-                          </a:solidFill>
-                        </a:rPr>
-                        <a:t>~12 h</a:t>
-                      </a:r>
-                      <a:endParaRPr lang="en-US" sz="1200" dirty="0"/>
-                    </a:p>
-                  </a:txBody>
-                  <a:tcPr marL="54864" marR="54864" marT="27432" marB="27432" anchor="ctr">
-                    <a:lnL w="9525" cap="flat" cmpd="sng" algn="ctr">
-                      <a:solidFill>
-                        <a:srgbClr val="D5DDE3"/>
-                      </a:solidFill>
-                      <a:prstDash val="solid"/>
-                      <a:round/>
-                      <a:headEnd type="none" w="med" len="med"/>
-                      <a:tailEnd type="none" w="med" len="med"/>
-                    </a:lnL>
-                    <a:lnR w="9525" cap="flat" cmpd="sng" algn="ctr">
-                      <a:solidFill>
-                        <a:srgbClr val="D5DDE3"/>
-                      </a:solidFill>
-                      <a:prstDash val="solid"/>
-                      <a:round/>
-                      <a:headEnd type="none" w="med" len="med"/>
-                      <a:tailEnd type="none" w="med" len="med"/>
-                    </a:lnR>
-                    <a:lnT w="9525" cap="flat" cmpd="sng" algn="ctr">
-                      <a:solidFill>
-                        <a:srgbClr val="D5DDE3"/>
-                      </a:solidFill>
-                      <a:prstDash val="solid"/>
-                      <a:round/>
-                      <a:headEnd type="none" w="med" len="med"/>
-                      <a:tailEnd type="none" w="med" len="med"/>
-                    </a:lnT>
-                    <a:lnB w="9525" cap="flat" cmpd="sng" algn="ctr">
-                      <a:solidFill>
-                        <a:srgbClr val="D5DDE3"/>
-                      </a:solidFill>
-                      <a:prstDash val="solid"/>
-                      <a:round/>
-                      <a:headEnd type="none" w="med" len="med"/>
-                      <a:tailEnd type="none" w="med" len="med"/>
-                    </a:lnB>
-                  </a:tcPr>
-                </a:tc>
-                <a:tc>
-                  <a:txBody>
-                    <a:bodyPr/>
-                    <a:lstStyle/>
-                    <a:p>
-                      <a:pPr indent="0" marL="0">
-                        <a:buNone/>
-                      </a:pPr>
-                      <a:r>
-                        <a:rPr lang="en-US" sz="1200" dirty="0">
-                          <a:solidFill>
-                            <a:schemeClr val="tx1"/>
-                          </a:solidFill>
-                        </a:rPr>
-                        <a:t>~10 j</a:t>
-                      </a:r>
-                      <a:endParaRPr lang="en-US" sz="1200" dirty="0"/>
-                    </a:p>
-                  </a:txBody>
-                  <a:tcPr marL="54864" marR="54864" marT="27432" marB="27432" anchor="ctr">
-                    <a:lnL w="9525" cap="flat" cmpd="sng" algn="ctr">
-                      <a:solidFill>
-                        <a:srgbClr val="D5DDE3"/>
-                      </a:solidFill>
-                      <a:prstDash val="solid"/>
-                      <a:round/>
-                      <a:headEnd type="none" w="med" len="med"/>
-                      <a:tailEnd type="none" w="med" len="med"/>
-                    </a:lnL>
-                    <a:lnR w="9525" cap="flat" cmpd="sng" algn="ctr">
-                      <a:solidFill>
-                        <a:srgbClr val="D5DDE3"/>
-                      </a:solidFill>
-                      <a:prstDash val="solid"/>
-                      <a:round/>
-                      <a:headEnd type="none" w="med" len="med"/>
-                      <a:tailEnd type="none" w="med" len="med"/>
-                    </a:lnR>
-                    <a:lnT w="9525" cap="flat" cmpd="sng" algn="ctr">
-                      <a:solidFill>
-                        <a:srgbClr val="D5DDE3"/>
-                      </a:solidFill>
-                      <a:prstDash val="solid"/>
-                      <a:round/>
-                      <a:headEnd type="none" w="med" len="med"/>
-                      <a:tailEnd type="none" w="med" len="med"/>
-                    </a:lnT>
-                    <a:lnB w="9525" cap="flat" cmpd="sng" algn="ctr">
-                      <a:solidFill>
-                        <a:srgbClr val="D5DDE3"/>
-                      </a:solidFill>
-                      <a:prstDash val="solid"/>
-                      <a:round/>
-                      <a:headEnd type="none" w="med" len="med"/>
-                      <a:tailEnd type="none" w="med" len="med"/>
-                    </a:lnB>
-                  </a:tcPr>
-                </a:tc>
-                <a:tc>
-                  <a:txBody>
-                    <a:bodyPr/>
-                    <a:lstStyle/>
-                    <a:p>
-                      <a:pPr indent="0" marL="0">
-                        <a:buNone/>
-                      </a:pPr>
-                      <a:r>
-                        <a:rPr lang="en-US" sz="1200" dirty="0">
-                          <a:solidFill>
-                            <a:schemeClr val="tx1"/>
-                          </a:solidFill>
-                        </a:rPr>
-                        <a:t>80 %</a:t>
-                      </a:r>
-                      <a:endParaRPr lang="en-US" sz="1200" dirty="0"/>
-                    </a:p>
-                  </a:txBody>
-                  <a:tcPr marL="54864" marR="54864" marT="27432" marB="27432" anchor="ctr">
-                    <a:lnL w="9525" cap="flat" cmpd="sng" algn="ctr">
-                      <a:solidFill>
-                        <a:srgbClr val="D5DDE3"/>
-                      </a:solidFill>
-                      <a:prstDash val="solid"/>
-                      <a:round/>
-                      <a:headEnd type="none" w="med" len="med"/>
-                      <a:tailEnd type="none" w="med" len="med"/>
-                    </a:lnL>
-                    <a:lnR w="9525" cap="flat" cmpd="sng" algn="ctr">
-                      <a:solidFill>
-                        <a:srgbClr val="D5DDE3"/>
-                      </a:solidFill>
-                      <a:prstDash val="solid"/>
-                      <a:round/>
-                      <a:headEnd type="none" w="med" len="med"/>
-                      <a:tailEnd type="none" w="med" len="med"/>
-                    </a:lnR>
-                    <a:lnT w="9525" cap="flat" cmpd="sng" algn="ctr">
-                      <a:solidFill>
-                        <a:srgbClr val="D5DDE3"/>
-                      </a:solidFill>
-                      <a:prstDash val="solid"/>
-                      <a:round/>
-                      <a:headEnd type="none" w="med" len="med"/>
-                      <a:tailEnd type="none" w="med" len="med"/>
-                    </a:lnT>
-                    <a:lnB w="9525" cap="flat" cmpd="sng" algn="ctr">
-                      <a:solidFill>
-                        <a:srgbClr val="D5DDE3"/>
-                      </a:solidFill>
-                      <a:prstDash val="solid"/>
-                      <a:round/>
-                      <a:headEnd type="none" w="med" len="med"/>
-                      <a:tailEnd type="none" w="med" len="med"/>
-                    </a:lnB>
-                  </a:tcPr>
-                </a:tc>
-              </a:tr>
-              <a:tr h="384048">
-                <a:tc>
-                  <a:txBody>
-                    <a:bodyPr/>
-                    <a:lstStyle/>
-                    <a:p>
-                      <a:pPr indent="0" marL="0">
-                        <a:buNone/>
-                      </a:pPr>
-                      <a:r>
-                        <a:rPr lang="en-US" sz="1200" b="1" dirty="0">
-                          <a:solidFill>
-                            <a:schemeClr val="tx1"/>
-                          </a:solidFill>
-                        </a:rPr>
-                        <a:t>Chef de projet</a:t>
-                      </a:r>
-                      <a:endParaRPr lang="en-US" sz="1200" dirty="0"/>
-                    </a:p>
-                  </a:txBody>
-                  <a:tcPr marL="54864" marR="54864" marT="27432" marB="27432" anchor="ctr">
-                    <a:lnL w="9525" cap="flat" cmpd="sng" algn="ctr">
-                      <a:solidFill>
-                        <a:srgbClr val="D5DDE3"/>
-                      </a:solidFill>
-                      <a:prstDash val="solid"/>
-                      <a:round/>
-                      <a:headEnd type="none" w="med" len="med"/>
-                      <a:tailEnd type="none" w="med" len="med"/>
-                    </a:lnL>
-                    <a:lnR w="9525" cap="flat" cmpd="sng" algn="ctr">
-                      <a:solidFill>
-                        <a:srgbClr val="D5DDE3"/>
-                      </a:solidFill>
-                      <a:prstDash val="solid"/>
-                      <a:round/>
-                      <a:headEnd type="none" w="med" len="med"/>
-                      <a:tailEnd type="none" w="med" len="med"/>
-                    </a:lnR>
-                    <a:lnT w="9525" cap="flat" cmpd="sng" algn="ctr">
-                      <a:solidFill>
-                        <a:srgbClr val="D5DDE3"/>
-                      </a:solidFill>
-                      <a:prstDash val="solid"/>
-                      <a:round/>
-                      <a:headEnd type="none" w="med" len="med"/>
-                      <a:tailEnd type="none" w="med" len="med"/>
-                    </a:lnT>
-                    <a:lnB w="9525" cap="flat" cmpd="sng" algn="ctr">
-                      <a:solidFill>
-                        <a:srgbClr val="D5DDE3"/>
-                      </a:solidFill>
-                      <a:prstDash val="solid"/>
-                      <a:round/>
-                      <a:headEnd type="none" w="med" len="med"/>
-                      <a:tailEnd type="none" w="med" len="med"/>
-                    </a:lnB>
-                  </a:tcPr>
-                </a:tc>
-                <a:tc>
-                  <a:txBody>
-                    <a:bodyPr/>
-                    <a:lstStyle/>
-                    <a:p>
-                      <a:pPr indent="0" marL="0">
-                        <a:buNone/>
-                      </a:pPr>
-                      <a:r>
-                        <a:rPr lang="en-US" sz="1200" dirty="0">
-                          <a:solidFill>
-                            <a:schemeClr val="tx1"/>
-                          </a:solidFill>
-                        </a:rPr>
-                        <a:t>~9 h</a:t>
-                      </a:r>
-                      <a:endParaRPr lang="en-US" sz="1200" dirty="0"/>
-                    </a:p>
-                  </a:txBody>
-                  <a:tcPr marL="54864" marR="54864" marT="27432" marB="27432" anchor="ctr">
-                    <a:lnL w="9525" cap="flat" cmpd="sng" algn="ctr">
-                      <a:solidFill>
-                        <a:srgbClr val="D5DDE3"/>
-                      </a:solidFill>
-                      <a:prstDash val="solid"/>
-                      <a:round/>
-                      <a:headEnd type="none" w="med" len="med"/>
-                      <a:tailEnd type="none" w="med" len="med"/>
-                    </a:lnL>
-                    <a:lnR w="9525" cap="flat" cmpd="sng" algn="ctr">
-                      <a:solidFill>
-                        <a:srgbClr val="D5DDE3"/>
-                      </a:solidFill>
-                      <a:prstDash val="solid"/>
-                      <a:round/>
-                      <a:headEnd type="none" w="med" len="med"/>
-                      <a:tailEnd type="none" w="med" len="med"/>
-                    </a:lnR>
-                    <a:lnT w="9525" cap="flat" cmpd="sng" algn="ctr">
-                      <a:solidFill>
-                        <a:srgbClr val="D5DDE3"/>
-                      </a:solidFill>
-                      <a:prstDash val="solid"/>
-                      <a:round/>
-                      <a:headEnd type="none" w="med" len="med"/>
-                      <a:tailEnd type="none" w="med" len="med"/>
-                    </a:lnT>
-                    <a:lnB w="9525" cap="flat" cmpd="sng" algn="ctr">
-                      <a:solidFill>
-                        <a:srgbClr val="D5DDE3"/>
-                      </a:solidFill>
-                      <a:prstDash val="solid"/>
-                      <a:round/>
-                      <a:headEnd type="none" w="med" len="med"/>
-                      <a:tailEnd type="none" w="med" len="med"/>
-                    </a:lnB>
-                  </a:tcPr>
-                </a:tc>
-                <a:tc>
-                  <a:txBody>
-                    <a:bodyPr/>
-                    <a:lstStyle/>
-                    <a:p>
-                      <a:pPr indent="0" marL="0">
-                        <a:buNone/>
-                      </a:pPr>
-                      <a:r>
-                        <a:rPr lang="en-US" sz="1200" dirty="0">
-                          <a:solidFill>
-                            <a:schemeClr val="tx1"/>
-                          </a:solidFill>
-                        </a:rPr>
-                        <a:t>~5 j</a:t>
-                      </a:r>
-                      <a:endParaRPr lang="en-US" sz="1200" dirty="0"/>
-                    </a:p>
-                  </a:txBody>
-                  <a:tcPr marL="54864" marR="54864" marT="27432" marB="27432" anchor="ctr">
-                    <a:lnL w="9525" cap="flat" cmpd="sng" algn="ctr">
-                      <a:solidFill>
-                        <a:srgbClr val="D5DDE3"/>
-                      </a:solidFill>
-                      <a:prstDash val="solid"/>
-                      <a:round/>
-                      <a:headEnd type="none" w="med" len="med"/>
-                      <a:tailEnd type="none" w="med" len="med"/>
-                    </a:lnL>
-                    <a:lnR w="9525" cap="flat" cmpd="sng" algn="ctr">
-                      <a:solidFill>
-                        <a:srgbClr val="D5DDE3"/>
-                      </a:solidFill>
-                      <a:prstDash val="solid"/>
-                      <a:round/>
-                      <a:headEnd type="none" w="med" len="med"/>
-                      <a:tailEnd type="none" w="med" len="med"/>
-                    </a:lnR>
-                    <a:lnT w="9525" cap="flat" cmpd="sng" algn="ctr">
-                      <a:solidFill>
-                        <a:srgbClr val="D5DDE3"/>
-                      </a:solidFill>
-                      <a:prstDash val="solid"/>
-                      <a:round/>
-                      <a:headEnd type="none" w="med" len="med"/>
-                      <a:tailEnd type="none" w="med" len="med"/>
-                    </a:lnT>
-                    <a:lnB w="9525" cap="flat" cmpd="sng" algn="ctr">
-                      <a:solidFill>
-                        <a:srgbClr val="D5DDE3"/>
-                      </a:solidFill>
-                      <a:prstDash val="solid"/>
-                      <a:round/>
-                      <a:headEnd type="none" w="med" len="med"/>
-                      <a:tailEnd type="none" w="med" len="med"/>
-                    </a:lnB>
-                  </a:tcPr>
-                </a:tc>
-                <a:tc>
-                  <a:txBody>
-                    <a:bodyPr/>
-                    <a:lstStyle/>
-                    <a:p>
-                      <a:pPr indent="0" marL="0">
-                        <a:buNone/>
-                      </a:pPr>
-                      <a:r>
-                        <a:rPr lang="en-US" sz="1200" dirty="0">
-                          <a:solidFill>
-                            <a:schemeClr val="tx1"/>
-                          </a:solidFill>
-                        </a:rPr>
-                        <a:t>50 %</a:t>
-                      </a:r>
-                      <a:endParaRPr lang="en-US" sz="1200" dirty="0"/>
-                    </a:p>
-                  </a:txBody>
-                  <a:tcPr marL="54864" marR="54864" marT="27432" marB="27432" anchor="ctr">
-                    <a:lnL w="9525" cap="flat" cmpd="sng" algn="ctr">
-                      <a:solidFill>
-                        <a:srgbClr val="D5DDE3"/>
-                      </a:solidFill>
-                      <a:prstDash val="solid"/>
-                      <a:round/>
-                      <a:headEnd type="none" w="med" len="med"/>
-                      <a:tailEnd type="none" w="med" len="med"/>
-                    </a:lnL>
-                    <a:lnR w="9525" cap="flat" cmpd="sng" algn="ctr">
-                      <a:solidFill>
-                        <a:srgbClr val="D5DDE3"/>
-                      </a:solidFill>
-                      <a:prstDash val="solid"/>
-                      <a:round/>
-                      <a:headEnd type="none" w="med" len="med"/>
-                      <a:tailEnd type="none" w="med" len="med"/>
-                    </a:lnR>
-                    <a:lnT w="9525" cap="flat" cmpd="sng" algn="ctr">
-                      <a:solidFill>
-                        <a:srgbClr val="D5DDE3"/>
-                      </a:solidFill>
-                      <a:prstDash val="solid"/>
-                      <a:round/>
-                      <a:headEnd type="none" w="med" len="med"/>
-                      <a:tailEnd type="none" w="med" len="med"/>
-                    </a:lnT>
-                    <a:lnB w="9525" cap="flat" cmpd="sng" algn="ctr">
-                      <a:solidFill>
-                        <a:srgbClr val="D5DDE3"/>
-                      </a:solidFill>
-                      <a:prstDash val="solid"/>
-                      <a:round/>
-                      <a:headEnd type="none" w="med" len="med"/>
-                      <a:tailEnd type="none" w="med" len="med"/>
-                    </a:lnB>
-                  </a:tcPr>
-                </a:tc>
-              </a:tr>
-              <a:tr h="384048">
-                <a:tc>
-                  <a:txBody>
-                    <a:bodyPr/>
-                    <a:lstStyle/>
-                    <a:p>
-                      <a:pPr indent="0" marL="0">
-                        <a:buNone/>
-                      </a:pPr>
-                      <a:r>
-                        <a:rPr lang="en-US" sz="1200" b="1" dirty="0">
-                          <a:solidFill>
-                            <a:schemeClr val="tx1"/>
-                          </a:solidFill>
-                        </a:rPr>
-                        <a:t>TI M365</a:t>
-                      </a:r>
-                      <a:endParaRPr lang="en-US" sz="1200" dirty="0"/>
-                    </a:p>
-                  </a:txBody>
-                  <a:tcPr marL="54864" marR="54864" marT="27432" marB="27432" anchor="ctr">
-                    <a:lnL w="9525" cap="flat" cmpd="sng" algn="ctr">
-                      <a:solidFill>
-                        <a:srgbClr val="D5DDE3"/>
-                      </a:solidFill>
-                      <a:prstDash val="solid"/>
-                      <a:round/>
-                      <a:headEnd type="none" w="med" len="med"/>
-                      <a:tailEnd type="none" w="med" len="med"/>
-                    </a:lnL>
-                    <a:lnR w="9525" cap="flat" cmpd="sng" algn="ctr">
-                      <a:solidFill>
-                        <a:srgbClr val="D5DDE3"/>
-                      </a:solidFill>
-                      <a:prstDash val="solid"/>
-                      <a:round/>
-                      <a:headEnd type="none" w="med" len="med"/>
-                      <a:tailEnd type="none" w="med" len="med"/>
-                    </a:lnR>
-                    <a:lnT w="9525" cap="flat" cmpd="sng" algn="ctr">
-                      <a:solidFill>
-                        <a:srgbClr val="D5DDE3"/>
-                      </a:solidFill>
-                      <a:prstDash val="solid"/>
-                      <a:round/>
-                      <a:headEnd type="none" w="med" len="med"/>
-                      <a:tailEnd type="none" w="med" len="med"/>
-                    </a:lnT>
-                    <a:lnB w="9525" cap="flat" cmpd="sng" algn="ctr">
-                      <a:solidFill>
-                        <a:srgbClr val="D5DDE3"/>
-                      </a:solidFill>
-                      <a:prstDash val="solid"/>
-                      <a:round/>
-                      <a:headEnd type="none" w="med" len="med"/>
-                      <a:tailEnd type="none" w="med" len="med"/>
-                    </a:lnB>
-                  </a:tcPr>
-                </a:tc>
-                <a:tc>
-                  <a:txBody>
-                    <a:bodyPr/>
-                    <a:lstStyle/>
-                    <a:p>
-                      <a:pPr indent="0" marL="0">
-                        <a:buNone/>
-                      </a:pPr>
-                      <a:r>
-                        <a:rPr lang="en-US" sz="1200" dirty="0">
-                          <a:solidFill>
-                            <a:schemeClr val="tx1"/>
-                          </a:solidFill>
-                        </a:rPr>
-                        <a:t>~8 h</a:t>
-                      </a:r>
-                      <a:endParaRPr lang="en-US" sz="1200" dirty="0"/>
-                    </a:p>
-                  </a:txBody>
-                  <a:tcPr marL="54864" marR="54864" marT="27432" marB="27432" anchor="ctr">
-                    <a:lnL w="9525" cap="flat" cmpd="sng" algn="ctr">
-                      <a:solidFill>
-                        <a:srgbClr val="D5DDE3"/>
-                      </a:solidFill>
-                      <a:prstDash val="solid"/>
-                      <a:round/>
-                      <a:headEnd type="none" w="med" len="med"/>
-                      <a:tailEnd type="none" w="med" len="med"/>
-                    </a:lnL>
-                    <a:lnR w="9525" cap="flat" cmpd="sng" algn="ctr">
-                      <a:solidFill>
-                        <a:srgbClr val="D5DDE3"/>
-                      </a:solidFill>
-                      <a:prstDash val="solid"/>
-                      <a:round/>
-                      <a:headEnd type="none" w="med" len="med"/>
-                      <a:tailEnd type="none" w="med" len="med"/>
-                    </a:lnR>
-                    <a:lnT w="9525" cap="flat" cmpd="sng" algn="ctr">
-                      <a:solidFill>
-                        <a:srgbClr val="D5DDE3"/>
-                      </a:solidFill>
-                      <a:prstDash val="solid"/>
-                      <a:round/>
-                      <a:headEnd type="none" w="med" len="med"/>
-                      <a:tailEnd type="none" w="med" len="med"/>
-                    </a:lnT>
-                    <a:lnB w="9525" cap="flat" cmpd="sng" algn="ctr">
-                      <a:solidFill>
-                        <a:srgbClr val="D5DDE3"/>
-                      </a:solidFill>
-                      <a:prstDash val="solid"/>
-                      <a:round/>
-                      <a:headEnd type="none" w="med" len="med"/>
-                      <a:tailEnd type="none" w="med" len="med"/>
-                    </a:lnB>
-                  </a:tcPr>
-                </a:tc>
-                <a:tc>
-                  <a:txBody>
-                    <a:bodyPr/>
-                    <a:lstStyle/>
-                    <a:p>
-                      <a:pPr indent="0" marL="0">
-                        <a:buNone/>
-                      </a:pPr>
-                      <a:r>
-                        <a:rPr lang="en-US" sz="1200" dirty="0">
-                          <a:solidFill>
-                            <a:schemeClr val="tx1"/>
-                          </a:solidFill>
-                        </a:rPr>
-                        <a:t>~25 j</a:t>
-                      </a:r>
-                      <a:endParaRPr lang="en-US" sz="1200" dirty="0"/>
-                    </a:p>
-                  </a:txBody>
-                  <a:tcPr marL="54864" marR="54864" marT="27432" marB="27432" anchor="ctr">
-                    <a:lnL w="9525" cap="flat" cmpd="sng" algn="ctr">
-                      <a:solidFill>
-                        <a:srgbClr val="D5DDE3"/>
-                      </a:solidFill>
-                      <a:prstDash val="solid"/>
-                      <a:round/>
-                      <a:headEnd type="none" w="med" len="med"/>
-                      <a:tailEnd type="none" w="med" len="med"/>
-                    </a:lnL>
-                    <a:lnR w="9525" cap="flat" cmpd="sng" algn="ctr">
-                      <a:solidFill>
-                        <a:srgbClr val="D5DDE3"/>
-                      </a:solidFill>
-                      <a:prstDash val="solid"/>
-                      <a:round/>
-                      <a:headEnd type="none" w="med" len="med"/>
-                      <a:tailEnd type="none" w="med" len="med"/>
-                    </a:lnR>
-                    <a:lnT w="9525" cap="flat" cmpd="sng" algn="ctr">
-                      <a:solidFill>
-                        <a:srgbClr val="D5DDE3"/>
-                      </a:solidFill>
-                      <a:prstDash val="solid"/>
-                      <a:round/>
-                      <a:headEnd type="none" w="med" len="med"/>
-                      <a:tailEnd type="none" w="med" len="med"/>
-                    </a:lnT>
-                    <a:lnB w="9525" cap="flat" cmpd="sng" algn="ctr">
-                      <a:solidFill>
-                        <a:srgbClr val="D5DDE3"/>
-                      </a:solidFill>
-                      <a:prstDash val="solid"/>
-                      <a:round/>
-                      <a:headEnd type="none" w="med" len="med"/>
-                      <a:tailEnd type="none" w="med" len="med"/>
-                    </a:lnB>
-                  </a:tcPr>
-                </a:tc>
-                <a:tc>
-                  <a:txBody>
-                    <a:bodyPr/>
-                    <a:lstStyle/>
-                    <a:p>
-                      <a:pPr indent="0" marL="0">
-                        <a:buNone/>
-                      </a:pPr>
-                      <a:r>
-                        <a:rPr lang="en-US" sz="1200" dirty="0">
-                          <a:solidFill>
-                            <a:schemeClr val="tx1"/>
-                          </a:solidFill>
-                        </a:rPr>
-                        <a:t>2 à 3 personnes à temps plein</a:t>
-                      </a:r>
-                      <a:endParaRPr lang="en-US" sz="1200" dirty="0"/>
-                    </a:p>
-                  </a:txBody>
-                  <a:tcPr marL="54864" marR="54864" marT="27432" marB="27432" anchor="ctr">
-                    <a:lnL w="9525" cap="flat" cmpd="sng" algn="ctr">
-                      <a:solidFill>
-                        <a:srgbClr val="D5DDE3"/>
-                      </a:solidFill>
-                      <a:prstDash val="solid"/>
-                      <a:round/>
-                      <a:headEnd type="none" w="med" len="med"/>
-                      <a:tailEnd type="none" w="med" len="med"/>
-                    </a:lnL>
-                    <a:lnR w="9525" cap="flat" cmpd="sng" algn="ctr">
-                      <a:solidFill>
-                        <a:srgbClr val="D5DDE3"/>
-                      </a:solidFill>
-                      <a:prstDash val="solid"/>
-                      <a:round/>
-                      <a:headEnd type="none" w="med" len="med"/>
-                      <a:tailEnd type="none" w="med" len="med"/>
-                    </a:lnR>
-                    <a:lnT w="9525" cap="flat" cmpd="sng" algn="ctr">
-                      <a:solidFill>
-                        <a:srgbClr val="D5DDE3"/>
-                      </a:solidFill>
-                      <a:prstDash val="solid"/>
-                      <a:round/>
-                      <a:headEnd type="none" w="med" len="med"/>
-                      <a:tailEnd type="none" w="med" len="med"/>
-                    </a:lnT>
-                    <a:lnB w="9525" cap="flat" cmpd="sng" algn="ctr">
-                      <a:solidFill>
-                        <a:srgbClr val="D5DDE3"/>
-                      </a:solidFill>
-                      <a:prstDash val="solid"/>
-                      <a:round/>
-                      <a:headEnd type="none" w="med" len="med"/>
-                      <a:tailEnd type="none" w="med" len="med"/>
-                    </a:lnB>
-                  </a:tcPr>
-                </a:tc>
-              </a:tr>
-              <a:tr h="384048">
-                <a:tc>
-                  <a:txBody>
-                    <a:bodyPr/>
-                    <a:lstStyle/>
-                    <a:p>
-                      <a:pPr indent="0" marL="0">
-                        <a:buNone/>
-                      </a:pPr>
-                      <a:r>
-                        <a:rPr lang="en-US" sz="1200" b="1" dirty="0">
-                          <a:solidFill>
-                            <a:schemeClr val="tx1"/>
-                          </a:solidFill>
-                        </a:rPr>
-                        <a:t>Sécurité</a:t>
-                      </a:r>
-                      <a:endParaRPr lang="en-US" sz="1200" dirty="0"/>
-                    </a:p>
-                  </a:txBody>
-                  <a:tcPr marL="54864" marR="54864" marT="27432" marB="27432" anchor="ctr">
-                    <a:lnL w="9525" cap="flat" cmpd="sng" algn="ctr">
-                      <a:solidFill>
-                        <a:srgbClr val="D5DDE3"/>
-                      </a:solidFill>
-                      <a:prstDash val="solid"/>
-                      <a:round/>
-                      <a:headEnd type="none" w="med" len="med"/>
-                      <a:tailEnd type="none" w="med" len="med"/>
-                    </a:lnL>
-                    <a:lnR w="9525" cap="flat" cmpd="sng" algn="ctr">
-                      <a:solidFill>
-                        <a:srgbClr val="D5DDE3"/>
-                      </a:solidFill>
-                      <a:prstDash val="solid"/>
-                      <a:round/>
-                      <a:headEnd type="none" w="med" len="med"/>
-                      <a:tailEnd type="none" w="med" len="med"/>
-                    </a:lnR>
-                    <a:lnT w="9525" cap="flat" cmpd="sng" algn="ctr">
-                      <a:solidFill>
-                        <a:srgbClr val="D5DDE3"/>
-                      </a:solidFill>
-                      <a:prstDash val="solid"/>
-                      <a:round/>
-                      <a:headEnd type="none" w="med" len="med"/>
-                      <a:tailEnd type="none" w="med" len="med"/>
-                    </a:lnT>
-                    <a:lnB w="9525" cap="flat" cmpd="sng" algn="ctr">
-                      <a:solidFill>
-                        <a:srgbClr val="D5DDE3"/>
-                      </a:solidFill>
-                      <a:prstDash val="solid"/>
-                      <a:round/>
-                      <a:headEnd type="none" w="med" len="med"/>
-                      <a:tailEnd type="none" w="med" len="med"/>
-                    </a:lnB>
-                  </a:tcPr>
-                </a:tc>
-                <a:tc>
-                  <a:txBody>
-                    <a:bodyPr/>
-                    <a:lstStyle/>
-                    <a:p>
-                      <a:pPr indent="0" marL="0">
-                        <a:buNone/>
-                      </a:pPr>
-                      <a:r>
-                        <a:rPr lang="en-US" sz="1200" dirty="0">
-                          <a:solidFill>
-                            <a:schemeClr val="tx1"/>
-                          </a:solidFill>
-                        </a:rPr>
-                        <a:t>~7 h</a:t>
-                      </a:r>
-                      <a:endParaRPr lang="en-US" sz="1200" dirty="0"/>
-                    </a:p>
-                  </a:txBody>
-                  <a:tcPr marL="54864" marR="54864" marT="27432" marB="27432" anchor="ctr">
-                    <a:lnL w="9525" cap="flat" cmpd="sng" algn="ctr">
-                      <a:solidFill>
-                        <a:srgbClr val="D5DDE3"/>
-                      </a:solidFill>
-                      <a:prstDash val="solid"/>
-                      <a:round/>
-                      <a:headEnd type="none" w="med" len="med"/>
-                      <a:tailEnd type="none" w="med" len="med"/>
-                    </a:lnL>
-                    <a:lnR w="9525" cap="flat" cmpd="sng" algn="ctr">
-                      <a:solidFill>
-                        <a:srgbClr val="D5DDE3"/>
-                      </a:solidFill>
-                      <a:prstDash val="solid"/>
-                      <a:round/>
-                      <a:headEnd type="none" w="med" len="med"/>
-                      <a:tailEnd type="none" w="med" len="med"/>
-                    </a:lnR>
-                    <a:lnT w="9525" cap="flat" cmpd="sng" algn="ctr">
-                      <a:solidFill>
-                        <a:srgbClr val="D5DDE3"/>
-                      </a:solidFill>
-                      <a:prstDash val="solid"/>
-                      <a:round/>
-                      <a:headEnd type="none" w="med" len="med"/>
-                      <a:tailEnd type="none" w="med" len="med"/>
-                    </a:lnT>
-                    <a:lnB w="9525" cap="flat" cmpd="sng" algn="ctr">
-                      <a:solidFill>
-                        <a:srgbClr val="D5DDE3"/>
-                      </a:solidFill>
-                      <a:prstDash val="solid"/>
-                      <a:round/>
-                      <a:headEnd type="none" w="med" len="med"/>
-                      <a:tailEnd type="none" w="med" len="med"/>
-                    </a:lnB>
-                  </a:tcPr>
-                </a:tc>
-                <a:tc>
-                  <a:txBody>
-                    <a:bodyPr/>
-                    <a:lstStyle/>
-                    <a:p>
-                      <a:pPr indent="0" marL="0">
-                        <a:buNone/>
-                      </a:pPr>
-                      <a:r>
-                        <a:rPr lang="en-US" sz="1200" dirty="0">
-                          <a:solidFill>
-                            <a:schemeClr val="tx1"/>
-                          </a:solidFill>
-                        </a:rPr>
-                        <a:t>~6 j</a:t>
-                      </a:r>
-                      <a:endParaRPr lang="en-US" sz="1200" dirty="0"/>
-                    </a:p>
-                  </a:txBody>
-                  <a:tcPr marL="54864" marR="54864" marT="27432" marB="27432" anchor="ctr">
-                    <a:lnL w="9525" cap="flat" cmpd="sng" algn="ctr">
-                      <a:solidFill>
-                        <a:srgbClr val="D5DDE3"/>
-                      </a:solidFill>
-                      <a:prstDash val="solid"/>
-                      <a:round/>
-                      <a:headEnd type="none" w="med" len="med"/>
-                      <a:tailEnd type="none" w="med" len="med"/>
-                    </a:lnL>
-                    <a:lnR w="9525" cap="flat" cmpd="sng" algn="ctr">
-                      <a:solidFill>
-                        <a:srgbClr val="D5DDE3"/>
-                      </a:solidFill>
-                      <a:prstDash val="solid"/>
-                      <a:round/>
-                      <a:headEnd type="none" w="med" len="med"/>
-                      <a:tailEnd type="none" w="med" len="med"/>
-                    </a:lnR>
-                    <a:lnT w="9525" cap="flat" cmpd="sng" algn="ctr">
-                      <a:solidFill>
-                        <a:srgbClr val="D5DDE3"/>
-                      </a:solidFill>
-                      <a:prstDash val="solid"/>
-                      <a:round/>
-                      <a:headEnd type="none" w="med" len="med"/>
-                      <a:tailEnd type="none" w="med" len="med"/>
-                    </a:lnT>
-                    <a:lnB w="9525" cap="flat" cmpd="sng" algn="ctr">
-                      <a:solidFill>
-                        <a:srgbClr val="D5DDE3"/>
-                      </a:solidFill>
-                      <a:prstDash val="solid"/>
-                      <a:round/>
-                      <a:headEnd type="none" w="med" len="med"/>
-                      <a:tailEnd type="none" w="med" len="med"/>
-                    </a:lnB>
-                  </a:tcPr>
-                </a:tc>
-                <a:tc>
-                  <a:txBody>
-                    <a:bodyPr/>
-                    <a:lstStyle/>
-                    <a:p>
-                      <a:pPr indent="0" marL="0">
-                        <a:buNone/>
-                      </a:pPr>
-                      <a:r>
-                        <a:rPr lang="en-US" sz="1200" dirty="0">
-                          <a:solidFill>
-                            <a:schemeClr val="tx1"/>
-                          </a:solidFill>
-                        </a:rPr>
-                        <a:t>30 %</a:t>
-                      </a:r>
-                      <a:endParaRPr lang="en-US" sz="1200" dirty="0"/>
-                    </a:p>
-                  </a:txBody>
-                  <a:tcPr marL="54864" marR="54864" marT="27432" marB="27432" anchor="ctr">
-                    <a:lnL w="9525" cap="flat" cmpd="sng" algn="ctr">
-                      <a:solidFill>
-                        <a:srgbClr val="D5DDE3"/>
-                      </a:solidFill>
-                      <a:prstDash val="solid"/>
-                      <a:round/>
-                      <a:headEnd type="none" w="med" len="med"/>
-                      <a:tailEnd type="none" w="med" len="med"/>
-                    </a:lnL>
-                    <a:lnR w="9525" cap="flat" cmpd="sng" algn="ctr">
-                      <a:solidFill>
-                        <a:srgbClr val="D5DDE3"/>
-                      </a:solidFill>
-                      <a:prstDash val="solid"/>
-                      <a:round/>
-                      <a:headEnd type="none" w="med" len="med"/>
-                      <a:tailEnd type="none" w="med" len="med"/>
-                    </a:lnR>
-                    <a:lnT w="9525" cap="flat" cmpd="sng" algn="ctr">
-                      <a:solidFill>
-                        <a:srgbClr val="D5DDE3"/>
-                      </a:solidFill>
-                      <a:prstDash val="solid"/>
-                      <a:round/>
-                      <a:headEnd type="none" w="med" len="med"/>
-                      <a:tailEnd type="none" w="med" len="med"/>
-                    </a:lnT>
-                    <a:lnB w="9525" cap="flat" cmpd="sng" algn="ctr">
-                      <a:solidFill>
-                        <a:srgbClr val="D5DDE3"/>
-                      </a:solidFill>
-                      <a:prstDash val="solid"/>
-                      <a:round/>
-                      <a:headEnd type="none" w="med" len="med"/>
-                      <a:tailEnd type="none" w="med" len="med"/>
-                    </a:lnB>
-                  </a:tcPr>
-                </a:tc>
-              </a:tr>
-              <a:tr h="384048">
-                <a:tc>
-                  <a:txBody>
-                    <a:bodyPr/>
-                    <a:lstStyle/>
-                    <a:p>
-                      <a:pPr indent="0" marL="0">
-                        <a:buNone/>
-                      </a:pPr>
-                      <a:r>
-                        <a:rPr lang="en-US" sz="1200" b="1" dirty="0">
-                          <a:solidFill>
-                            <a:schemeClr val="tx1"/>
-                          </a:solidFill>
-                        </a:rPr>
-                        <a:t>Gestion documentaire / conformité</a:t>
-                      </a:r>
-                      <a:endParaRPr lang="en-US" sz="1200" dirty="0"/>
-                    </a:p>
-                  </a:txBody>
-                  <a:tcPr marL="54864" marR="54864" marT="27432" marB="27432" anchor="ctr">
-                    <a:lnL w="9525" cap="flat" cmpd="sng" algn="ctr">
-                      <a:solidFill>
-                        <a:srgbClr val="D5DDE3"/>
-                      </a:solidFill>
-                      <a:prstDash val="solid"/>
-                      <a:round/>
-                      <a:headEnd type="none" w="med" len="med"/>
-                      <a:tailEnd type="none" w="med" len="med"/>
-                    </a:lnL>
-                    <a:lnR w="9525" cap="flat" cmpd="sng" algn="ctr">
-                      <a:solidFill>
-                        <a:srgbClr val="D5DDE3"/>
-                      </a:solidFill>
-                      <a:prstDash val="solid"/>
-                      <a:round/>
-                      <a:headEnd type="none" w="med" len="med"/>
-                      <a:tailEnd type="none" w="med" len="med"/>
-                    </a:lnR>
-                    <a:lnT w="9525" cap="flat" cmpd="sng" algn="ctr">
-                      <a:solidFill>
-                        <a:srgbClr val="D5DDE3"/>
-                      </a:solidFill>
-                      <a:prstDash val="solid"/>
-                      <a:round/>
-                      <a:headEnd type="none" w="med" len="med"/>
-                      <a:tailEnd type="none" w="med" len="med"/>
-                    </a:lnT>
-                    <a:lnB w="9525" cap="flat" cmpd="sng" algn="ctr">
-                      <a:solidFill>
-                        <a:srgbClr val="D5DDE3"/>
-                      </a:solidFill>
-                      <a:prstDash val="solid"/>
-                      <a:round/>
-                      <a:headEnd type="none" w="med" len="med"/>
-                      <a:tailEnd type="none" w="med" len="med"/>
-                    </a:lnB>
-                  </a:tcPr>
-                </a:tc>
-                <a:tc>
-                  <a:txBody>
-                    <a:bodyPr/>
-                    <a:lstStyle/>
-                    <a:p>
-                      <a:pPr indent="0" marL="0">
-                        <a:buNone/>
-                      </a:pPr>
-                      <a:r>
-                        <a:rPr lang="en-US" sz="1200" dirty="0">
-                          <a:solidFill>
-                            <a:schemeClr val="tx1"/>
-                          </a:solidFill>
-                        </a:rPr>
-                        <a:t>~6 h</a:t>
-                      </a:r>
-                      <a:endParaRPr lang="en-US" sz="1200" dirty="0"/>
-                    </a:p>
-                  </a:txBody>
-                  <a:tcPr marL="54864" marR="54864" marT="27432" marB="27432" anchor="ctr">
-                    <a:lnL w="9525" cap="flat" cmpd="sng" algn="ctr">
-                      <a:solidFill>
-                        <a:srgbClr val="D5DDE3"/>
-                      </a:solidFill>
-                      <a:prstDash val="solid"/>
-                      <a:round/>
-                      <a:headEnd type="none" w="med" len="med"/>
-                      <a:tailEnd type="none" w="med" len="med"/>
-                    </a:lnL>
-                    <a:lnR w="9525" cap="flat" cmpd="sng" algn="ctr">
-                      <a:solidFill>
-                        <a:srgbClr val="D5DDE3"/>
-                      </a:solidFill>
-                      <a:prstDash val="solid"/>
-                      <a:round/>
-                      <a:headEnd type="none" w="med" len="med"/>
-                      <a:tailEnd type="none" w="med" len="med"/>
-                    </a:lnR>
-                    <a:lnT w="9525" cap="flat" cmpd="sng" algn="ctr">
-                      <a:solidFill>
-                        <a:srgbClr val="D5DDE3"/>
-                      </a:solidFill>
-                      <a:prstDash val="solid"/>
-                      <a:round/>
-                      <a:headEnd type="none" w="med" len="med"/>
-                      <a:tailEnd type="none" w="med" len="med"/>
-                    </a:lnT>
-                    <a:lnB w="9525" cap="flat" cmpd="sng" algn="ctr">
-                      <a:solidFill>
-                        <a:srgbClr val="D5DDE3"/>
-                      </a:solidFill>
-                      <a:prstDash val="solid"/>
-                      <a:round/>
-                      <a:headEnd type="none" w="med" len="med"/>
-                      <a:tailEnd type="none" w="med" len="med"/>
-                    </a:lnB>
-                  </a:tcPr>
-                </a:tc>
-                <a:tc>
-                  <a:txBody>
-                    <a:bodyPr/>
-                    <a:lstStyle/>
-                    <a:p>
-                      <a:pPr indent="0" marL="0">
-                        <a:buNone/>
-                      </a:pPr>
-                      <a:r>
-                        <a:rPr lang="en-US" sz="1200" dirty="0">
-                          <a:solidFill>
-                            <a:schemeClr val="tx1"/>
-                          </a:solidFill>
-                        </a:rPr>
-                        <a:t>~6 j</a:t>
-                      </a:r>
-                      <a:endParaRPr lang="en-US" sz="1200" dirty="0"/>
-                    </a:p>
-                  </a:txBody>
-                  <a:tcPr marL="54864" marR="54864" marT="27432" marB="27432" anchor="ctr">
-                    <a:lnL w="9525" cap="flat" cmpd="sng" algn="ctr">
-                      <a:solidFill>
-                        <a:srgbClr val="D5DDE3"/>
-                      </a:solidFill>
-                      <a:prstDash val="solid"/>
-                      <a:round/>
-                      <a:headEnd type="none" w="med" len="med"/>
-                      <a:tailEnd type="none" w="med" len="med"/>
-                    </a:lnL>
-                    <a:lnR w="9525" cap="flat" cmpd="sng" algn="ctr">
-                      <a:solidFill>
-                        <a:srgbClr val="D5DDE3"/>
-                      </a:solidFill>
-                      <a:prstDash val="solid"/>
-                      <a:round/>
-                      <a:headEnd type="none" w="med" len="med"/>
-                      <a:tailEnd type="none" w="med" len="med"/>
-                    </a:lnR>
-                    <a:lnT w="9525" cap="flat" cmpd="sng" algn="ctr">
-                      <a:solidFill>
-                        <a:srgbClr val="D5DDE3"/>
-                      </a:solidFill>
-                      <a:prstDash val="solid"/>
-                      <a:round/>
-                      <a:headEnd type="none" w="med" len="med"/>
-                      <a:tailEnd type="none" w="med" len="med"/>
-                    </a:lnT>
-                    <a:lnB w="9525" cap="flat" cmpd="sng" algn="ctr">
-                      <a:solidFill>
-                        <a:srgbClr val="D5DDE3"/>
-                      </a:solidFill>
-                      <a:prstDash val="solid"/>
-                      <a:round/>
-                      <a:headEnd type="none" w="med" len="med"/>
-                      <a:tailEnd type="none" w="med" len="med"/>
-                    </a:lnB>
-                  </a:tcPr>
-                </a:tc>
-                <a:tc>
-                  <a:txBody>
-                    <a:bodyPr/>
-                    <a:lstStyle/>
-                    <a:p>
-                      <a:pPr indent="0" marL="0">
-                        <a:buNone/>
-                      </a:pPr>
-                      <a:r>
-                        <a:rPr lang="en-US" sz="1200" dirty="0">
-                          <a:solidFill>
-                            <a:schemeClr val="tx1"/>
-                          </a:solidFill>
-                        </a:rPr>
-                        <a:t>30 %</a:t>
-                      </a:r>
-                      <a:endParaRPr lang="en-US" sz="1200" dirty="0"/>
-                    </a:p>
-                  </a:txBody>
-                  <a:tcPr marL="54864" marR="54864" marT="27432" marB="27432" anchor="ctr">
-                    <a:lnL w="9525" cap="flat" cmpd="sng" algn="ctr">
-                      <a:solidFill>
-                        <a:srgbClr val="D5DDE3"/>
-                      </a:solidFill>
-                      <a:prstDash val="solid"/>
-                      <a:round/>
-                      <a:headEnd type="none" w="med" len="med"/>
-                      <a:tailEnd type="none" w="med" len="med"/>
-                    </a:lnL>
-                    <a:lnR w="9525" cap="flat" cmpd="sng" algn="ctr">
-                      <a:solidFill>
-                        <a:srgbClr val="D5DDE3"/>
-                      </a:solidFill>
-                      <a:prstDash val="solid"/>
-                      <a:round/>
-                      <a:headEnd type="none" w="med" len="med"/>
-                      <a:tailEnd type="none" w="med" len="med"/>
-                    </a:lnR>
-                    <a:lnT w="9525" cap="flat" cmpd="sng" algn="ctr">
-                      <a:solidFill>
-                        <a:srgbClr val="D5DDE3"/>
-                      </a:solidFill>
-                      <a:prstDash val="solid"/>
-                      <a:round/>
-                      <a:headEnd type="none" w="med" len="med"/>
-                      <a:tailEnd type="none" w="med" len="med"/>
-                    </a:lnT>
-                    <a:lnB w="9525" cap="flat" cmpd="sng" algn="ctr">
-                      <a:solidFill>
-                        <a:srgbClr val="D5DDE3"/>
-                      </a:solidFill>
-                      <a:prstDash val="solid"/>
-                      <a:round/>
-                      <a:headEnd type="none" w="med" len="med"/>
-                      <a:tailEnd type="none" w="med" len="med"/>
-                    </a:lnB>
-                  </a:tcPr>
-                </a:tc>
-              </a:tr>
-              <a:tr h="384048">
-                <a:tc>
-                  <a:txBody>
-                    <a:bodyPr/>
-                    <a:lstStyle/>
-                    <a:p>
-                      <a:pPr indent="0" marL="0">
-                        <a:buNone/>
-                      </a:pPr>
-                      <a:r>
-                        <a:rPr lang="en-US" sz="1200" b="1" dirty="0">
-                          <a:solidFill>
-                            <a:schemeClr val="tx1"/>
-                          </a:solidFill>
-                        </a:rPr>
-                        <a:t>Juridique / vie privée</a:t>
-                      </a:r>
-                      <a:endParaRPr lang="en-US" sz="1200" dirty="0"/>
-                    </a:p>
-                  </a:txBody>
-                  <a:tcPr marL="54864" marR="54864" marT="27432" marB="27432" anchor="ctr">
-                    <a:lnL w="9525" cap="flat" cmpd="sng" algn="ctr">
-                      <a:solidFill>
-                        <a:srgbClr val="D5DDE3"/>
-                      </a:solidFill>
-                      <a:prstDash val="solid"/>
-                      <a:round/>
-                      <a:headEnd type="none" w="med" len="med"/>
-                      <a:tailEnd type="none" w="med" len="med"/>
-                    </a:lnL>
-                    <a:lnR w="9525" cap="flat" cmpd="sng" algn="ctr">
-                      <a:solidFill>
-                        <a:srgbClr val="D5DDE3"/>
-                      </a:solidFill>
-                      <a:prstDash val="solid"/>
-                      <a:round/>
-                      <a:headEnd type="none" w="med" len="med"/>
-                      <a:tailEnd type="none" w="med" len="med"/>
-                    </a:lnR>
-                    <a:lnT w="9525" cap="flat" cmpd="sng" algn="ctr">
-                      <a:solidFill>
-                        <a:srgbClr val="D5DDE3"/>
-                      </a:solidFill>
-                      <a:prstDash val="solid"/>
-                      <a:round/>
-                      <a:headEnd type="none" w="med" len="med"/>
-                      <a:tailEnd type="none" w="med" len="med"/>
-                    </a:lnT>
-                    <a:lnB w="9525" cap="flat" cmpd="sng" algn="ctr">
-                      <a:solidFill>
-                        <a:srgbClr val="D5DDE3"/>
-                      </a:solidFill>
-                      <a:prstDash val="solid"/>
-                      <a:round/>
-                      <a:headEnd type="none" w="med" len="med"/>
-                      <a:tailEnd type="none" w="med" len="med"/>
-                    </a:lnB>
-                  </a:tcPr>
-                </a:tc>
-                <a:tc>
-                  <a:txBody>
-                    <a:bodyPr/>
-                    <a:lstStyle/>
-                    <a:p>
-                      <a:pPr indent="0" marL="0">
-                        <a:buNone/>
-                      </a:pPr>
-                      <a:r>
-                        <a:rPr lang="en-US" sz="1200" dirty="0">
-                          <a:solidFill>
-                            <a:schemeClr val="tx1"/>
-                          </a:solidFill>
-                        </a:rPr>
-                        <a:t>2 h</a:t>
-                      </a:r>
-                      <a:endParaRPr lang="en-US" sz="1200" dirty="0"/>
-                    </a:p>
-                  </a:txBody>
-                  <a:tcPr marL="54864" marR="54864" marT="27432" marB="27432" anchor="ctr">
-                    <a:lnL w="9525" cap="flat" cmpd="sng" algn="ctr">
-                      <a:solidFill>
-                        <a:srgbClr val="D5DDE3"/>
-                      </a:solidFill>
-                      <a:prstDash val="solid"/>
-                      <a:round/>
-                      <a:headEnd type="none" w="med" len="med"/>
-                      <a:tailEnd type="none" w="med" len="med"/>
-                    </a:lnL>
-                    <a:lnR w="9525" cap="flat" cmpd="sng" algn="ctr">
-                      <a:solidFill>
-                        <a:srgbClr val="D5DDE3"/>
-                      </a:solidFill>
-                      <a:prstDash val="solid"/>
-                      <a:round/>
-                      <a:headEnd type="none" w="med" len="med"/>
-                      <a:tailEnd type="none" w="med" len="med"/>
-                    </a:lnR>
-                    <a:lnT w="9525" cap="flat" cmpd="sng" algn="ctr">
-                      <a:solidFill>
-                        <a:srgbClr val="D5DDE3"/>
-                      </a:solidFill>
-                      <a:prstDash val="solid"/>
-                      <a:round/>
-                      <a:headEnd type="none" w="med" len="med"/>
-                      <a:tailEnd type="none" w="med" len="med"/>
-                    </a:lnT>
-                    <a:lnB w="9525" cap="flat" cmpd="sng" algn="ctr">
-                      <a:solidFill>
-                        <a:srgbClr val="D5DDE3"/>
-                      </a:solidFill>
-                      <a:prstDash val="solid"/>
-                      <a:round/>
-                      <a:headEnd type="none" w="med" len="med"/>
-                      <a:tailEnd type="none" w="med" len="med"/>
-                    </a:lnB>
-                  </a:tcPr>
-                </a:tc>
-                <a:tc>
-                  <a:txBody>
-                    <a:bodyPr/>
-                    <a:lstStyle/>
-                    <a:p>
-                      <a:pPr indent="0" marL="0">
-                        <a:buNone/>
-                      </a:pPr>
-                      <a:r>
-                        <a:rPr lang="en-US" sz="1200" dirty="0">
-                          <a:solidFill>
-                            <a:schemeClr val="tx1"/>
-                          </a:solidFill>
-                        </a:rPr>
-                        <a:t>~1 j</a:t>
-                      </a:r>
-                      <a:endParaRPr lang="en-US" sz="1200" dirty="0"/>
-                    </a:p>
-                  </a:txBody>
-                  <a:tcPr marL="54864" marR="54864" marT="27432" marB="27432" anchor="ctr">
-                    <a:lnL w="9525" cap="flat" cmpd="sng" algn="ctr">
-                      <a:solidFill>
-                        <a:srgbClr val="D5DDE3"/>
-                      </a:solidFill>
-                      <a:prstDash val="solid"/>
-                      <a:round/>
-                      <a:headEnd type="none" w="med" len="med"/>
-                      <a:tailEnd type="none" w="med" len="med"/>
-                    </a:lnL>
-                    <a:lnR w="9525" cap="flat" cmpd="sng" algn="ctr">
-                      <a:solidFill>
-                        <a:srgbClr val="D5DDE3"/>
-                      </a:solidFill>
-                      <a:prstDash val="solid"/>
-                      <a:round/>
-                      <a:headEnd type="none" w="med" len="med"/>
-                      <a:tailEnd type="none" w="med" len="med"/>
-                    </a:lnR>
-                    <a:lnT w="9525" cap="flat" cmpd="sng" algn="ctr">
-                      <a:solidFill>
-                        <a:srgbClr val="D5DDE3"/>
-                      </a:solidFill>
-                      <a:prstDash val="solid"/>
-                      <a:round/>
-                      <a:headEnd type="none" w="med" len="med"/>
-                      <a:tailEnd type="none" w="med" len="med"/>
-                    </a:lnT>
-                    <a:lnB w="9525" cap="flat" cmpd="sng" algn="ctr">
-                      <a:solidFill>
-                        <a:srgbClr val="D5DDE3"/>
-                      </a:solidFill>
-                      <a:prstDash val="solid"/>
-                      <a:round/>
-                      <a:headEnd type="none" w="med" len="med"/>
-                      <a:tailEnd type="none" w="med" len="med"/>
-                    </a:lnB>
-                  </a:tcPr>
-                </a:tc>
-                <a:tc>
-                  <a:txBody>
-                    <a:bodyPr/>
-                    <a:lstStyle/>
-                    <a:p>
-                      <a:pPr indent="0" marL="0">
-                        <a:buNone/>
-                      </a:pPr>
-                      <a:r>
-                        <a:rPr lang="en-US" sz="1200" dirty="0">
-                          <a:solidFill>
-                            <a:schemeClr val="tx1"/>
-                          </a:solidFill>
-                        </a:rPr>
-                        <a:t>Ponctuel (rencontre 5)</a:t>
-                      </a:r>
-                      <a:endParaRPr lang="en-US" sz="1200" dirty="0"/>
-                    </a:p>
-                  </a:txBody>
-                  <a:tcPr marL="54864" marR="54864" marT="27432" marB="27432" anchor="ctr">
-                    <a:lnL w="9525" cap="flat" cmpd="sng" algn="ctr">
-                      <a:solidFill>
-                        <a:srgbClr val="D5DDE3"/>
-                      </a:solidFill>
-                      <a:prstDash val="solid"/>
-                      <a:round/>
-                      <a:headEnd type="none" w="med" len="med"/>
-                      <a:tailEnd type="none" w="med" len="med"/>
-                    </a:lnL>
-                    <a:lnR w="9525" cap="flat" cmpd="sng" algn="ctr">
-                      <a:solidFill>
-                        <a:srgbClr val="D5DDE3"/>
-                      </a:solidFill>
-                      <a:prstDash val="solid"/>
-                      <a:round/>
-                      <a:headEnd type="none" w="med" len="med"/>
-                      <a:tailEnd type="none" w="med" len="med"/>
-                    </a:lnR>
-                    <a:lnT w="9525" cap="flat" cmpd="sng" algn="ctr">
-                      <a:solidFill>
-                        <a:srgbClr val="D5DDE3"/>
-                      </a:solidFill>
-                      <a:prstDash val="solid"/>
-                      <a:round/>
-                      <a:headEnd type="none" w="med" len="med"/>
-                      <a:tailEnd type="none" w="med" len="med"/>
-                    </a:lnT>
-                    <a:lnB w="9525" cap="flat" cmpd="sng" algn="ctr">
-                      <a:solidFill>
-                        <a:srgbClr val="D5DDE3"/>
-                      </a:solidFill>
-                      <a:prstDash val="solid"/>
-                      <a:round/>
-                      <a:headEnd type="none" w="med" len="med"/>
-                      <a:tailEnd type="none" w="med" len="med"/>
-                    </a:lnB>
-                  </a:tcPr>
-                </a:tc>
-              </a:tr>
-              <a:tr h="384048">
-                <a:tc>
-                  <a:txBody>
-                    <a:bodyPr/>
-                    <a:lstStyle/>
-                    <a:p>
-                      <a:pPr indent="0" marL="0">
-                        <a:buNone/>
-                      </a:pPr>
-                      <a:r>
-                        <a:rPr lang="en-US" sz="1200" b="1" dirty="0">
-                          <a:solidFill>
-                            <a:schemeClr val="tx1"/>
-                          </a:solidFill>
-                        </a:rPr>
-                        <a:t>Directions</a:t>
-                      </a:r>
-                      <a:endParaRPr lang="en-US" sz="1200" dirty="0"/>
-                    </a:p>
-                  </a:txBody>
-                  <a:tcPr marL="54864" marR="54864" marT="27432" marB="27432" anchor="ctr">
-                    <a:lnL w="9525" cap="flat" cmpd="sng" algn="ctr">
-                      <a:solidFill>
-                        <a:srgbClr val="D5DDE3"/>
-                      </a:solidFill>
-                      <a:prstDash val="solid"/>
-                      <a:round/>
-                      <a:headEnd type="none" w="med" len="med"/>
-                      <a:tailEnd type="none" w="med" len="med"/>
-                    </a:lnL>
-                    <a:lnR w="9525" cap="flat" cmpd="sng" algn="ctr">
-                      <a:solidFill>
-                        <a:srgbClr val="D5DDE3"/>
-                      </a:solidFill>
-                      <a:prstDash val="solid"/>
-                      <a:round/>
-                      <a:headEnd type="none" w="med" len="med"/>
-                      <a:tailEnd type="none" w="med" len="med"/>
-                    </a:lnR>
-                    <a:lnT w="9525" cap="flat" cmpd="sng" algn="ctr">
-                      <a:solidFill>
-                        <a:srgbClr val="D5DDE3"/>
-                      </a:solidFill>
-                      <a:prstDash val="solid"/>
-                      <a:round/>
-                      <a:headEnd type="none" w="med" len="med"/>
-                      <a:tailEnd type="none" w="med" len="med"/>
-                    </a:lnT>
-                    <a:lnB w="9525" cap="flat" cmpd="sng" algn="ctr">
-                      <a:solidFill>
-                        <a:srgbClr val="D5DDE3"/>
-                      </a:solidFill>
-                      <a:prstDash val="solid"/>
-                      <a:round/>
-                      <a:headEnd type="none" w="med" len="med"/>
-                      <a:tailEnd type="none" w="med" len="med"/>
-                    </a:lnB>
-                  </a:tcPr>
-                </a:tc>
-                <a:tc>
-                  <a:txBody>
-                    <a:bodyPr/>
-                    <a:lstStyle/>
-                    <a:p>
-                      <a:pPr indent="0" marL="0">
-                        <a:buNone/>
-                      </a:pPr>
-                      <a:r>
-                        <a:rPr lang="en-US" sz="1200" dirty="0">
-                          <a:solidFill>
-                            <a:schemeClr val="tx1"/>
-                          </a:solidFill>
-                        </a:rPr>
-                        <a:t>~4 h chacune</a:t>
-                      </a:r>
-                      <a:endParaRPr lang="en-US" sz="1200" dirty="0"/>
-                    </a:p>
-                  </a:txBody>
-                  <a:tcPr marL="54864" marR="54864" marT="27432" marB="27432" anchor="ctr">
-                    <a:lnL w="9525" cap="flat" cmpd="sng" algn="ctr">
-                      <a:solidFill>
-                        <a:srgbClr val="D5DDE3"/>
-                      </a:solidFill>
-                      <a:prstDash val="solid"/>
-                      <a:round/>
-                      <a:headEnd type="none" w="med" len="med"/>
-                      <a:tailEnd type="none" w="med" len="med"/>
-                    </a:lnL>
-                    <a:lnR w="9525" cap="flat" cmpd="sng" algn="ctr">
-                      <a:solidFill>
-                        <a:srgbClr val="D5DDE3"/>
-                      </a:solidFill>
-                      <a:prstDash val="solid"/>
-                      <a:round/>
-                      <a:headEnd type="none" w="med" len="med"/>
-                      <a:tailEnd type="none" w="med" len="med"/>
-                    </a:lnR>
-                    <a:lnT w="9525" cap="flat" cmpd="sng" algn="ctr">
-                      <a:solidFill>
-                        <a:srgbClr val="D5DDE3"/>
-                      </a:solidFill>
-                      <a:prstDash val="solid"/>
-                      <a:round/>
-                      <a:headEnd type="none" w="med" len="med"/>
-                      <a:tailEnd type="none" w="med" len="med"/>
-                    </a:lnT>
-                    <a:lnB w="9525" cap="flat" cmpd="sng" algn="ctr">
-                      <a:solidFill>
-                        <a:srgbClr val="D5DDE3"/>
-                      </a:solidFill>
-                      <a:prstDash val="solid"/>
-                      <a:round/>
-                      <a:headEnd type="none" w="med" len="med"/>
-                      <a:tailEnd type="none" w="med" len="med"/>
-                    </a:lnB>
-                  </a:tcPr>
-                </a:tc>
-                <a:tc>
-                  <a:txBody>
-                    <a:bodyPr/>
-                    <a:lstStyle/>
-                    <a:p>
-                      <a:pPr indent="0" marL="0">
-                        <a:buNone/>
-                      </a:pPr>
-                      <a:r>
-                        <a:rPr lang="en-US" sz="1200" dirty="0">
-                          <a:solidFill>
-                            <a:schemeClr val="tx1"/>
-                          </a:solidFill>
-                        </a:rPr>
-                        <a:t>~0,5 j</a:t>
-                      </a:r>
-                      <a:endParaRPr lang="en-US" sz="1200" dirty="0"/>
-                    </a:p>
-                  </a:txBody>
-                  <a:tcPr marL="54864" marR="54864" marT="27432" marB="27432" anchor="ctr">
-                    <a:lnL w="9525" cap="flat" cmpd="sng" algn="ctr">
-                      <a:solidFill>
-                        <a:srgbClr val="D5DDE3"/>
-                      </a:solidFill>
-                      <a:prstDash val="solid"/>
-                      <a:round/>
-                      <a:headEnd type="none" w="med" len="med"/>
-                      <a:tailEnd type="none" w="med" len="med"/>
-                    </a:lnL>
-                    <a:lnR w="9525" cap="flat" cmpd="sng" algn="ctr">
-                      <a:solidFill>
-                        <a:srgbClr val="D5DDE3"/>
-                      </a:solidFill>
-                      <a:prstDash val="solid"/>
-                      <a:round/>
-                      <a:headEnd type="none" w="med" len="med"/>
-                      <a:tailEnd type="none" w="med" len="med"/>
-                    </a:lnR>
-                    <a:lnT w="9525" cap="flat" cmpd="sng" algn="ctr">
-                      <a:solidFill>
-                        <a:srgbClr val="D5DDE3"/>
-                      </a:solidFill>
-                      <a:prstDash val="solid"/>
-                      <a:round/>
-                      <a:headEnd type="none" w="med" len="med"/>
-                      <a:tailEnd type="none" w="med" len="med"/>
-                    </a:lnT>
-                    <a:lnB w="9525" cap="flat" cmpd="sng" algn="ctr">
-                      <a:solidFill>
-                        <a:srgbClr val="D5DDE3"/>
-                      </a:solidFill>
-                      <a:prstDash val="solid"/>
-                      <a:round/>
-                      <a:headEnd type="none" w="med" len="med"/>
-                      <a:tailEnd type="none" w="med" len="med"/>
-                    </a:lnB>
-                  </a:tcPr>
-                </a:tc>
-                <a:tc>
-                  <a:txBody>
-                    <a:bodyPr/>
-                    <a:lstStyle/>
-                    <a:p>
-                      <a:pPr indent="0" marL="0">
-                        <a:buNone/>
-                      </a:pPr>
-                      <a:r>
-                        <a:rPr lang="en-US" sz="1200" dirty="0">
-                          <a:solidFill>
-                            <a:schemeClr val="tx1"/>
-                          </a:solidFill>
-                        </a:rPr>
-                        <a:t>Ponctuel (rencontres 2, 4, 7)</a:t>
-                      </a:r>
-                      <a:endParaRPr lang="en-US" sz="1200" dirty="0"/>
-                    </a:p>
-                  </a:txBody>
-                  <a:tcPr marL="54864" marR="54864" marT="27432" marB="27432" anchor="ctr">
-                    <a:lnL w="9525" cap="flat" cmpd="sng" algn="ctr">
-                      <a:solidFill>
-                        <a:srgbClr val="D5DDE3"/>
-                      </a:solidFill>
-                      <a:prstDash val="solid"/>
-                      <a:round/>
-                      <a:headEnd type="none" w="med" len="med"/>
-                      <a:tailEnd type="none" w="med" len="med"/>
-                    </a:lnL>
-                    <a:lnR w="9525" cap="flat" cmpd="sng" algn="ctr">
-                      <a:solidFill>
-                        <a:srgbClr val="D5DDE3"/>
-                      </a:solidFill>
-                      <a:prstDash val="solid"/>
-                      <a:round/>
-                      <a:headEnd type="none" w="med" len="med"/>
-                      <a:tailEnd type="none" w="med" len="med"/>
-                    </a:lnR>
-                    <a:lnT w="9525" cap="flat" cmpd="sng" algn="ctr">
-                      <a:solidFill>
-                        <a:srgbClr val="D5DDE3"/>
-                      </a:solidFill>
-                      <a:prstDash val="solid"/>
-                      <a:round/>
-                      <a:headEnd type="none" w="med" len="med"/>
-                      <a:tailEnd type="none" w="med" len="med"/>
-                    </a:lnT>
-                    <a:lnB w="9525" cap="flat" cmpd="sng" algn="ctr">
-                      <a:solidFill>
-                        <a:srgbClr val="D5DDE3"/>
-                      </a:solidFill>
-                      <a:prstDash val="solid"/>
-                      <a:round/>
-                      <a:headEnd type="none" w="med" len="med"/>
-                      <a:tailEnd type="none" w="med" len="med"/>
-                    </a:lnB>
-                  </a:tcPr>
-                </a:tc>
-              </a:tr>
-              <a:tr h="384048">
-                <a:tc>
-                  <a:txBody>
-                    <a:bodyPr/>
-                    <a:lstStyle/>
-                    <a:p>
-                      <a:pPr indent="0" marL="0">
-                        <a:buNone/>
-                      </a:pPr>
-                      <a:r>
-                        <a:rPr lang="en-US" sz="1200" b="1" dirty="0">
-                          <a:solidFill>
-                            <a:schemeClr val="tx1"/>
-                          </a:solidFill>
-                        </a:rPr>
-                        <a:t>Sponsor / comité exécutif</a:t>
-                      </a:r>
-                      <a:endParaRPr lang="en-US" sz="1200" dirty="0"/>
-                    </a:p>
-                  </a:txBody>
-                  <a:tcPr marL="54864" marR="54864" marT="27432" marB="27432" anchor="ctr">
-                    <a:lnL w="9525" cap="flat" cmpd="sng" algn="ctr">
-                      <a:solidFill>
-                        <a:srgbClr val="D5DDE3"/>
-                      </a:solidFill>
-                      <a:prstDash val="solid"/>
-                      <a:round/>
-                      <a:headEnd type="none" w="med" len="med"/>
-                      <a:tailEnd type="none" w="med" len="med"/>
-                    </a:lnL>
-                    <a:lnR w="9525" cap="flat" cmpd="sng" algn="ctr">
-                      <a:solidFill>
-                        <a:srgbClr val="D5DDE3"/>
-                      </a:solidFill>
-                      <a:prstDash val="solid"/>
-                      <a:round/>
-                      <a:headEnd type="none" w="med" len="med"/>
-                      <a:tailEnd type="none" w="med" len="med"/>
-                    </a:lnR>
-                    <a:lnT w="9525" cap="flat" cmpd="sng" algn="ctr">
-                      <a:solidFill>
-                        <a:srgbClr val="D5DDE3"/>
-                      </a:solidFill>
-                      <a:prstDash val="solid"/>
-                      <a:round/>
-                      <a:headEnd type="none" w="med" len="med"/>
-                      <a:tailEnd type="none" w="med" len="med"/>
-                    </a:lnT>
-                    <a:lnB w="9525" cap="flat" cmpd="sng" algn="ctr">
-                      <a:solidFill>
-                        <a:srgbClr val="D5DDE3"/>
-                      </a:solidFill>
-                      <a:prstDash val="solid"/>
-                      <a:round/>
-                      <a:headEnd type="none" w="med" len="med"/>
-                      <a:tailEnd type="none" w="med" len="med"/>
-                    </a:lnB>
-                  </a:tcPr>
-                </a:tc>
-                <a:tc>
-                  <a:txBody>
-                    <a:bodyPr/>
-                    <a:lstStyle/>
-                    <a:p>
-                      <a:pPr indent="0" marL="0">
-                        <a:buNone/>
-                      </a:pPr>
-                      <a:r>
-                        <a:rPr lang="en-US" sz="1200" dirty="0">
-                          <a:solidFill>
-                            <a:schemeClr val="tx1"/>
-                          </a:solidFill>
-                        </a:rPr>
-                        <a:t>~6 h</a:t>
-                      </a:r>
-                      <a:endParaRPr lang="en-US" sz="1200" dirty="0"/>
-                    </a:p>
-                  </a:txBody>
-                  <a:tcPr marL="54864" marR="54864" marT="27432" marB="27432" anchor="ctr">
-                    <a:lnL w="9525" cap="flat" cmpd="sng" algn="ctr">
-                      <a:solidFill>
-                        <a:srgbClr val="D5DDE3"/>
-                      </a:solidFill>
-                      <a:prstDash val="solid"/>
-                      <a:round/>
-                      <a:headEnd type="none" w="med" len="med"/>
-                      <a:tailEnd type="none" w="med" len="med"/>
-                    </a:lnL>
-                    <a:lnR w="9525" cap="flat" cmpd="sng" algn="ctr">
-                      <a:solidFill>
-                        <a:srgbClr val="D5DDE3"/>
-                      </a:solidFill>
-                      <a:prstDash val="solid"/>
-                      <a:round/>
-                      <a:headEnd type="none" w="med" len="med"/>
-                      <a:tailEnd type="none" w="med" len="med"/>
-                    </a:lnR>
-                    <a:lnT w="9525" cap="flat" cmpd="sng" algn="ctr">
-                      <a:solidFill>
-                        <a:srgbClr val="D5DDE3"/>
-                      </a:solidFill>
-                      <a:prstDash val="solid"/>
-                      <a:round/>
-                      <a:headEnd type="none" w="med" len="med"/>
-                      <a:tailEnd type="none" w="med" len="med"/>
-                    </a:lnT>
-                    <a:lnB w="9525" cap="flat" cmpd="sng" algn="ctr">
-                      <a:solidFill>
-                        <a:srgbClr val="D5DDE3"/>
-                      </a:solidFill>
-                      <a:prstDash val="solid"/>
-                      <a:round/>
-                      <a:headEnd type="none" w="med" len="med"/>
-                      <a:tailEnd type="none" w="med" len="med"/>
-                    </a:lnB>
-                  </a:tcPr>
-                </a:tc>
-                <a:tc>
-                  <a:txBody>
-                    <a:bodyPr/>
-                    <a:lstStyle/>
-                    <a:p>
-                      <a:pPr indent="0" marL="0">
-                        <a:buNone/>
-                      </a:pPr>
-                      <a:r>
-                        <a:rPr lang="en-US" sz="1200" dirty="0">
-                          <a:solidFill>
-                            <a:schemeClr val="tx1"/>
-                          </a:solidFill>
-                        </a:rPr>
-                        <a:t>—</a:t>
-                      </a:r>
-                      <a:endParaRPr lang="en-US" sz="1200" dirty="0"/>
-                    </a:p>
-                  </a:txBody>
-                  <a:tcPr marL="54864" marR="54864" marT="27432" marB="27432" anchor="ctr">
-                    <a:lnL w="9525" cap="flat" cmpd="sng" algn="ctr">
-                      <a:solidFill>
-                        <a:srgbClr val="D5DDE3"/>
-                      </a:solidFill>
-                      <a:prstDash val="solid"/>
-                      <a:round/>
-                      <a:headEnd type="none" w="med" len="med"/>
-                      <a:tailEnd type="none" w="med" len="med"/>
-                    </a:lnL>
-                    <a:lnR w="9525" cap="flat" cmpd="sng" algn="ctr">
-                      <a:solidFill>
-                        <a:srgbClr val="D5DDE3"/>
-                      </a:solidFill>
-                      <a:prstDash val="solid"/>
-                      <a:round/>
-                      <a:headEnd type="none" w="med" len="med"/>
-                      <a:tailEnd type="none" w="med" len="med"/>
-                    </a:lnR>
-                    <a:lnT w="9525" cap="flat" cmpd="sng" algn="ctr">
-                      <a:solidFill>
-                        <a:srgbClr val="D5DDE3"/>
-                      </a:solidFill>
-                      <a:prstDash val="solid"/>
-                      <a:round/>
-                      <a:headEnd type="none" w="med" len="med"/>
-                      <a:tailEnd type="none" w="med" len="med"/>
-                    </a:lnT>
-                    <a:lnB w="9525" cap="flat" cmpd="sng" algn="ctr">
-                      <a:solidFill>
-                        <a:srgbClr val="D5DDE3"/>
-                      </a:solidFill>
-                      <a:prstDash val="solid"/>
-                      <a:round/>
-                      <a:headEnd type="none" w="med" len="med"/>
-                      <a:tailEnd type="none" w="med" len="med"/>
-                    </a:lnB>
-                  </a:tcPr>
-                </a:tc>
-                <a:tc>
-                  <a:txBody>
-                    <a:bodyPr/>
-                    <a:lstStyle/>
-                    <a:p>
-                      <a:pPr indent="0" marL="0">
-                        <a:buNone/>
-                      </a:pPr>
-                      <a:r>
-                        <a:rPr lang="en-US" sz="1200" dirty="0">
-                          <a:solidFill>
-                            <a:schemeClr val="tx1"/>
-                          </a:solidFill>
-                        </a:rPr>
-                        <a:t>Rencontres 1, 2, 3, 6, 7, 8</a:t>
-                      </a:r>
-                      <a:endParaRPr lang="en-US" sz="1200" dirty="0"/>
-                    </a:p>
-                  </a:txBody>
-                  <a:tcPr marL="54864" marR="54864" marT="27432" marB="27432" anchor="ctr">
-                    <a:lnL w="9525" cap="flat" cmpd="sng" algn="ctr">
-                      <a:solidFill>
-                        <a:srgbClr val="D5DDE3"/>
-                      </a:solidFill>
-                      <a:prstDash val="solid"/>
-                      <a:round/>
-                      <a:headEnd type="none" w="med" len="med"/>
-                      <a:tailEnd type="none" w="med" len="med"/>
-                    </a:lnL>
-                    <a:lnR w="9525" cap="flat" cmpd="sng" algn="ctr">
-                      <a:solidFill>
-                        <a:srgbClr val="D5DDE3"/>
-                      </a:solidFill>
-                      <a:prstDash val="solid"/>
-                      <a:round/>
-                      <a:headEnd type="none" w="med" len="med"/>
-                      <a:tailEnd type="none" w="med" len="med"/>
-                    </a:lnR>
-                    <a:lnT w="9525" cap="flat" cmpd="sng" algn="ctr">
-                      <a:solidFill>
-                        <a:srgbClr val="D5DDE3"/>
-                      </a:solidFill>
-                      <a:prstDash val="solid"/>
-                      <a:round/>
-                      <a:headEnd type="none" w="med" len="med"/>
-                      <a:tailEnd type="none" w="med" len="med"/>
-                    </a:lnT>
-                    <a:lnB w="9525" cap="flat" cmpd="sng" algn="ctr">
-                      <a:solidFill>
-                        <a:srgbClr val="D5DDE3"/>
-                      </a:solidFill>
-                      <a:prstDash val="solid"/>
-                      <a:round/>
-                      <a:headEnd type="none" w="med" len="med"/>
-                      <a:tailEnd type="none" w="med" len="med"/>
-                    </a:lnB>
-                  </a:tcPr>
-                </a:tc>
-              </a:tr>
-            </a:tbl>
-          </a:graphicData>
-        </a:graphic>
-      </p:graphicFrame>
+      <p:sp>
+        <p:nvSpPr>
+          <p:cNvPr id="3" name="Text 1"/>
+          <p:cNvSpPr txBox="1"/>
+          <p:nvPr/>
+        </p:nvSpPr>
+        <p:spPr>
+          <a:xfrm>
+            <a:off x="3108960" y="1005840"/>
+            <a:ext cx="1188720" cy="228600"/>
+          </a:xfrm>
+          <a:prstGeom prst="rect">
+            <a:avLst/>
+          </a:prstGeom>
+          <a:noFill/>
+          <a:ln/>
+        </p:spPr>
+        <p:txBody>
+          <a:bodyPr wrap="square" lIns="0" tIns="0" rIns="0" bIns="0" rtlCol="0" anchor="ctr"/>
+          <a:lstStyle/>
+          <a:p>
+            <a:pPr indent="0" marL="0">
+              <a:buNone/>
+            </a:pPr>
+            <a:r>
+              <a:rPr lang="en-US" sz="1100" b="1" dirty="0">
+                <a:solidFill>
+                  <a:schemeClr val="tx2"/>
+                </a:solidFill>
+              </a:rPr>
+              <a:t>8-9 oct.</a:t>
+            </a:r>
+            <a:endParaRPr lang="en-US" sz="1100" dirty="0"/>
+          </a:p>
+        </p:txBody>
+      </p:sp>
+      <p:sp>
+        <p:nvSpPr>
+          <p:cNvPr id="4" name="Repère semaine"/>
+          <p:cNvSpPr/>
+          <p:nvPr/>
+        </p:nvSpPr>
+        <p:spPr>
+          <a:xfrm>
+            <a:off x="3108960" y="1261872"/>
+            <a:ext cx="0" cy="3291840"/>
+          </a:xfrm>
+          <a:prstGeom prst="line">
+            <a:avLst/>
+          </a:prstGeom>
+          <a:noFill/>
+          <a:ln w="9525">
+            <a:solidFill>
+              <a:srgbClr val="D5DDE3"/>
+            </a:solidFill>
+            <a:prstDash val="solid"/>
+          </a:ln>
+        </p:spPr>
+      </p:sp>
+      <p:sp>
+        <p:nvSpPr>
+          <p:cNvPr id="5" name="Text 3"/>
+          <p:cNvSpPr txBox="1"/>
+          <p:nvPr/>
+        </p:nvSpPr>
+        <p:spPr>
+          <a:xfrm>
+            <a:off x="4321534" y="1005840"/>
+            <a:ext cx="1188720" cy="228600"/>
+          </a:xfrm>
+          <a:prstGeom prst="rect">
+            <a:avLst/>
+          </a:prstGeom>
+          <a:noFill/>
+          <a:ln/>
+        </p:spPr>
+        <p:txBody>
+          <a:bodyPr wrap="square" lIns="0" tIns="0" rIns="0" bIns="0" rtlCol="0" anchor="ctr"/>
+          <a:lstStyle/>
+          <a:p>
+            <a:pPr indent="0" marL="0">
+              <a:buNone/>
+            </a:pPr>
+            <a:r>
+              <a:rPr lang="en-US" sz="1100" b="1" dirty="0">
+                <a:solidFill>
+                  <a:schemeClr val="tx2"/>
+                </a:solidFill>
+              </a:rPr>
+              <a:t>13-16 oct.</a:t>
+            </a:r>
+            <a:endParaRPr lang="en-US" sz="1100" dirty="0"/>
+          </a:p>
+        </p:txBody>
+      </p:sp>
+      <p:sp>
+        <p:nvSpPr>
+          <p:cNvPr id="6" name="Repère semaine"/>
+          <p:cNvSpPr/>
+          <p:nvPr/>
+        </p:nvSpPr>
+        <p:spPr>
+          <a:xfrm>
+            <a:off x="4321534" y="1261872"/>
+            <a:ext cx="0" cy="3291840"/>
+          </a:xfrm>
+          <a:prstGeom prst="line">
+            <a:avLst/>
+          </a:prstGeom>
+          <a:noFill/>
+          <a:ln w="9525">
+            <a:solidFill>
+              <a:srgbClr val="D5DDE3"/>
+            </a:solidFill>
+            <a:prstDash val="solid"/>
+          </a:ln>
+        </p:spPr>
+      </p:sp>
+      <p:sp>
+        <p:nvSpPr>
+          <p:cNvPr id="7" name="Text 5"/>
+          <p:cNvSpPr txBox="1"/>
+          <p:nvPr/>
+        </p:nvSpPr>
+        <p:spPr>
+          <a:xfrm>
+            <a:off x="5776623" y="1005840"/>
+            <a:ext cx="1188720" cy="228600"/>
+          </a:xfrm>
+          <a:prstGeom prst="rect">
+            <a:avLst/>
+          </a:prstGeom>
+          <a:noFill/>
+          <a:ln/>
+        </p:spPr>
+        <p:txBody>
+          <a:bodyPr wrap="square" lIns="0" tIns="0" rIns="0" bIns="0" rtlCol="0" anchor="ctr"/>
+          <a:lstStyle/>
+          <a:p>
+            <a:pPr indent="0" marL="0">
+              <a:buNone/>
+            </a:pPr>
+            <a:r>
+              <a:rPr lang="en-US" sz="1100" b="1" dirty="0">
+                <a:solidFill>
+                  <a:schemeClr val="tx2"/>
+                </a:solidFill>
+              </a:rPr>
+              <a:t>19-23 oct.</a:t>
+            </a:r>
+            <a:endParaRPr lang="en-US" sz="1100" dirty="0"/>
+          </a:p>
+        </p:txBody>
+      </p:sp>
+      <p:sp>
+        <p:nvSpPr>
+          <p:cNvPr id="8" name="Repère semaine"/>
+          <p:cNvSpPr/>
+          <p:nvPr/>
+        </p:nvSpPr>
+        <p:spPr>
+          <a:xfrm>
+            <a:off x="5776623" y="1261872"/>
+            <a:ext cx="0" cy="3291840"/>
+          </a:xfrm>
+          <a:prstGeom prst="line">
+            <a:avLst/>
+          </a:prstGeom>
+          <a:noFill/>
+          <a:ln w="9525">
+            <a:solidFill>
+              <a:srgbClr val="D5DDE3"/>
+            </a:solidFill>
+            <a:prstDash val="solid"/>
+          </a:ln>
+        </p:spPr>
+      </p:sp>
+      <p:sp>
+        <p:nvSpPr>
+          <p:cNvPr id="9" name="Text 7"/>
+          <p:cNvSpPr txBox="1"/>
+          <p:nvPr/>
+        </p:nvSpPr>
+        <p:spPr>
+          <a:xfrm>
+            <a:off x="7474226" y="1005840"/>
+            <a:ext cx="1188720" cy="228600"/>
+          </a:xfrm>
+          <a:prstGeom prst="rect">
+            <a:avLst/>
+          </a:prstGeom>
+          <a:noFill/>
+          <a:ln/>
+        </p:spPr>
+        <p:txBody>
+          <a:bodyPr wrap="square" lIns="0" tIns="0" rIns="0" bIns="0" rtlCol="0" anchor="ctr"/>
+          <a:lstStyle/>
+          <a:p>
+            <a:pPr indent="0" marL="0">
+              <a:buNone/>
+            </a:pPr>
+            <a:r>
+              <a:rPr lang="en-US" sz="1100" b="1" dirty="0">
+                <a:solidFill>
+                  <a:schemeClr val="tx2"/>
+                </a:solidFill>
+              </a:rPr>
+              <a:t>26-30 oct.</a:t>
+            </a:r>
+            <a:endParaRPr lang="en-US" sz="1100" dirty="0"/>
+          </a:p>
+        </p:txBody>
+      </p:sp>
+      <p:sp>
+        <p:nvSpPr>
+          <p:cNvPr id="10" name="Repère semaine"/>
+          <p:cNvSpPr/>
+          <p:nvPr/>
+        </p:nvSpPr>
+        <p:spPr>
+          <a:xfrm>
+            <a:off x="7474226" y="1261872"/>
+            <a:ext cx="0" cy="3291840"/>
+          </a:xfrm>
+          <a:prstGeom prst="line">
+            <a:avLst/>
+          </a:prstGeom>
+          <a:noFill/>
+          <a:ln w="9525">
+            <a:solidFill>
+              <a:srgbClr val="D5DDE3"/>
+            </a:solidFill>
+            <a:prstDash val="solid"/>
+          </a:ln>
+        </p:spPr>
+      </p:sp>
+      <p:sp>
+        <p:nvSpPr>
+          <p:cNvPr id="11" name="Text 9"/>
+          <p:cNvSpPr txBox="1"/>
+          <p:nvPr/>
+        </p:nvSpPr>
+        <p:spPr>
+          <a:xfrm>
+            <a:off x="457200" y="1325880"/>
+            <a:ext cx="2606040" cy="274320"/>
+          </a:xfrm>
+          <a:prstGeom prst="rect">
+            <a:avLst/>
+          </a:prstGeom>
+          <a:noFill/>
+          <a:ln/>
+        </p:spPr>
+        <p:txBody>
+          <a:bodyPr wrap="square" lIns="0" tIns="0" rIns="0" bIns="0" rtlCol="0" anchor="ctr"/>
+          <a:lstStyle/>
+          <a:p>
+            <a:pPr indent="0" marL="0">
+              <a:buNone/>
+            </a:pPr>
+            <a:r>
+              <a:rPr lang="en-US" sz="1200" dirty="0">
+                <a:solidFill>
+                  <a:schemeClr val="tx1"/>
+                </a:solidFill>
+              </a:rPr>
+              <a:t>1. Inventaire du tenant</a:t>
+            </a:r>
+            <a:endParaRPr lang="en-US" sz="1200" dirty="0"/>
+          </a:p>
+        </p:txBody>
+      </p:sp>
+      <p:sp>
+        <p:nvSpPr>
+          <p:cNvPr id="12" name="Barre lot"/>
+          <p:cNvSpPr/>
+          <p:nvPr/>
+        </p:nvSpPr>
+        <p:spPr>
+          <a:xfrm>
+            <a:off x="3108960" y="1353312"/>
+            <a:ext cx="1940118" cy="219456"/>
+          </a:xfrm>
+          <a:prstGeom prst="roundRect">
+            <a:avLst>
+              <a:gd name="adj" fmla="val 20833"/>
+            </a:avLst>
+          </a:prstGeom>
+          <a:solidFill>
+            <a:schemeClr val="tx2"/>
+          </a:solidFill>
+          <a:ln w="12700">
+            <a:solidFill>
+              <a:schemeClr val="tx2"/>
+            </a:solidFill>
+            <a:prstDash val="solid"/>
+          </a:ln>
+        </p:spPr>
+      </p:sp>
+      <p:sp>
+        <p:nvSpPr>
+          <p:cNvPr id="13" name="Text 11"/>
+          <p:cNvSpPr txBox="1"/>
+          <p:nvPr/>
+        </p:nvSpPr>
+        <p:spPr>
+          <a:xfrm>
+            <a:off x="457200" y="1645920"/>
+            <a:ext cx="2606040" cy="274320"/>
+          </a:xfrm>
+          <a:prstGeom prst="rect">
+            <a:avLst/>
+          </a:prstGeom>
+          <a:noFill/>
+          <a:ln/>
+        </p:spPr>
+        <p:txBody>
+          <a:bodyPr wrap="square" lIns="0" tIns="0" rIns="0" bIns="0" rtlCol="0" anchor="ctr"/>
+          <a:lstStyle/>
+          <a:p>
+            <a:pPr indent="0" marL="0">
+              <a:buNone/>
+            </a:pPr>
+            <a:r>
+              <a:rPr lang="en-US" sz="1200" dirty="0">
+                <a:solidFill>
+                  <a:schemeClr val="tx1"/>
+                </a:solidFill>
+              </a:rPr>
+              <a:t>2. Blocage création libre</a:t>
+            </a:r>
+            <a:endParaRPr lang="en-US" sz="1200" dirty="0"/>
+          </a:p>
+        </p:txBody>
+      </p:sp>
+      <p:sp>
+        <p:nvSpPr>
+          <p:cNvPr id="14" name="Barre lot"/>
+          <p:cNvSpPr/>
+          <p:nvPr/>
+        </p:nvSpPr>
+        <p:spPr>
+          <a:xfrm>
+            <a:off x="4321534" y="1673352"/>
+            <a:ext cx="1697603" cy="219456"/>
+          </a:xfrm>
+          <a:prstGeom prst="roundRect">
+            <a:avLst>
+              <a:gd name="adj" fmla="val 20833"/>
+            </a:avLst>
+          </a:prstGeom>
+          <a:solidFill>
+            <a:schemeClr val="accent1"/>
+          </a:solidFill>
+          <a:ln w="12700">
+            <a:solidFill>
+              <a:schemeClr val="accent1"/>
+            </a:solidFill>
+            <a:prstDash val="solid"/>
+          </a:ln>
+        </p:spPr>
+      </p:sp>
+      <p:sp>
+        <p:nvSpPr>
+          <p:cNvPr id="15" name="Text 13"/>
+          <p:cNvSpPr txBox="1"/>
+          <p:nvPr/>
+        </p:nvSpPr>
+        <p:spPr>
+          <a:xfrm>
+            <a:off x="457200" y="1965960"/>
+            <a:ext cx="2606040" cy="274320"/>
+          </a:xfrm>
+          <a:prstGeom prst="rect">
+            <a:avLst/>
+          </a:prstGeom>
+          <a:noFill/>
+          <a:ln/>
+        </p:spPr>
+        <p:txBody>
+          <a:bodyPr wrap="square" lIns="0" tIns="0" rIns="0" bIns="0" rtlCol="0" anchor="ctr"/>
+          <a:lstStyle/>
+          <a:p>
+            <a:pPr indent="0" marL="0">
+              <a:buNone/>
+            </a:pPr>
+            <a:r>
+              <a:rPr lang="en-US" sz="1200" dirty="0">
+                <a:solidFill>
+                  <a:schemeClr val="tx1"/>
+                </a:solidFill>
+              </a:rPr>
+              <a:t>3. Prototype du portail</a:t>
+            </a:r>
+            <a:endParaRPr lang="en-US" sz="1200" dirty="0"/>
+          </a:p>
+        </p:txBody>
+      </p:sp>
+      <p:sp>
+        <p:nvSpPr>
+          <p:cNvPr id="16" name="Barre lot"/>
+          <p:cNvSpPr/>
+          <p:nvPr/>
+        </p:nvSpPr>
+        <p:spPr>
+          <a:xfrm>
+            <a:off x="3108960" y="1993392"/>
+            <a:ext cx="4850296" cy="219456"/>
+          </a:xfrm>
+          <a:prstGeom prst="roundRect">
+            <a:avLst>
+              <a:gd name="adj" fmla="val 20833"/>
+            </a:avLst>
+          </a:prstGeom>
+          <a:solidFill>
+            <a:schemeClr val="tx2"/>
+          </a:solidFill>
+          <a:ln w="12700">
+            <a:solidFill>
+              <a:schemeClr val="tx2"/>
+            </a:solidFill>
+            <a:prstDash val="solid"/>
+          </a:ln>
+        </p:spPr>
+      </p:sp>
+      <p:sp>
+        <p:nvSpPr>
+          <p:cNvPr id="17" name="Text 15"/>
+          <p:cNvSpPr txBox="1"/>
+          <p:nvPr/>
+        </p:nvSpPr>
+        <p:spPr>
+          <a:xfrm>
+            <a:off x="457200" y="2286000"/>
+            <a:ext cx="2606040" cy="274320"/>
+          </a:xfrm>
+          <a:prstGeom prst="rect">
+            <a:avLst/>
+          </a:prstGeom>
+          <a:noFill/>
+          <a:ln/>
+        </p:spPr>
+        <p:txBody>
+          <a:bodyPr wrap="square" lIns="0" tIns="0" rIns="0" bIns="0" rtlCol="0" anchor="ctr"/>
+          <a:lstStyle/>
+          <a:p>
+            <a:pPr indent="0" marL="0">
+              <a:buNone/>
+            </a:pPr>
+            <a:r>
+              <a:rPr lang="en-US" sz="1200" dirty="0">
+                <a:solidFill>
+                  <a:schemeClr val="tx1"/>
+                </a:solidFill>
+              </a:rPr>
+              <a:t>4. Gabarit Équipe (v1)</a:t>
+            </a:r>
+            <a:endParaRPr lang="en-US" sz="1200" dirty="0"/>
+          </a:p>
+        </p:txBody>
+      </p:sp>
+      <p:sp>
+        <p:nvSpPr>
+          <p:cNvPr id="18" name="Barre lot"/>
+          <p:cNvSpPr/>
+          <p:nvPr/>
+        </p:nvSpPr>
+        <p:spPr>
+          <a:xfrm>
+            <a:off x="4806563" y="2313432"/>
+            <a:ext cx="3152692" cy="219456"/>
+          </a:xfrm>
+          <a:prstGeom prst="roundRect">
+            <a:avLst>
+              <a:gd name="adj" fmla="val 20833"/>
+            </a:avLst>
+          </a:prstGeom>
+          <a:solidFill>
+            <a:schemeClr val="accent1"/>
+          </a:solidFill>
+          <a:ln w="12700">
+            <a:solidFill>
+              <a:schemeClr val="accent1"/>
+            </a:solidFill>
+            <a:prstDash val="solid"/>
+          </a:ln>
+        </p:spPr>
+      </p:sp>
+      <p:sp>
+        <p:nvSpPr>
+          <p:cNvPr id="19" name="Text 17"/>
+          <p:cNvSpPr txBox="1"/>
+          <p:nvPr/>
+        </p:nvSpPr>
+        <p:spPr>
+          <a:xfrm>
+            <a:off x="457200" y="2606040"/>
+            <a:ext cx="2606040" cy="274320"/>
+          </a:xfrm>
+          <a:prstGeom prst="rect">
+            <a:avLst/>
+          </a:prstGeom>
+          <a:noFill/>
+          <a:ln/>
+        </p:spPr>
+        <p:txBody>
+          <a:bodyPr wrap="square" lIns="0" tIns="0" rIns="0" bIns="0" rtlCol="0" anchor="ctr"/>
+          <a:lstStyle/>
+          <a:p>
+            <a:pPr indent="0" marL="0">
+              <a:buNone/>
+            </a:pPr>
+            <a:r>
+              <a:rPr lang="en-US" sz="1200" dirty="0">
+                <a:solidFill>
+                  <a:schemeClr val="tx1"/>
+                </a:solidFill>
+              </a:rPr>
+              <a:t>5. Partage externe</a:t>
+            </a:r>
+            <a:endParaRPr lang="en-US" sz="1200" dirty="0"/>
+          </a:p>
+        </p:txBody>
+      </p:sp>
+      <p:sp>
+        <p:nvSpPr>
+          <p:cNvPr id="20" name="Barre lot"/>
+          <p:cNvSpPr/>
+          <p:nvPr/>
+        </p:nvSpPr>
+        <p:spPr>
+          <a:xfrm>
+            <a:off x="6019137" y="2633472"/>
+            <a:ext cx="970059" cy="219456"/>
+          </a:xfrm>
+          <a:prstGeom prst="roundRect">
+            <a:avLst>
+              <a:gd name="adj" fmla="val 20833"/>
+            </a:avLst>
+          </a:prstGeom>
+          <a:solidFill>
+            <a:schemeClr val="tx2"/>
+          </a:solidFill>
+          <a:ln w="12700">
+            <a:solidFill>
+              <a:schemeClr val="tx2"/>
+            </a:solidFill>
+            <a:prstDash val="solid"/>
+          </a:ln>
+        </p:spPr>
+      </p:sp>
+      <p:sp>
+        <p:nvSpPr>
+          <p:cNvPr id="21" name="Text 19"/>
+          <p:cNvSpPr txBox="1"/>
+          <p:nvPr/>
+        </p:nvSpPr>
+        <p:spPr>
+          <a:xfrm>
+            <a:off x="457200" y="2926080"/>
+            <a:ext cx="2606040" cy="274320"/>
+          </a:xfrm>
+          <a:prstGeom prst="rect">
+            <a:avLst/>
+          </a:prstGeom>
+          <a:noFill/>
+          <a:ln/>
+        </p:spPr>
+        <p:txBody>
+          <a:bodyPr wrap="square" lIns="0" tIns="0" rIns="0" bIns="0" rtlCol="0" anchor="ctr"/>
+          <a:lstStyle/>
+          <a:p>
+            <a:pPr indent="0" marL="0">
+              <a:buNone/>
+            </a:pPr>
+            <a:r>
+              <a:rPr lang="en-US" sz="1200" dirty="0">
+                <a:solidFill>
+                  <a:schemeClr val="tx1"/>
+                </a:solidFill>
+              </a:rPr>
+              <a:t>6. Étiquettes et rétention</a:t>
+            </a:r>
+            <a:endParaRPr lang="en-US" sz="1200" dirty="0"/>
+          </a:p>
+        </p:txBody>
+      </p:sp>
+      <p:sp>
+        <p:nvSpPr>
+          <p:cNvPr id="22" name="Barre lot"/>
+          <p:cNvSpPr/>
+          <p:nvPr/>
+        </p:nvSpPr>
+        <p:spPr>
+          <a:xfrm>
+            <a:off x="6019137" y="2953512"/>
+            <a:ext cx="2182633" cy="219456"/>
+          </a:xfrm>
+          <a:prstGeom prst="roundRect">
+            <a:avLst>
+              <a:gd name="adj" fmla="val 20833"/>
+            </a:avLst>
+          </a:prstGeom>
+          <a:solidFill>
+            <a:schemeClr val="accent1"/>
+          </a:solidFill>
+          <a:ln w="12700">
+            <a:solidFill>
+              <a:schemeClr val="accent1"/>
+            </a:solidFill>
+            <a:prstDash val="solid"/>
+          </a:ln>
+        </p:spPr>
+      </p:sp>
+      <p:sp>
+        <p:nvSpPr>
+          <p:cNvPr id="23" name="Text 21"/>
+          <p:cNvSpPr txBox="1"/>
+          <p:nvPr/>
+        </p:nvSpPr>
+        <p:spPr>
+          <a:xfrm>
+            <a:off x="457200" y="3246120"/>
+            <a:ext cx="2606040" cy="274320"/>
+          </a:xfrm>
+          <a:prstGeom prst="rect">
+            <a:avLst/>
+          </a:prstGeom>
+          <a:noFill/>
+          <a:ln/>
+        </p:spPr>
+        <p:txBody>
+          <a:bodyPr wrap="square" lIns="0" tIns="0" rIns="0" bIns="0" rtlCol="0" anchor="ctr"/>
+          <a:lstStyle/>
+          <a:p>
+            <a:pPr indent="0" marL="0">
+              <a:buNone/>
+            </a:pPr>
+            <a:r>
+              <a:rPr lang="en-US" sz="1200" dirty="0">
+                <a:solidFill>
+                  <a:schemeClr val="tx1"/>
+                </a:solidFill>
+              </a:rPr>
+              <a:t>7. Rapport de surpartage</a:t>
+            </a:r>
+            <a:endParaRPr lang="en-US" sz="1200" dirty="0"/>
+          </a:p>
+        </p:txBody>
+      </p:sp>
+      <p:sp>
+        <p:nvSpPr>
+          <p:cNvPr id="24" name="Barre lot"/>
+          <p:cNvSpPr/>
+          <p:nvPr/>
+        </p:nvSpPr>
+        <p:spPr>
+          <a:xfrm>
+            <a:off x="5776623" y="3273552"/>
+            <a:ext cx="1212574" cy="219456"/>
+          </a:xfrm>
+          <a:prstGeom prst="roundRect">
+            <a:avLst>
+              <a:gd name="adj" fmla="val 20833"/>
+            </a:avLst>
+          </a:prstGeom>
+          <a:solidFill>
+            <a:schemeClr val="tx2"/>
+          </a:solidFill>
+          <a:ln w="12700">
+            <a:solidFill>
+              <a:schemeClr val="tx2"/>
+            </a:solidFill>
+            <a:prstDash val="solid"/>
+          </a:ln>
+        </p:spPr>
+      </p:sp>
+      <p:sp>
+        <p:nvSpPr>
+          <p:cNvPr id="25" name="Text 23"/>
+          <p:cNvSpPr txBox="1"/>
+          <p:nvPr/>
+        </p:nvSpPr>
+        <p:spPr>
+          <a:xfrm>
+            <a:off x="457200" y="3566160"/>
+            <a:ext cx="2606040" cy="274320"/>
+          </a:xfrm>
+          <a:prstGeom prst="rect">
+            <a:avLst/>
+          </a:prstGeom>
+          <a:noFill/>
+          <a:ln/>
+        </p:spPr>
+        <p:txBody>
+          <a:bodyPr wrap="square" lIns="0" tIns="0" rIns="0" bIns="0" rtlCol="0" anchor="ctr"/>
+          <a:lstStyle/>
+          <a:p>
+            <a:pPr indent="0" marL="0">
+              <a:buNone/>
+            </a:pPr>
+            <a:r>
+              <a:rPr lang="en-US" sz="1200" dirty="0">
+                <a:solidFill>
+                  <a:schemeClr val="tx1"/>
+                </a:solidFill>
+              </a:rPr>
+              <a:t>8. Accès conditionnel (rapport)</a:t>
+            </a:r>
+            <a:endParaRPr lang="en-US" sz="1200" dirty="0"/>
+          </a:p>
+        </p:txBody>
+      </p:sp>
+      <p:sp>
+        <p:nvSpPr>
+          <p:cNvPr id="26" name="Barre lot"/>
+          <p:cNvSpPr/>
+          <p:nvPr/>
+        </p:nvSpPr>
+        <p:spPr>
+          <a:xfrm>
+            <a:off x="6019137" y="3593592"/>
+            <a:ext cx="2182633" cy="219456"/>
+          </a:xfrm>
+          <a:prstGeom prst="roundRect">
+            <a:avLst>
+              <a:gd name="adj" fmla="val 20833"/>
+            </a:avLst>
+          </a:prstGeom>
+          <a:solidFill>
+            <a:schemeClr val="accent1"/>
+          </a:solidFill>
+          <a:ln w="12700">
+            <a:solidFill>
+              <a:schemeClr val="accent1"/>
+            </a:solidFill>
+            <a:prstDash val="solid"/>
+          </a:ln>
+        </p:spPr>
+      </p:sp>
+      <p:sp>
+        <p:nvSpPr>
+          <p:cNvPr id="27" name="Text 25"/>
+          <p:cNvSpPr txBox="1"/>
+          <p:nvPr/>
+        </p:nvSpPr>
+        <p:spPr>
+          <a:xfrm>
+            <a:off x="457200" y="3886200"/>
+            <a:ext cx="2606040" cy="274320"/>
+          </a:xfrm>
+          <a:prstGeom prst="rect">
+            <a:avLst/>
+          </a:prstGeom>
+          <a:noFill/>
+          <a:ln/>
+        </p:spPr>
+        <p:txBody>
+          <a:bodyPr wrap="square" lIns="0" tIns="0" rIns="0" bIns="0" rtlCol="0" anchor="ctr"/>
+          <a:lstStyle/>
+          <a:p>
+            <a:pPr indent="0" marL="0">
+              <a:buNone/>
+            </a:pPr>
+            <a:r>
+              <a:rPr lang="en-US" sz="1200" dirty="0">
+                <a:solidFill>
+                  <a:schemeClr val="tx1"/>
+                </a:solidFill>
+              </a:rPr>
+              <a:t>9. Registre et orphelins</a:t>
+            </a:r>
+            <a:endParaRPr lang="en-US" sz="1200" dirty="0"/>
+          </a:p>
+        </p:txBody>
+      </p:sp>
+      <p:sp>
+        <p:nvSpPr>
+          <p:cNvPr id="28" name="Barre lot"/>
+          <p:cNvSpPr/>
+          <p:nvPr/>
+        </p:nvSpPr>
+        <p:spPr>
+          <a:xfrm>
+            <a:off x="4321534" y="3913632"/>
+            <a:ext cx="3395207" cy="219456"/>
+          </a:xfrm>
+          <a:prstGeom prst="roundRect">
+            <a:avLst>
+              <a:gd name="adj" fmla="val 20833"/>
+            </a:avLst>
+          </a:prstGeom>
+          <a:solidFill>
+            <a:schemeClr val="tx2"/>
+          </a:solidFill>
+          <a:ln w="12700">
+            <a:solidFill>
+              <a:schemeClr val="tx2"/>
+            </a:solidFill>
+            <a:prstDash val="solid"/>
+          </a:ln>
+        </p:spPr>
+      </p:sp>
+      <p:sp>
+        <p:nvSpPr>
+          <p:cNvPr id="29" name="Text 27"/>
+          <p:cNvSpPr txBox="1"/>
+          <p:nvPr/>
+        </p:nvSpPr>
+        <p:spPr>
+          <a:xfrm>
+            <a:off x="457200" y="4206240"/>
+            <a:ext cx="2606040" cy="274320"/>
+          </a:xfrm>
+          <a:prstGeom prst="rect">
+            <a:avLst/>
+          </a:prstGeom>
+          <a:noFill/>
+          <a:ln/>
+        </p:spPr>
+        <p:txBody>
+          <a:bodyPr wrap="square" lIns="0" tIns="0" rIns="0" bIns="0" rtlCol="0" anchor="ctr"/>
+          <a:lstStyle/>
+          <a:p>
+            <a:pPr indent="0" marL="0">
+              <a:buNone/>
+            </a:pPr>
+            <a:r>
+              <a:rPr lang="en-US" sz="1200" dirty="0">
+                <a:solidFill>
+                  <a:schemeClr val="tx1"/>
+                </a:solidFill>
+              </a:rPr>
+              <a:t>10. Documentation et plan</a:t>
+            </a:r>
+            <a:endParaRPr lang="en-US" sz="1200" dirty="0"/>
+          </a:p>
+        </p:txBody>
+      </p:sp>
+      <p:sp>
+        <p:nvSpPr>
+          <p:cNvPr id="30" name="Barre lot"/>
+          <p:cNvSpPr/>
+          <p:nvPr/>
+        </p:nvSpPr>
+        <p:spPr>
+          <a:xfrm>
+            <a:off x="7474226" y="4233672"/>
+            <a:ext cx="970059" cy="219456"/>
+          </a:xfrm>
+          <a:prstGeom prst="roundRect">
+            <a:avLst>
+              <a:gd name="adj" fmla="val 20833"/>
+            </a:avLst>
+          </a:prstGeom>
+          <a:solidFill>
+            <a:schemeClr val="accent1"/>
+          </a:solidFill>
+          <a:ln w="12700">
+            <a:solidFill>
+              <a:schemeClr val="accent1"/>
+            </a:solidFill>
+            <a:prstDash val="solid"/>
+          </a:ln>
+        </p:spPr>
+      </p:sp>
+      <p:sp>
+        <p:nvSpPr>
+          <p:cNvPr id="31" name="Text 29"/>
+          <p:cNvSpPr txBox="1"/>
+          <p:nvPr/>
+        </p:nvSpPr>
+        <p:spPr>
+          <a:xfrm>
+            <a:off x="457200" y="4572000"/>
+            <a:ext cx="8229600" cy="201168"/>
+          </a:xfrm>
+          <a:prstGeom prst="rect">
+            <a:avLst/>
+          </a:prstGeom>
+          <a:noFill/>
+          <a:ln/>
+        </p:spPr>
+        <p:txBody>
+          <a:bodyPr wrap="square" lIns="0" tIns="0" rIns="0" bIns="0" rtlCol="0" anchor="ctr"/>
+          <a:lstStyle/>
+          <a:p>
+            <a:pPr indent="0" marL="0">
+              <a:buNone/>
+            </a:pPr>
+            <a:r>
+              <a:rPr lang="en-US" sz="1000" dirty="0">
+                <a:solidFill>
+                  <a:schemeClr val="accent6"/>
+                </a:solidFill>
+              </a:rPr>
+              <a:t>Rencontres : 8 (lancement), 9 (décisions), 21-22 (ateliers), 27 (démonstration), 30 (comité ADM)</a:t>
+            </a:r>
+            <a:endParaRPr lang="en-US" sz="1000" dirty="0"/>
+          </a:p>
+        </p:txBody>
+      </p:sp>
       <p:sp>
         <p:nvSpPr>
           <p:cNvPr id="25" name="Slide Number Placeholder 0"/>
@@ -15373,26 +14846,1534 @@
                 <a:ea typeface="Cambria" pitchFamily="34" charset="-122"/>
                 <a:cs typeface="Cambria" pitchFamily="34" charset="-120"/>
               </a:rPr>
-              <a:t>Ce qui est livré le 30 octobre</a:t>
+              <a:t>Capacité de l'équipe et appui requis</a:t>
             </a:r>
             <a:endParaRPr lang="en-US" sz="3000" dirty="0"/>
           </a:p>
         </p:txBody>
       </p:sp>
-      <p:sp>
-        <p:nvSpPr>
-          <p:cNvPr id="3" name="Carte"/>
+      <p:graphicFrame>
+        <p:nvGraphicFramePr>
+          <p:cNvPr id="10" name="Table 0"/>
+          <p:cNvGraphicFramePr>
+            <a:graphicFrameLocks noGrp="1"/>
+          </p:cNvGraphicFramePr>
+          <p:nvPr>
+            <p:extLst>
+              <p:ext uri="{D42A27DB-BD31-4B8C-83A1-F6EECF244321}">
+                <p14:modId xmlns:p14="http://schemas.microsoft.com/office/powerpoint/2010/main" val="1579011935"/>
+              </p:ext>
+            </p:extLst>
+          </p:nvPr>
+        </p:nvGraphicFramePr>
+        <p:xfrm>
+          <a:off x="457200" y="1051560"/>
+          <a:ext cx="8229600" cy="914400"/>
+        </p:xfrm>
+        <a:graphic>
+          <a:graphicData uri="http://schemas.openxmlformats.org/drawingml/2006/table">
+            <a:tbl>
+              <a:tblPr/>
+              <a:tblGrid>
+                <a:gridCol w="2743200"/>
+                <a:gridCol w="1188720"/>
+                <a:gridCol w="1280160"/>
+                <a:gridCol w="1645920"/>
+                <a:gridCol w="1371600"/>
+              </a:tblGrid>
+              <a:tr h="365760">
+                <a:tc>
+                  <a:txBody>
+                    <a:bodyPr/>
+                    <a:lstStyle/>
+                    <a:p>
+                      <a:pPr indent="0" marL="0">
+                        <a:buNone/>
+                      </a:pPr>
+                      <a:r>
+                        <a:rPr lang="en-US" sz="1200" b="1" dirty="0">
+                          <a:solidFill>
+                            <a:schemeClr val="bg1"/>
+                          </a:solidFill>
+                        </a:rPr>
+                        <a:t>Rôle</a:t>
+                      </a:r>
+                      <a:endParaRPr lang="en-US" sz="1200" dirty="0"/>
+                    </a:p>
+                  </a:txBody>
+                  <a:tcPr marL="54864" marR="54864" marT="27432" marB="27432" anchor="ctr">
+                    <a:lnL w="9525" cap="flat" cmpd="sng" algn="ctr">
+                      <a:solidFill>
+                        <a:srgbClr val="D5DDE3"/>
+                      </a:solidFill>
+                      <a:prstDash val="solid"/>
+                      <a:round/>
+                      <a:headEnd type="none" w="med" len="med"/>
+                      <a:tailEnd type="none" w="med" len="med"/>
+                    </a:lnL>
+                    <a:lnR w="9525" cap="flat" cmpd="sng" algn="ctr">
+                      <a:solidFill>
+                        <a:srgbClr val="D5DDE3"/>
+                      </a:solidFill>
+                      <a:prstDash val="solid"/>
+                      <a:round/>
+                      <a:headEnd type="none" w="med" len="med"/>
+                      <a:tailEnd type="none" w="med" len="med"/>
+                    </a:lnR>
+                    <a:lnT w="9525" cap="flat" cmpd="sng" algn="ctr">
+                      <a:solidFill>
+                        <a:srgbClr val="D5DDE3"/>
+                      </a:solidFill>
+                      <a:prstDash val="solid"/>
+                      <a:round/>
+                      <a:headEnd type="none" w="med" len="med"/>
+                      <a:tailEnd type="none" w="med" len="med"/>
+                    </a:lnT>
+                    <a:lnB w="9525" cap="flat" cmpd="sng" algn="ctr">
+                      <a:solidFill>
+                        <a:srgbClr val="D5DDE3"/>
+                      </a:solidFill>
+                      <a:prstDash val="solid"/>
+                      <a:round/>
+                      <a:headEnd type="none" w="med" len="med"/>
+                      <a:tailEnd type="none" w="med" len="med"/>
+                    </a:lnB>
+                    <a:solidFill>
+                      <a:schemeClr val="tx2"/>
+                    </a:solidFill>
+                  </a:tcPr>
+                </a:tc>
+                <a:tc>
+                  <a:txBody>
+                    <a:bodyPr/>
+                    <a:lstStyle/>
+                    <a:p>
+                      <a:pPr indent="0" marL="0">
+                        <a:buNone/>
+                      </a:pPr>
+                      <a:r>
+                        <a:rPr lang="en-US" sz="1200" b="1" dirty="0">
+                          <a:solidFill>
+                            <a:schemeClr val="bg1"/>
+                          </a:solidFill>
+                        </a:rPr>
+                        <a:t>Capacité</a:t>
+                      </a:r>
+                      <a:endParaRPr lang="en-US" sz="1200" dirty="0"/>
+                    </a:p>
+                  </a:txBody>
+                  <a:tcPr marL="54864" marR="54864" marT="27432" marB="27432" anchor="ctr">
+                    <a:lnL w="9525" cap="flat" cmpd="sng" algn="ctr">
+                      <a:solidFill>
+                        <a:srgbClr val="D5DDE3"/>
+                      </a:solidFill>
+                      <a:prstDash val="solid"/>
+                      <a:round/>
+                      <a:headEnd type="none" w="med" len="med"/>
+                      <a:tailEnd type="none" w="med" len="med"/>
+                    </a:lnL>
+                    <a:lnR w="9525" cap="flat" cmpd="sng" algn="ctr">
+                      <a:solidFill>
+                        <a:srgbClr val="D5DDE3"/>
+                      </a:solidFill>
+                      <a:prstDash val="solid"/>
+                      <a:round/>
+                      <a:headEnd type="none" w="med" len="med"/>
+                      <a:tailEnd type="none" w="med" len="med"/>
+                    </a:lnR>
+                    <a:lnT w="9525" cap="flat" cmpd="sng" algn="ctr">
+                      <a:solidFill>
+                        <a:srgbClr val="D5DDE3"/>
+                      </a:solidFill>
+                      <a:prstDash val="solid"/>
+                      <a:round/>
+                      <a:headEnd type="none" w="med" len="med"/>
+                      <a:tailEnd type="none" w="med" len="med"/>
+                    </a:lnT>
+                    <a:lnB w="9525" cap="flat" cmpd="sng" algn="ctr">
+                      <a:solidFill>
+                        <a:srgbClr val="D5DDE3"/>
+                      </a:solidFill>
+                      <a:prstDash val="solid"/>
+                      <a:round/>
+                      <a:headEnd type="none" w="med" len="med"/>
+                      <a:tailEnd type="none" w="med" len="med"/>
+                    </a:lnB>
+                    <a:solidFill>
+                      <a:schemeClr val="tx2"/>
+                    </a:solidFill>
+                  </a:tcPr>
+                </a:tc>
+                <a:tc>
+                  <a:txBody>
+                    <a:bodyPr/>
+                    <a:lstStyle/>
+                    <a:p>
+                      <a:pPr indent="0" marL="0">
+                        <a:buNone/>
+                      </a:pPr>
+                      <a:r>
+                        <a:rPr lang="en-US" sz="1200" b="1" dirty="0">
+                          <a:solidFill>
+                            <a:schemeClr val="bg1"/>
+                          </a:solidFill>
+                        </a:rPr>
+                        <a:t>Période</a:t>
+                      </a:r>
+                      <a:endParaRPr lang="en-US" sz="1200" dirty="0"/>
+                    </a:p>
+                  </a:txBody>
+                  <a:tcPr marL="54864" marR="54864" marT="27432" marB="27432" anchor="ctr">
+                    <a:lnL w="9525" cap="flat" cmpd="sng" algn="ctr">
+                      <a:solidFill>
+                        <a:srgbClr val="D5DDE3"/>
+                      </a:solidFill>
+                      <a:prstDash val="solid"/>
+                      <a:round/>
+                      <a:headEnd type="none" w="med" len="med"/>
+                      <a:tailEnd type="none" w="med" len="med"/>
+                    </a:lnL>
+                    <a:lnR w="9525" cap="flat" cmpd="sng" algn="ctr">
+                      <a:solidFill>
+                        <a:srgbClr val="D5DDE3"/>
+                      </a:solidFill>
+                      <a:prstDash val="solid"/>
+                      <a:round/>
+                      <a:headEnd type="none" w="med" len="med"/>
+                      <a:tailEnd type="none" w="med" len="med"/>
+                    </a:lnR>
+                    <a:lnT w="9525" cap="flat" cmpd="sng" algn="ctr">
+                      <a:solidFill>
+                        <a:srgbClr val="D5DDE3"/>
+                      </a:solidFill>
+                      <a:prstDash val="solid"/>
+                      <a:round/>
+                      <a:headEnd type="none" w="med" len="med"/>
+                      <a:tailEnd type="none" w="med" len="med"/>
+                    </a:lnT>
+                    <a:lnB w="9525" cap="flat" cmpd="sng" algn="ctr">
+                      <a:solidFill>
+                        <a:srgbClr val="D5DDE3"/>
+                      </a:solidFill>
+                      <a:prstDash val="solid"/>
+                      <a:round/>
+                      <a:headEnd type="none" w="med" len="med"/>
+                      <a:tailEnd type="none" w="med" len="med"/>
+                    </a:lnB>
+                    <a:solidFill>
+                      <a:schemeClr val="tx2"/>
+                    </a:solidFill>
+                  </a:tcPr>
+                </a:tc>
+                <a:tc>
+                  <a:txBody>
+                    <a:bodyPr/>
+                    <a:lstStyle/>
+                    <a:p>
+                      <a:pPr indent="0" marL="0">
+                        <a:buNone/>
+                      </a:pPr>
+                      <a:r>
+                        <a:rPr lang="en-US" sz="1200" b="1" dirty="0">
+                          <a:solidFill>
+                            <a:schemeClr val="bg1"/>
+                          </a:solidFill>
+                        </a:rPr>
+                        <a:t>Charge planifiée</a:t>
+                      </a:r>
+                      <a:endParaRPr lang="en-US" sz="1200" dirty="0"/>
+                    </a:p>
+                  </a:txBody>
+                  <a:tcPr marL="54864" marR="54864" marT="27432" marB="27432" anchor="ctr">
+                    <a:lnL w="9525" cap="flat" cmpd="sng" algn="ctr">
+                      <a:solidFill>
+                        <a:srgbClr val="D5DDE3"/>
+                      </a:solidFill>
+                      <a:prstDash val="solid"/>
+                      <a:round/>
+                      <a:headEnd type="none" w="med" len="med"/>
+                      <a:tailEnd type="none" w="med" len="med"/>
+                    </a:lnL>
+                    <a:lnR w="9525" cap="flat" cmpd="sng" algn="ctr">
+                      <a:solidFill>
+                        <a:srgbClr val="D5DDE3"/>
+                      </a:solidFill>
+                      <a:prstDash val="solid"/>
+                      <a:round/>
+                      <a:headEnd type="none" w="med" len="med"/>
+                      <a:tailEnd type="none" w="med" len="med"/>
+                    </a:lnR>
+                    <a:lnT w="9525" cap="flat" cmpd="sng" algn="ctr">
+                      <a:solidFill>
+                        <a:srgbClr val="D5DDE3"/>
+                      </a:solidFill>
+                      <a:prstDash val="solid"/>
+                      <a:round/>
+                      <a:headEnd type="none" w="med" len="med"/>
+                      <a:tailEnd type="none" w="med" len="med"/>
+                    </a:lnT>
+                    <a:lnB w="9525" cap="flat" cmpd="sng" algn="ctr">
+                      <a:solidFill>
+                        <a:srgbClr val="D5DDE3"/>
+                      </a:solidFill>
+                      <a:prstDash val="solid"/>
+                      <a:round/>
+                      <a:headEnd type="none" w="med" len="med"/>
+                      <a:tailEnd type="none" w="med" len="med"/>
+                    </a:lnB>
+                    <a:solidFill>
+                      <a:schemeClr val="tx2"/>
+                    </a:solidFill>
+                  </a:tcPr>
+                </a:tc>
+                <a:tc>
+                  <a:txBody>
+                    <a:bodyPr/>
+                    <a:lstStyle/>
+                    <a:p>
+                      <a:pPr indent="0" marL="0">
+                        <a:buNone/>
+                      </a:pPr>
+                      <a:r>
+                        <a:rPr lang="en-US" sz="1200" b="1" dirty="0">
+                          <a:solidFill>
+                            <a:schemeClr val="bg1"/>
+                          </a:solidFill>
+                        </a:rPr>
+                        <a:t>Marge</a:t>
+                      </a:r>
+                      <a:endParaRPr lang="en-US" sz="1200" dirty="0"/>
+                    </a:p>
+                  </a:txBody>
+                  <a:tcPr marL="54864" marR="54864" marT="27432" marB="27432" anchor="ctr">
+                    <a:lnL w="9525" cap="flat" cmpd="sng" algn="ctr">
+                      <a:solidFill>
+                        <a:srgbClr val="D5DDE3"/>
+                      </a:solidFill>
+                      <a:prstDash val="solid"/>
+                      <a:round/>
+                      <a:headEnd type="none" w="med" len="med"/>
+                      <a:tailEnd type="none" w="med" len="med"/>
+                    </a:lnL>
+                    <a:lnR w="9525" cap="flat" cmpd="sng" algn="ctr">
+                      <a:solidFill>
+                        <a:srgbClr val="D5DDE3"/>
+                      </a:solidFill>
+                      <a:prstDash val="solid"/>
+                      <a:round/>
+                      <a:headEnd type="none" w="med" len="med"/>
+                      <a:tailEnd type="none" w="med" len="med"/>
+                    </a:lnR>
+                    <a:lnT w="9525" cap="flat" cmpd="sng" algn="ctr">
+                      <a:solidFill>
+                        <a:srgbClr val="D5DDE3"/>
+                      </a:solidFill>
+                      <a:prstDash val="solid"/>
+                      <a:round/>
+                      <a:headEnd type="none" w="med" len="med"/>
+                      <a:tailEnd type="none" w="med" len="med"/>
+                    </a:lnT>
+                    <a:lnB w="9525" cap="flat" cmpd="sng" algn="ctr">
+                      <a:solidFill>
+                        <a:srgbClr val="D5DDE3"/>
+                      </a:solidFill>
+                      <a:prstDash val="solid"/>
+                      <a:round/>
+                      <a:headEnd type="none" w="med" len="med"/>
+                      <a:tailEnd type="none" w="med" len="med"/>
+                    </a:lnB>
+                    <a:solidFill>
+                      <a:schemeClr val="tx2"/>
+                    </a:solidFill>
+                  </a:tcPr>
+                </a:tc>
+              </a:tr>
+              <a:tr h="365760">
+                <a:tc>
+                  <a:txBody>
+                    <a:bodyPr/>
+                    <a:lstStyle/>
+                    <a:p>
+                      <a:pPr indent="0" marL="0">
+                        <a:buNone/>
+                      </a:pPr>
+                      <a:r>
+                        <a:rPr lang="en-US" sz="1300" b="1" dirty="0">
+                          <a:solidFill>
+                            <a:schemeClr val="tx1"/>
+                          </a:solidFill>
+                        </a:rPr>
+                        <a:t>Architecte applicatif</a:t>
+                      </a:r>
+                      <a:endParaRPr lang="en-US" sz="1300" dirty="0"/>
+                    </a:p>
+                  </a:txBody>
+                  <a:tcPr marL="54864" marR="54864" marT="27432" marB="27432" anchor="ctr">
+                    <a:lnL w="9525" cap="flat" cmpd="sng" algn="ctr">
+                      <a:solidFill>
+                        <a:srgbClr val="D5DDE3"/>
+                      </a:solidFill>
+                      <a:prstDash val="solid"/>
+                      <a:round/>
+                      <a:headEnd type="none" w="med" len="med"/>
+                      <a:tailEnd type="none" w="med" len="med"/>
+                    </a:lnL>
+                    <a:lnR w="9525" cap="flat" cmpd="sng" algn="ctr">
+                      <a:solidFill>
+                        <a:srgbClr val="D5DDE3"/>
+                      </a:solidFill>
+                      <a:prstDash val="solid"/>
+                      <a:round/>
+                      <a:headEnd type="none" w="med" len="med"/>
+                      <a:tailEnd type="none" w="med" len="med"/>
+                    </a:lnR>
+                    <a:lnT w="9525" cap="flat" cmpd="sng" algn="ctr">
+                      <a:solidFill>
+                        <a:srgbClr val="D5DDE3"/>
+                      </a:solidFill>
+                      <a:prstDash val="solid"/>
+                      <a:round/>
+                      <a:headEnd type="none" w="med" len="med"/>
+                      <a:tailEnd type="none" w="med" len="med"/>
+                    </a:lnT>
+                    <a:lnB w="9525" cap="flat" cmpd="sng" algn="ctr">
+                      <a:solidFill>
+                        <a:srgbClr val="D5DDE3"/>
+                      </a:solidFill>
+                      <a:prstDash val="solid"/>
+                      <a:round/>
+                      <a:headEnd type="none" w="med" len="med"/>
+                      <a:tailEnd type="none" w="med" len="med"/>
+                    </a:lnB>
+                  </a:tcPr>
+                </a:tc>
+                <a:tc>
+                  <a:txBody>
+                    <a:bodyPr/>
+                    <a:lstStyle/>
+                    <a:p>
+                      <a:pPr indent="0" marL="0">
+                        <a:buNone/>
+                      </a:pPr>
+                      <a:r>
+                        <a:rPr lang="en-US" sz="1300" dirty="0">
+                          <a:solidFill>
+                            <a:schemeClr val="tx1"/>
+                          </a:solidFill>
+                        </a:rPr>
+                        <a:t>30 h/sem.</a:t>
+                      </a:r>
+                      <a:endParaRPr lang="en-US" sz="1300" dirty="0"/>
+                    </a:p>
+                  </a:txBody>
+                  <a:tcPr marL="54864" marR="54864" marT="27432" marB="27432" anchor="ctr">
+                    <a:lnL w="9525" cap="flat" cmpd="sng" algn="ctr">
+                      <a:solidFill>
+                        <a:srgbClr val="D5DDE3"/>
+                      </a:solidFill>
+                      <a:prstDash val="solid"/>
+                      <a:round/>
+                      <a:headEnd type="none" w="med" len="med"/>
+                      <a:tailEnd type="none" w="med" len="med"/>
+                    </a:lnL>
+                    <a:lnR w="9525" cap="flat" cmpd="sng" algn="ctr">
+                      <a:solidFill>
+                        <a:srgbClr val="D5DDE3"/>
+                      </a:solidFill>
+                      <a:prstDash val="solid"/>
+                      <a:round/>
+                      <a:headEnd type="none" w="med" len="med"/>
+                      <a:tailEnd type="none" w="med" len="med"/>
+                    </a:lnR>
+                    <a:lnT w="9525" cap="flat" cmpd="sng" algn="ctr">
+                      <a:solidFill>
+                        <a:srgbClr val="D5DDE3"/>
+                      </a:solidFill>
+                      <a:prstDash val="solid"/>
+                      <a:round/>
+                      <a:headEnd type="none" w="med" len="med"/>
+                      <a:tailEnd type="none" w="med" len="med"/>
+                    </a:lnT>
+                    <a:lnB w="9525" cap="flat" cmpd="sng" algn="ctr">
+                      <a:solidFill>
+                        <a:srgbClr val="D5DDE3"/>
+                      </a:solidFill>
+                      <a:prstDash val="solid"/>
+                      <a:round/>
+                      <a:headEnd type="none" w="med" len="med"/>
+                      <a:tailEnd type="none" w="med" len="med"/>
+                    </a:lnB>
+                  </a:tcPr>
+                </a:tc>
+                <a:tc>
+                  <a:txBody>
+                    <a:bodyPr/>
+                    <a:lstStyle/>
+                    <a:p>
+                      <a:pPr indent="0" marL="0">
+                        <a:buNone/>
+                      </a:pPr>
+                      <a:r>
+                        <a:rPr lang="en-US" sz="1300" dirty="0">
+                          <a:solidFill>
+                            <a:schemeClr val="tx1"/>
+                          </a:solidFill>
+                        </a:rPr>
+                        <a:t>96 h</a:t>
+                      </a:r>
+                      <a:endParaRPr lang="en-US" sz="1300" dirty="0"/>
+                    </a:p>
+                  </a:txBody>
+                  <a:tcPr marL="54864" marR="54864" marT="27432" marB="27432" anchor="ctr">
+                    <a:lnL w="9525" cap="flat" cmpd="sng" algn="ctr">
+                      <a:solidFill>
+                        <a:srgbClr val="D5DDE3"/>
+                      </a:solidFill>
+                      <a:prstDash val="solid"/>
+                      <a:round/>
+                      <a:headEnd type="none" w="med" len="med"/>
+                      <a:tailEnd type="none" w="med" len="med"/>
+                    </a:lnL>
+                    <a:lnR w="9525" cap="flat" cmpd="sng" algn="ctr">
+                      <a:solidFill>
+                        <a:srgbClr val="D5DDE3"/>
+                      </a:solidFill>
+                      <a:prstDash val="solid"/>
+                      <a:round/>
+                      <a:headEnd type="none" w="med" len="med"/>
+                      <a:tailEnd type="none" w="med" len="med"/>
+                    </a:lnR>
+                    <a:lnT w="9525" cap="flat" cmpd="sng" algn="ctr">
+                      <a:solidFill>
+                        <a:srgbClr val="D5DDE3"/>
+                      </a:solidFill>
+                      <a:prstDash val="solid"/>
+                      <a:round/>
+                      <a:headEnd type="none" w="med" len="med"/>
+                      <a:tailEnd type="none" w="med" len="med"/>
+                    </a:lnT>
+                    <a:lnB w="9525" cap="flat" cmpd="sng" algn="ctr">
+                      <a:solidFill>
+                        <a:srgbClr val="D5DDE3"/>
+                      </a:solidFill>
+                      <a:prstDash val="solid"/>
+                      <a:round/>
+                      <a:headEnd type="none" w="med" len="med"/>
+                      <a:tailEnd type="none" w="med" len="med"/>
+                    </a:lnB>
+                  </a:tcPr>
+                </a:tc>
+                <a:tc>
+                  <a:txBody>
+                    <a:bodyPr/>
+                    <a:lstStyle/>
+                    <a:p>
+                      <a:pPr indent="0" marL="0">
+                        <a:buNone/>
+                      </a:pPr>
+                      <a:r>
+                        <a:rPr lang="en-US" sz="1300" dirty="0">
+                          <a:solidFill>
+                            <a:schemeClr val="tx1"/>
+                          </a:solidFill>
+                        </a:rPr>
+                        <a:t>94,5 h</a:t>
+                      </a:r>
+                      <a:endParaRPr lang="en-US" sz="1300" dirty="0"/>
+                    </a:p>
+                  </a:txBody>
+                  <a:tcPr marL="54864" marR="54864" marT="27432" marB="27432" anchor="ctr">
+                    <a:lnL w="9525" cap="flat" cmpd="sng" algn="ctr">
+                      <a:solidFill>
+                        <a:srgbClr val="D5DDE3"/>
+                      </a:solidFill>
+                      <a:prstDash val="solid"/>
+                      <a:round/>
+                      <a:headEnd type="none" w="med" len="med"/>
+                      <a:tailEnd type="none" w="med" len="med"/>
+                    </a:lnL>
+                    <a:lnR w="9525" cap="flat" cmpd="sng" algn="ctr">
+                      <a:solidFill>
+                        <a:srgbClr val="D5DDE3"/>
+                      </a:solidFill>
+                      <a:prstDash val="solid"/>
+                      <a:round/>
+                      <a:headEnd type="none" w="med" len="med"/>
+                      <a:tailEnd type="none" w="med" len="med"/>
+                    </a:lnR>
+                    <a:lnT w="9525" cap="flat" cmpd="sng" algn="ctr">
+                      <a:solidFill>
+                        <a:srgbClr val="D5DDE3"/>
+                      </a:solidFill>
+                      <a:prstDash val="solid"/>
+                      <a:round/>
+                      <a:headEnd type="none" w="med" len="med"/>
+                      <a:tailEnd type="none" w="med" len="med"/>
+                    </a:lnT>
+                    <a:lnB w="9525" cap="flat" cmpd="sng" algn="ctr">
+                      <a:solidFill>
+                        <a:srgbClr val="D5DDE3"/>
+                      </a:solidFill>
+                      <a:prstDash val="solid"/>
+                      <a:round/>
+                      <a:headEnd type="none" w="med" len="med"/>
+                      <a:tailEnd type="none" w="med" len="med"/>
+                    </a:lnB>
+                  </a:tcPr>
+                </a:tc>
+                <a:tc>
+                  <a:txBody>
+                    <a:bodyPr/>
+                    <a:lstStyle/>
+                    <a:p>
+                      <a:pPr indent="0" marL="0">
+                        <a:buNone/>
+                      </a:pPr>
+                      <a:r>
+                        <a:rPr lang="en-US" sz="1300" dirty="0">
+                          <a:solidFill>
+                            <a:schemeClr val="tx1"/>
+                          </a:solidFill>
+                        </a:rPr>
+                        <a:t>1,5 h</a:t>
+                      </a:r>
+                      <a:endParaRPr lang="en-US" sz="1300" dirty="0"/>
+                    </a:p>
+                  </a:txBody>
+                  <a:tcPr marL="54864" marR="54864" marT="27432" marB="27432" anchor="ctr">
+                    <a:lnL w="9525" cap="flat" cmpd="sng" algn="ctr">
+                      <a:solidFill>
+                        <a:srgbClr val="D5DDE3"/>
+                      </a:solidFill>
+                      <a:prstDash val="solid"/>
+                      <a:round/>
+                      <a:headEnd type="none" w="med" len="med"/>
+                      <a:tailEnd type="none" w="med" len="med"/>
+                    </a:lnL>
+                    <a:lnR w="9525" cap="flat" cmpd="sng" algn="ctr">
+                      <a:solidFill>
+                        <a:srgbClr val="D5DDE3"/>
+                      </a:solidFill>
+                      <a:prstDash val="solid"/>
+                      <a:round/>
+                      <a:headEnd type="none" w="med" len="med"/>
+                      <a:tailEnd type="none" w="med" len="med"/>
+                    </a:lnR>
+                    <a:lnT w="9525" cap="flat" cmpd="sng" algn="ctr">
+                      <a:solidFill>
+                        <a:srgbClr val="D5DDE3"/>
+                      </a:solidFill>
+                      <a:prstDash val="solid"/>
+                      <a:round/>
+                      <a:headEnd type="none" w="med" len="med"/>
+                      <a:tailEnd type="none" w="med" len="med"/>
+                    </a:lnT>
+                    <a:lnB w="9525" cap="flat" cmpd="sng" algn="ctr">
+                      <a:solidFill>
+                        <a:srgbClr val="D5DDE3"/>
+                      </a:solidFill>
+                      <a:prstDash val="solid"/>
+                      <a:round/>
+                      <a:headEnd type="none" w="med" len="med"/>
+                      <a:tailEnd type="none" w="med" len="med"/>
+                    </a:lnB>
+                  </a:tcPr>
+                </a:tc>
+              </a:tr>
+              <a:tr h="365760">
+                <a:tc>
+                  <a:txBody>
+                    <a:bodyPr/>
+                    <a:lstStyle/>
+                    <a:p>
+                      <a:pPr indent="0" marL="0">
+                        <a:buNone/>
+                      </a:pPr>
+                      <a:r>
+                        <a:rPr lang="en-US" sz="1300" b="1" dirty="0">
+                          <a:solidFill>
+                            <a:schemeClr val="tx1"/>
+                          </a:solidFill>
+                        </a:rPr>
+                        <a:t>Architecte technologique</a:t>
+                      </a:r>
+                      <a:endParaRPr lang="en-US" sz="1300" dirty="0"/>
+                    </a:p>
+                  </a:txBody>
+                  <a:tcPr marL="54864" marR="54864" marT="27432" marB="27432" anchor="ctr">
+                    <a:lnL w="9525" cap="flat" cmpd="sng" algn="ctr">
+                      <a:solidFill>
+                        <a:srgbClr val="D5DDE3"/>
+                      </a:solidFill>
+                      <a:prstDash val="solid"/>
+                      <a:round/>
+                      <a:headEnd type="none" w="med" len="med"/>
+                      <a:tailEnd type="none" w="med" len="med"/>
+                    </a:lnL>
+                    <a:lnR w="9525" cap="flat" cmpd="sng" algn="ctr">
+                      <a:solidFill>
+                        <a:srgbClr val="D5DDE3"/>
+                      </a:solidFill>
+                      <a:prstDash val="solid"/>
+                      <a:round/>
+                      <a:headEnd type="none" w="med" len="med"/>
+                      <a:tailEnd type="none" w="med" len="med"/>
+                    </a:lnR>
+                    <a:lnT w="9525" cap="flat" cmpd="sng" algn="ctr">
+                      <a:solidFill>
+                        <a:srgbClr val="D5DDE3"/>
+                      </a:solidFill>
+                      <a:prstDash val="solid"/>
+                      <a:round/>
+                      <a:headEnd type="none" w="med" len="med"/>
+                      <a:tailEnd type="none" w="med" len="med"/>
+                    </a:lnT>
+                    <a:lnB w="9525" cap="flat" cmpd="sng" algn="ctr">
+                      <a:solidFill>
+                        <a:srgbClr val="D5DDE3"/>
+                      </a:solidFill>
+                      <a:prstDash val="solid"/>
+                      <a:round/>
+                      <a:headEnd type="none" w="med" len="med"/>
+                      <a:tailEnd type="none" w="med" len="med"/>
+                    </a:lnB>
+                  </a:tcPr>
+                </a:tc>
+                <a:tc>
+                  <a:txBody>
+                    <a:bodyPr/>
+                    <a:lstStyle/>
+                    <a:p>
+                      <a:pPr indent="0" marL="0">
+                        <a:buNone/>
+                      </a:pPr>
+                      <a:r>
+                        <a:rPr lang="en-US" sz="1300" dirty="0">
+                          <a:solidFill>
+                            <a:schemeClr val="tx1"/>
+                          </a:solidFill>
+                        </a:rPr>
+                        <a:t>30 h/sem.</a:t>
+                      </a:r>
+                      <a:endParaRPr lang="en-US" sz="1300" dirty="0"/>
+                    </a:p>
+                  </a:txBody>
+                  <a:tcPr marL="54864" marR="54864" marT="27432" marB="27432" anchor="ctr">
+                    <a:lnL w="9525" cap="flat" cmpd="sng" algn="ctr">
+                      <a:solidFill>
+                        <a:srgbClr val="D5DDE3"/>
+                      </a:solidFill>
+                      <a:prstDash val="solid"/>
+                      <a:round/>
+                      <a:headEnd type="none" w="med" len="med"/>
+                      <a:tailEnd type="none" w="med" len="med"/>
+                    </a:lnL>
+                    <a:lnR w="9525" cap="flat" cmpd="sng" algn="ctr">
+                      <a:solidFill>
+                        <a:srgbClr val="D5DDE3"/>
+                      </a:solidFill>
+                      <a:prstDash val="solid"/>
+                      <a:round/>
+                      <a:headEnd type="none" w="med" len="med"/>
+                      <a:tailEnd type="none" w="med" len="med"/>
+                    </a:lnR>
+                    <a:lnT w="9525" cap="flat" cmpd="sng" algn="ctr">
+                      <a:solidFill>
+                        <a:srgbClr val="D5DDE3"/>
+                      </a:solidFill>
+                      <a:prstDash val="solid"/>
+                      <a:round/>
+                      <a:headEnd type="none" w="med" len="med"/>
+                      <a:tailEnd type="none" w="med" len="med"/>
+                    </a:lnT>
+                    <a:lnB w="9525" cap="flat" cmpd="sng" algn="ctr">
+                      <a:solidFill>
+                        <a:srgbClr val="D5DDE3"/>
+                      </a:solidFill>
+                      <a:prstDash val="solid"/>
+                      <a:round/>
+                      <a:headEnd type="none" w="med" len="med"/>
+                      <a:tailEnd type="none" w="med" len="med"/>
+                    </a:lnB>
+                  </a:tcPr>
+                </a:tc>
+                <a:tc>
+                  <a:txBody>
+                    <a:bodyPr/>
+                    <a:lstStyle/>
+                    <a:p>
+                      <a:pPr indent="0" marL="0">
+                        <a:buNone/>
+                      </a:pPr>
+                      <a:r>
+                        <a:rPr lang="en-US" sz="1300" dirty="0">
+                          <a:solidFill>
+                            <a:schemeClr val="tx1"/>
+                          </a:solidFill>
+                        </a:rPr>
+                        <a:t>96 h</a:t>
+                      </a:r>
+                      <a:endParaRPr lang="en-US" sz="1300" dirty="0"/>
+                    </a:p>
+                  </a:txBody>
+                  <a:tcPr marL="54864" marR="54864" marT="27432" marB="27432" anchor="ctr">
+                    <a:lnL w="9525" cap="flat" cmpd="sng" algn="ctr">
+                      <a:solidFill>
+                        <a:srgbClr val="D5DDE3"/>
+                      </a:solidFill>
+                      <a:prstDash val="solid"/>
+                      <a:round/>
+                      <a:headEnd type="none" w="med" len="med"/>
+                      <a:tailEnd type="none" w="med" len="med"/>
+                    </a:lnL>
+                    <a:lnR w="9525" cap="flat" cmpd="sng" algn="ctr">
+                      <a:solidFill>
+                        <a:srgbClr val="D5DDE3"/>
+                      </a:solidFill>
+                      <a:prstDash val="solid"/>
+                      <a:round/>
+                      <a:headEnd type="none" w="med" len="med"/>
+                      <a:tailEnd type="none" w="med" len="med"/>
+                    </a:lnR>
+                    <a:lnT w="9525" cap="flat" cmpd="sng" algn="ctr">
+                      <a:solidFill>
+                        <a:srgbClr val="D5DDE3"/>
+                      </a:solidFill>
+                      <a:prstDash val="solid"/>
+                      <a:round/>
+                      <a:headEnd type="none" w="med" len="med"/>
+                      <a:tailEnd type="none" w="med" len="med"/>
+                    </a:lnT>
+                    <a:lnB w="9525" cap="flat" cmpd="sng" algn="ctr">
+                      <a:solidFill>
+                        <a:srgbClr val="D5DDE3"/>
+                      </a:solidFill>
+                      <a:prstDash val="solid"/>
+                      <a:round/>
+                      <a:headEnd type="none" w="med" len="med"/>
+                      <a:tailEnd type="none" w="med" len="med"/>
+                    </a:lnB>
+                  </a:tcPr>
+                </a:tc>
+                <a:tc>
+                  <a:txBody>
+                    <a:bodyPr/>
+                    <a:lstStyle/>
+                    <a:p>
+                      <a:pPr indent="0" marL="0">
+                        <a:buNone/>
+                      </a:pPr>
+                      <a:r>
+                        <a:rPr lang="en-US" sz="1300" dirty="0">
+                          <a:solidFill>
+                            <a:schemeClr val="tx1"/>
+                          </a:solidFill>
+                        </a:rPr>
+                        <a:t>95,5 h</a:t>
+                      </a:r>
+                      <a:endParaRPr lang="en-US" sz="1300" dirty="0"/>
+                    </a:p>
+                  </a:txBody>
+                  <a:tcPr marL="54864" marR="54864" marT="27432" marB="27432" anchor="ctr">
+                    <a:lnL w="9525" cap="flat" cmpd="sng" algn="ctr">
+                      <a:solidFill>
+                        <a:srgbClr val="D5DDE3"/>
+                      </a:solidFill>
+                      <a:prstDash val="solid"/>
+                      <a:round/>
+                      <a:headEnd type="none" w="med" len="med"/>
+                      <a:tailEnd type="none" w="med" len="med"/>
+                    </a:lnL>
+                    <a:lnR w="9525" cap="flat" cmpd="sng" algn="ctr">
+                      <a:solidFill>
+                        <a:srgbClr val="D5DDE3"/>
+                      </a:solidFill>
+                      <a:prstDash val="solid"/>
+                      <a:round/>
+                      <a:headEnd type="none" w="med" len="med"/>
+                      <a:tailEnd type="none" w="med" len="med"/>
+                    </a:lnR>
+                    <a:lnT w="9525" cap="flat" cmpd="sng" algn="ctr">
+                      <a:solidFill>
+                        <a:srgbClr val="D5DDE3"/>
+                      </a:solidFill>
+                      <a:prstDash val="solid"/>
+                      <a:round/>
+                      <a:headEnd type="none" w="med" len="med"/>
+                      <a:tailEnd type="none" w="med" len="med"/>
+                    </a:lnT>
+                    <a:lnB w="9525" cap="flat" cmpd="sng" algn="ctr">
+                      <a:solidFill>
+                        <a:srgbClr val="D5DDE3"/>
+                      </a:solidFill>
+                      <a:prstDash val="solid"/>
+                      <a:round/>
+                      <a:headEnd type="none" w="med" len="med"/>
+                      <a:tailEnd type="none" w="med" len="med"/>
+                    </a:lnB>
+                  </a:tcPr>
+                </a:tc>
+                <a:tc>
+                  <a:txBody>
+                    <a:bodyPr/>
+                    <a:lstStyle/>
+                    <a:p>
+                      <a:pPr indent="0" marL="0">
+                        <a:buNone/>
+                      </a:pPr>
+                      <a:r>
+                        <a:rPr lang="en-US" sz="1300" dirty="0">
+                          <a:solidFill>
+                            <a:schemeClr val="tx1"/>
+                          </a:solidFill>
+                        </a:rPr>
+                        <a:t>0,5 h</a:t>
+                      </a:r>
+                      <a:endParaRPr lang="en-US" sz="1300" dirty="0"/>
+                    </a:p>
+                  </a:txBody>
+                  <a:tcPr marL="54864" marR="54864" marT="27432" marB="27432" anchor="ctr">
+                    <a:lnL w="9525" cap="flat" cmpd="sng" algn="ctr">
+                      <a:solidFill>
+                        <a:srgbClr val="D5DDE3"/>
+                      </a:solidFill>
+                      <a:prstDash val="solid"/>
+                      <a:round/>
+                      <a:headEnd type="none" w="med" len="med"/>
+                      <a:tailEnd type="none" w="med" len="med"/>
+                    </a:lnL>
+                    <a:lnR w="9525" cap="flat" cmpd="sng" algn="ctr">
+                      <a:solidFill>
+                        <a:srgbClr val="D5DDE3"/>
+                      </a:solidFill>
+                      <a:prstDash val="solid"/>
+                      <a:round/>
+                      <a:headEnd type="none" w="med" len="med"/>
+                      <a:tailEnd type="none" w="med" len="med"/>
+                    </a:lnR>
+                    <a:lnT w="9525" cap="flat" cmpd="sng" algn="ctr">
+                      <a:solidFill>
+                        <a:srgbClr val="D5DDE3"/>
+                      </a:solidFill>
+                      <a:prstDash val="solid"/>
+                      <a:round/>
+                      <a:headEnd type="none" w="med" len="med"/>
+                      <a:tailEnd type="none" w="med" len="med"/>
+                    </a:lnT>
+                    <a:lnB w="9525" cap="flat" cmpd="sng" algn="ctr">
+                      <a:solidFill>
+                        <a:srgbClr val="D5DDE3"/>
+                      </a:solidFill>
+                      <a:prstDash val="solid"/>
+                      <a:round/>
+                      <a:headEnd type="none" w="med" len="med"/>
+                      <a:tailEnd type="none" w="med" len="med"/>
+                    </a:lnB>
+                  </a:tcPr>
+                </a:tc>
+              </a:tr>
+              <a:tr h="365760">
+                <a:tc>
+                  <a:txBody>
+                    <a:bodyPr/>
+                    <a:lstStyle/>
+                    <a:p>
+                      <a:pPr indent="0" marL="0">
+                        <a:buNone/>
+                      </a:pPr>
+                      <a:r>
+                        <a:rPr lang="en-US" sz="1300" b="1" dirty="0">
+                          <a:solidFill>
+                            <a:schemeClr val="tx1"/>
+                          </a:solidFill>
+                        </a:rPr>
+                        <a:t>Chargé de projet</a:t>
+                      </a:r>
+                      <a:endParaRPr lang="en-US" sz="1300" dirty="0"/>
+                    </a:p>
+                  </a:txBody>
+                  <a:tcPr marL="54864" marR="54864" marT="27432" marB="27432" anchor="ctr">
+                    <a:lnL w="9525" cap="flat" cmpd="sng" algn="ctr">
+                      <a:solidFill>
+                        <a:srgbClr val="D5DDE3"/>
+                      </a:solidFill>
+                      <a:prstDash val="solid"/>
+                      <a:round/>
+                      <a:headEnd type="none" w="med" len="med"/>
+                      <a:tailEnd type="none" w="med" len="med"/>
+                    </a:lnL>
+                    <a:lnR w="9525" cap="flat" cmpd="sng" algn="ctr">
+                      <a:solidFill>
+                        <a:srgbClr val="D5DDE3"/>
+                      </a:solidFill>
+                      <a:prstDash val="solid"/>
+                      <a:round/>
+                      <a:headEnd type="none" w="med" len="med"/>
+                      <a:tailEnd type="none" w="med" len="med"/>
+                    </a:lnR>
+                    <a:lnT w="9525" cap="flat" cmpd="sng" algn="ctr">
+                      <a:solidFill>
+                        <a:srgbClr val="D5DDE3"/>
+                      </a:solidFill>
+                      <a:prstDash val="solid"/>
+                      <a:round/>
+                      <a:headEnd type="none" w="med" len="med"/>
+                      <a:tailEnd type="none" w="med" len="med"/>
+                    </a:lnT>
+                    <a:lnB w="9525" cap="flat" cmpd="sng" algn="ctr">
+                      <a:solidFill>
+                        <a:srgbClr val="D5DDE3"/>
+                      </a:solidFill>
+                      <a:prstDash val="solid"/>
+                      <a:round/>
+                      <a:headEnd type="none" w="med" len="med"/>
+                      <a:tailEnd type="none" w="med" len="med"/>
+                    </a:lnB>
+                  </a:tcPr>
+                </a:tc>
+                <a:tc>
+                  <a:txBody>
+                    <a:bodyPr/>
+                    <a:lstStyle/>
+                    <a:p>
+                      <a:pPr indent="0" marL="0">
+                        <a:buNone/>
+                      </a:pPr>
+                      <a:r>
+                        <a:rPr lang="en-US" sz="1300" dirty="0">
+                          <a:solidFill>
+                            <a:schemeClr val="tx1"/>
+                          </a:solidFill>
+                        </a:rPr>
+                        <a:t>21 h/sem.</a:t>
+                      </a:r>
+                      <a:endParaRPr lang="en-US" sz="1300" dirty="0"/>
+                    </a:p>
+                  </a:txBody>
+                  <a:tcPr marL="54864" marR="54864" marT="27432" marB="27432" anchor="ctr">
+                    <a:lnL w="9525" cap="flat" cmpd="sng" algn="ctr">
+                      <a:solidFill>
+                        <a:srgbClr val="D5DDE3"/>
+                      </a:solidFill>
+                      <a:prstDash val="solid"/>
+                      <a:round/>
+                      <a:headEnd type="none" w="med" len="med"/>
+                      <a:tailEnd type="none" w="med" len="med"/>
+                    </a:lnL>
+                    <a:lnR w="9525" cap="flat" cmpd="sng" algn="ctr">
+                      <a:solidFill>
+                        <a:srgbClr val="D5DDE3"/>
+                      </a:solidFill>
+                      <a:prstDash val="solid"/>
+                      <a:round/>
+                      <a:headEnd type="none" w="med" len="med"/>
+                      <a:tailEnd type="none" w="med" len="med"/>
+                    </a:lnR>
+                    <a:lnT w="9525" cap="flat" cmpd="sng" algn="ctr">
+                      <a:solidFill>
+                        <a:srgbClr val="D5DDE3"/>
+                      </a:solidFill>
+                      <a:prstDash val="solid"/>
+                      <a:round/>
+                      <a:headEnd type="none" w="med" len="med"/>
+                      <a:tailEnd type="none" w="med" len="med"/>
+                    </a:lnT>
+                    <a:lnB w="9525" cap="flat" cmpd="sng" algn="ctr">
+                      <a:solidFill>
+                        <a:srgbClr val="D5DDE3"/>
+                      </a:solidFill>
+                      <a:prstDash val="solid"/>
+                      <a:round/>
+                      <a:headEnd type="none" w="med" len="med"/>
+                      <a:tailEnd type="none" w="med" len="med"/>
+                    </a:lnB>
+                  </a:tcPr>
+                </a:tc>
+                <a:tc>
+                  <a:txBody>
+                    <a:bodyPr/>
+                    <a:lstStyle/>
+                    <a:p>
+                      <a:pPr indent="0" marL="0">
+                        <a:buNone/>
+                      </a:pPr>
+                      <a:r>
+                        <a:rPr lang="en-US" sz="1300" dirty="0">
+                          <a:solidFill>
+                            <a:schemeClr val="tx1"/>
+                          </a:solidFill>
+                        </a:rPr>
+                        <a:t>67 h</a:t>
+                      </a:r>
+                      <a:endParaRPr lang="en-US" sz="1300" dirty="0"/>
+                    </a:p>
+                  </a:txBody>
+                  <a:tcPr marL="54864" marR="54864" marT="27432" marB="27432" anchor="ctr">
+                    <a:lnL w="9525" cap="flat" cmpd="sng" algn="ctr">
+                      <a:solidFill>
+                        <a:srgbClr val="D5DDE3"/>
+                      </a:solidFill>
+                      <a:prstDash val="solid"/>
+                      <a:round/>
+                      <a:headEnd type="none" w="med" len="med"/>
+                      <a:tailEnd type="none" w="med" len="med"/>
+                    </a:lnL>
+                    <a:lnR w="9525" cap="flat" cmpd="sng" algn="ctr">
+                      <a:solidFill>
+                        <a:srgbClr val="D5DDE3"/>
+                      </a:solidFill>
+                      <a:prstDash val="solid"/>
+                      <a:round/>
+                      <a:headEnd type="none" w="med" len="med"/>
+                      <a:tailEnd type="none" w="med" len="med"/>
+                    </a:lnR>
+                    <a:lnT w="9525" cap="flat" cmpd="sng" algn="ctr">
+                      <a:solidFill>
+                        <a:srgbClr val="D5DDE3"/>
+                      </a:solidFill>
+                      <a:prstDash val="solid"/>
+                      <a:round/>
+                      <a:headEnd type="none" w="med" len="med"/>
+                      <a:tailEnd type="none" w="med" len="med"/>
+                    </a:lnT>
+                    <a:lnB w="9525" cap="flat" cmpd="sng" algn="ctr">
+                      <a:solidFill>
+                        <a:srgbClr val="D5DDE3"/>
+                      </a:solidFill>
+                      <a:prstDash val="solid"/>
+                      <a:round/>
+                      <a:headEnd type="none" w="med" len="med"/>
+                      <a:tailEnd type="none" w="med" len="med"/>
+                    </a:lnB>
+                  </a:tcPr>
+                </a:tc>
+                <a:tc>
+                  <a:txBody>
+                    <a:bodyPr/>
+                    <a:lstStyle/>
+                    <a:p>
+                      <a:pPr indent="0" marL="0">
+                        <a:buNone/>
+                      </a:pPr>
+                      <a:r>
+                        <a:rPr lang="en-US" sz="1300" dirty="0">
+                          <a:solidFill>
+                            <a:schemeClr val="tx1"/>
+                          </a:solidFill>
+                        </a:rPr>
+                        <a:t>63,5 h</a:t>
+                      </a:r>
+                      <a:endParaRPr lang="en-US" sz="1300" dirty="0"/>
+                    </a:p>
+                  </a:txBody>
+                  <a:tcPr marL="54864" marR="54864" marT="27432" marB="27432" anchor="ctr">
+                    <a:lnL w="9525" cap="flat" cmpd="sng" algn="ctr">
+                      <a:solidFill>
+                        <a:srgbClr val="D5DDE3"/>
+                      </a:solidFill>
+                      <a:prstDash val="solid"/>
+                      <a:round/>
+                      <a:headEnd type="none" w="med" len="med"/>
+                      <a:tailEnd type="none" w="med" len="med"/>
+                    </a:lnL>
+                    <a:lnR w="9525" cap="flat" cmpd="sng" algn="ctr">
+                      <a:solidFill>
+                        <a:srgbClr val="D5DDE3"/>
+                      </a:solidFill>
+                      <a:prstDash val="solid"/>
+                      <a:round/>
+                      <a:headEnd type="none" w="med" len="med"/>
+                      <a:tailEnd type="none" w="med" len="med"/>
+                    </a:lnR>
+                    <a:lnT w="9525" cap="flat" cmpd="sng" algn="ctr">
+                      <a:solidFill>
+                        <a:srgbClr val="D5DDE3"/>
+                      </a:solidFill>
+                      <a:prstDash val="solid"/>
+                      <a:round/>
+                      <a:headEnd type="none" w="med" len="med"/>
+                      <a:tailEnd type="none" w="med" len="med"/>
+                    </a:lnT>
+                    <a:lnB w="9525" cap="flat" cmpd="sng" algn="ctr">
+                      <a:solidFill>
+                        <a:srgbClr val="D5DDE3"/>
+                      </a:solidFill>
+                      <a:prstDash val="solid"/>
+                      <a:round/>
+                      <a:headEnd type="none" w="med" len="med"/>
+                      <a:tailEnd type="none" w="med" len="med"/>
+                    </a:lnB>
+                  </a:tcPr>
+                </a:tc>
+                <a:tc>
+                  <a:txBody>
+                    <a:bodyPr/>
+                    <a:lstStyle/>
+                    <a:p>
+                      <a:pPr indent="0" marL="0">
+                        <a:buNone/>
+                      </a:pPr>
+                      <a:r>
+                        <a:rPr lang="en-US" sz="1300" dirty="0">
+                          <a:solidFill>
+                            <a:schemeClr val="tx1"/>
+                          </a:solidFill>
+                        </a:rPr>
+                        <a:t>3,5 h</a:t>
+                      </a:r>
+                      <a:endParaRPr lang="en-US" sz="1300" dirty="0"/>
+                    </a:p>
+                  </a:txBody>
+                  <a:tcPr marL="54864" marR="54864" marT="27432" marB="27432" anchor="ctr">
+                    <a:lnL w="9525" cap="flat" cmpd="sng" algn="ctr">
+                      <a:solidFill>
+                        <a:srgbClr val="D5DDE3"/>
+                      </a:solidFill>
+                      <a:prstDash val="solid"/>
+                      <a:round/>
+                      <a:headEnd type="none" w="med" len="med"/>
+                      <a:tailEnd type="none" w="med" len="med"/>
+                    </a:lnL>
+                    <a:lnR w="9525" cap="flat" cmpd="sng" algn="ctr">
+                      <a:solidFill>
+                        <a:srgbClr val="D5DDE3"/>
+                      </a:solidFill>
+                      <a:prstDash val="solid"/>
+                      <a:round/>
+                      <a:headEnd type="none" w="med" len="med"/>
+                      <a:tailEnd type="none" w="med" len="med"/>
+                    </a:lnR>
+                    <a:lnT w="9525" cap="flat" cmpd="sng" algn="ctr">
+                      <a:solidFill>
+                        <a:srgbClr val="D5DDE3"/>
+                      </a:solidFill>
+                      <a:prstDash val="solid"/>
+                      <a:round/>
+                      <a:headEnd type="none" w="med" len="med"/>
+                      <a:tailEnd type="none" w="med" len="med"/>
+                    </a:lnT>
+                    <a:lnB w="9525" cap="flat" cmpd="sng" algn="ctr">
+                      <a:solidFill>
+                        <a:srgbClr val="D5DDE3"/>
+                      </a:solidFill>
+                      <a:prstDash val="solid"/>
+                      <a:round/>
+                      <a:headEnd type="none" w="med" len="med"/>
+                      <a:tailEnd type="none" w="med" len="med"/>
+                    </a:lnB>
+                  </a:tcPr>
+                </a:tc>
+              </a:tr>
+              <a:tr h="365760">
+                <a:tc>
+                  <a:txBody>
+                    <a:bodyPr/>
+                    <a:lstStyle/>
+                    <a:p>
+                      <a:pPr indent="0" marL="0">
+                        <a:buNone/>
+                      </a:pPr>
+                      <a:r>
+                        <a:rPr lang="en-US" sz="1300" b="1" dirty="0">
+                          <a:solidFill>
+                            <a:schemeClr val="tx1"/>
+                          </a:solidFill>
+                        </a:rPr>
+                        <a:t>Total équipe</a:t>
+                      </a:r>
+                      <a:endParaRPr lang="en-US" sz="1300" dirty="0"/>
+                    </a:p>
+                  </a:txBody>
+                  <a:tcPr marL="54864" marR="54864" marT="27432" marB="27432" anchor="ctr">
+                    <a:lnL w="9525" cap="flat" cmpd="sng" algn="ctr">
+                      <a:solidFill>
+                        <a:srgbClr val="D5DDE3"/>
+                      </a:solidFill>
+                      <a:prstDash val="solid"/>
+                      <a:round/>
+                      <a:headEnd type="none" w="med" len="med"/>
+                      <a:tailEnd type="none" w="med" len="med"/>
+                    </a:lnL>
+                    <a:lnR w="9525" cap="flat" cmpd="sng" algn="ctr">
+                      <a:solidFill>
+                        <a:srgbClr val="D5DDE3"/>
+                      </a:solidFill>
+                      <a:prstDash val="solid"/>
+                      <a:round/>
+                      <a:headEnd type="none" w="med" len="med"/>
+                      <a:tailEnd type="none" w="med" len="med"/>
+                    </a:lnR>
+                    <a:lnT w="9525" cap="flat" cmpd="sng" algn="ctr">
+                      <a:solidFill>
+                        <a:srgbClr val="D5DDE3"/>
+                      </a:solidFill>
+                      <a:prstDash val="solid"/>
+                      <a:round/>
+                      <a:headEnd type="none" w="med" len="med"/>
+                      <a:tailEnd type="none" w="med" len="med"/>
+                    </a:lnT>
+                    <a:lnB w="9525" cap="flat" cmpd="sng" algn="ctr">
+                      <a:solidFill>
+                        <a:srgbClr val="D5DDE3"/>
+                      </a:solidFill>
+                      <a:prstDash val="solid"/>
+                      <a:round/>
+                      <a:headEnd type="none" w="med" len="med"/>
+                      <a:tailEnd type="none" w="med" len="med"/>
+                    </a:lnB>
+                  </a:tcPr>
+                </a:tc>
+                <a:tc>
+                  <a:txBody>
+                    <a:bodyPr/>
+                    <a:lstStyle/>
+                    <a:p>
+                      <a:pPr indent="0" marL="0">
+                        <a:buNone/>
+                      </a:pPr>
+                      <a:r>
+                        <a:rPr lang="en-US" sz="1300" b="1" dirty="0">
+                          <a:solidFill>
+                            <a:schemeClr val="tx1"/>
+                          </a:solidFill>
+                        </a:rPr>
+                        <a:t>81 h/sem.</a:t>
+                      </a:r>
+                      <a:endParaRPr lang="en-US" sz="1300" dirty="0"/>
+                    </a:p>
+                  </a:txBody>
+                  <a:tcPr marL="54864" marR="54864" marT="27432" marB="27432" anchor="ctr">
+                    <a:lnL w="9525" cap="flat" cmpd="sng" algn="ctr">
+                      <a:solidFill>
+                        <a:srgbClr val="D5DDE3"/>
+                      </a:solidFill>
+                      <a:prstDash val="solid"/>
+                      <a:round/>
+                      <a:headEnd type="none" w="med" len="med"/>
+                      <a:tailEnd type="none" w="med" len="med"/>
+                    </a:lnL>
+                    <a:lnR w="9525" cap="flat" cmpd="sng" algn="ctr">
+                      <a:solidFill>
+                        <a:srgbClr val="D5DDE3"/>
+                      </a:solidFill>
+                      <a:prstDash val="solid"/>
+                      <a:round/>
+                      <a:headEnd type="none" w="med" len="med"/>
+                      <a:tailEnd type="none" w="med" len="med"/>
+                    </a:lnR>
+                    <a:lnT w="9525" cap="flat" cmpd="sng" algn="ctr">
+                      <a:solidFill>
+                        <a:srgbClr val="D5DDE3"/>
+                      </a:solidFill>
+                      <a:prstDash val="solid"/>
+                      <a:round/>
+                      <a:headEnd type="none" w="med" len="med"/>
+                      <a:tailEnd type="none" w="med" len="med"/>
+                    </a:lnT>
+                    <a:lnB w="9525" cap="flat" cmpd="sng" algn="ctr">
+                      <a:solidFill>
+                        <a:srgbClr val="D5DDE3"/>
+                      </a:solidFill>
+                      <a:prstDash val="solid"/>
+                      <a:round/>
+                      <a:headEnd type="none" w="med" len="med"/>
+                      <a:tailEnd type="none" w="med" len="med"/>
+                    </a:lnB>
+                  </a:tcPr>
+                </a:tc>
+                <a:tc>
+                  <a:txBody>
+                    <a:bodyPr/>
+                    <a:lstStyle/>
+                    <a:p>
+                      <a:pPr indent="0" marL="0">
+                        <a:buNone/>
+                      </a:pPr>
+                      <a:r>
+                        <a:rPr lang="en-US" sz="1300" b="1" dirty="0">
+                          <a:solidFill>
+                            <a:schemeClr val="tx1"/>
+                          </a:solidFill>
+                        </a:rPr>
+                        <a:t>259 h</a:t>
+                      </a:r>
+                      <a:endParaRPr lang="en-US" sz="1300" dirty="0"/>
+                    </a:p>
+                  </a:txBody>
+                  <a:tcPr marL="54864" marR="54864" marT="27432" marB="27432" anchor="ctr">
+                    <a:lnL w="9525" cap="flat" cmpd="sng" algn="ctr">
+                      <a:solidFill>
+                        <a:srgbClr val="D5DDE3"/>
+                      </a:solidFill>
+                      <a:prstDash val="solid"/>
+                      <a:round/>
+                      <a:headEnd type="none" w="med" len="med"/>
+                      <a:tailEnd type="none" w="med" len="med"/>
+                    </a:lnL>
+                    <a:lnR w="9525" cap="flat" cmpd="sng" algn="ctr">
+                      <a:solidFill>
+                        <a:srgbClr val="D5DDE3"/>
+                      </a:solidFill>
+                      <a:prstDash val="solid"/>
+                      <a:round/>
+                      <a:headEnd type="none" w="med" len="med"/>
+                      <a:tailEnd type="none" w="med" len="med"/>
+                    </a:lnR>
+                    <a:lnT w="9525" cap="flat" cmpd="sng" algn="ctr">
+                      <a:solidFill>
+                        <a:srgbClr val="D5DDE3"/>
+                      </a:solidFill>
+                      <a:prstDash val="solid"/>
+                      <a:round/>
+                      <a:headEnd type="none" w="med" len="med"/>
+                      <a:tailEnd type="none" w="med" len="med"/>
+                    </a:lnT>
+                    <a:lnB w="9525" cap="flat" cmpd="sng" algn="ctr">
+                      <a:solidFill>
+                        <a:srgbClr val="D5DDE3"/>
+                      </a:solidFill>
+                      <a:prstDash val="solid"/>
+                      <a:round/>
+                      <a:headEnd type="none" w="med" len="med"/>
+                      <a:tailEnd type="none" w="med" len="med"/>
+                    </a:lnB>
+                  </a:tcPr>
+                </a:tc>
+                <a:tc>
+                  <a:txBody>
+                    <a:bodyPr/>
+                    <a:lstStyle/>
+                    <a:p>
+                      <a:pPr indent="0" marL="0">
+                        <a:buNone/>
+                      </a:pPr>
+                      <a:r>
+                        <a:rPr lang="en-US" sz="1300" b="1" dirty="0">
+                          <a:solidFill>
+                            <a:schemeClr val="tx1"/>
+                          </a:solidFill>
+                        </a:rPr>
+                        <a:t>253,5 h</a:t>
+                      </a:r>
+                      <a:endParaRPr lang="en-US" sz="1300" dirty="0"/>
+                    </a:p>
+                  </a:txBody>
+                  <a:tcPr marL="54864" marR="54864" marT="27432" marB="27432" anchor="ctr">
+                    <a:lnL w="9525" cap="flat" cmpd="sng" algn="ctr">
+                      <a:solidFill>
+                        <a:srgbClr val="D5DDE3"/>
+                      </a:solidFill>
+                      <a:prstDash val="solid"/>
+                      <a:round/>
+                      <a:headEnd type="none" w="med" len="med"/>
+                      <a:tailEnd type="none" w="med" len="med"/>
+                    </a:lnL>
+                    <a:lnR w="9525" cap="flat" cmpd="sng" algn="ctr">
+                      <a:solidFill>
+                        <a:srgbClr val="D5DDE3"/>
+                      </a:solidFill>
+                      <a:prstDash val="solid"/>
+                      <a:round/>
+                      <a:headEnd type="none" w="med" len="med"/>
+                      <a:tailEnd type="none" w="med" len="med"/>
+                    </a:lnR>
+                    <a:lnT w="9525" cap="flat" cmpd="sng" algn="ctr">
+                      <a:solidFill>
+                        <a:srgbClr val="D5DDE3"/>
+                      </a:solidFill>
+                      <a:prstDash val="solid"/>
+                      <a:round/>
+                      <a:headEnd type="none" w="med" len="med"/>
+                      <a:tailEnd type="none" w="med" len="med"/>
+                    </a:lnT>
+                    <a:lnB w="9525" cap="flat" cmpd="sng" algn="ctr">
+                      <a:solidFill>
+                        <a:srgbClr val="D5DDE3"/>
+                      </a:solidFill>
+                      <a:prstDash val="solid"/>
+                      <a:round/>
+                      <a:headEnd type="none" w="med" len="med"/>
+                      <a:tailEnd type="none" w="med" len="med"/>
+                    </a:lnB>
+                  </a:tcPr>
+                </a:tc>
+                <a:tc>
+                  <a:txBody>
+                    <a:bodyPr/>
+                    <a:lstStyle/>
+                    <a:p>
+                      <a:pPr indent="0" marL="0">
+                        <a:buNone/>
+                      </a:pPr>
+                      <a:r>
+                        <a:rPr lang="en-US" sz="1300" b="1" dirty="0">
+                          <a:solidFill>
+                            <a:schemeClr val="tx1"/>
+                          </a:solidFill>
+                        </a:rPr>
+                        <a:t>5,5 h</a:t>
+                      </a:r>
+                      <a:endParaRPr lang="en-US" sz="1300" dirty="0"/>
+                    </a:p>
+                  </a:txBody>
+                  <a:tcPr marL="54864" marR="54864" marT="27432" marB="27432" anchor="ctr">
+                    <a:lnL w="9525" cap="flat" cmpd="sng" algn="ctr">
+                      <a:solidFill>
+                        <a:srgbClr val="D5DDE3"/>
+                      </a:solidFill>
+                      <a:prstDash val="solid"/>
+                      <a:round/>
+                      <a:headEnd type="none" w="med" len="med"/>
+                      <a:tailEnd type="none" w="med" len="med"/>
+                    </a:lnL>
+                    <a:lnR w="9525" cap="flat" cmpd="sng" algn="ctr">
+                      <a:solidFill>
+                        <a:srgbClr val="D5DDE3"/>
+                      </a:solidFill>
+                      <a:prstDash val="solid"/>
+                      <a:round/>
+                      <a:headEnd type="none" w="med" len="med"/>
+                      <a:tailEnd type="none" w="med" len="med"/>
+                    </a:lnR>
+                    <a:lnT w="9525" cap="flat" cmpd="sng" algn="ctr">
+                      <a:solidFill>
+                        <a:srgbClr val="D5DDE3"/>
+                      </a:solidFill>
+                      <a:prstDash val="solid"/>
+                      <a:round/>
+                      <a:headEnd type="none" w="med" len="med"/>
+                      <a:tailEnd type="none" w="med" len="med"/>
+                    </a:lnT>
+                    <a:lnB w="9525" cap="flat" cmpd="sng" algn="ctr">
+                      <a:solidFill>
+                        <a:srgbClr val="D5DDE3"/>
+                      </a:solidFill>
+                      <a:prstDash val="solid"/>
+                      <a:round/>
+                      <a:headEnd type="none" w="med" len="med"/>
+                      <a:tailEnd type="none" w="med" len="med"/>
+                    </a:lnB>
+                  </a:tcPr>
+                </a:tc>
+              </a:tr>
+            </a:tbl>
+          </a:graphicData>
+        </a:graphic>
+      </p:graphicFrame>
+      <p:sp>
+        <p:nvSpPr>
+          <p:cNvPr id="4" name="Carte"/>
           <p:cNvSpPr/>
           <p:nvPr/>
         </p:nvSpPr>
         <p:spPr>
           <a:xfrm>
-            <a:off x="457200" y="1097280"/>
-            <a:ext cx="4023360" cy="731520"/>
+            <a:off x="457200" y="3017520"/>
+            <a:ext cx="4023360" cy="1508760"/>
           </a:xfrm>
           <a:prstGeom prst="roundRect">
             <a:avLst>
-              <a:gd name="adj" fmla="val 10000"/>
+              <a:gd name="adj" fmla="val 4848"/>
             </a:avLst>
           </a:prstGeom>
           <a:solidFill>
@@ -15408,39 +16389,14 @@
       </p:sp>
       <p:sp>
         <p:nvSpPr>
-          <p:cNvPr id="4" name="Pastille"/>
-          <p:cNvSpPr/>
-          <p:nvPr/>
-        </p:nvSpPr>
-        <p:spPr>
-          <a:xfrm>
-            <a:off x="594360" y="1234440"/>
-            <a:ext cx="457200" cy="457200"/>
-          </a:xfrm>
-          <a:prstGeom prst="ellipse">
-            <a:avLst/>
-          </a:prstGeom>
-          <a:solidFill>
-            <a:schemeClr val="tx2"/>
-          </a:solidFill>
-          <a:ln w="12700">
-            <a:solidFill>
-              <a:schemeClr val="tx2"/>
-            </a:solidFill>
-            <a:prstDash val="solid"/>
-          </a:ln>
-        </p:spPr>
-      </p:sp>
-      <p:sp>
-        <p:nvSpPr>
-          <p:cNvPr id="5" name="Text 3"/>
+          <p:cNvPr id="5" name="Text 2"/>
           <p:cNvSpPr txBox="1"/>
           <p:nvPr/>
         </p:nvSpPr>
         <p:spPr>
           <a:xfrm>
-            <a:off x="594360" y="1234440"/>
-            <a:ext cx="457200" cy="457200"/>
+            <a:off x="594360" y="3108960"/>
+            <a:ext cx="3749040" cy="320040"/>
           </a:xfrm>
           <a:prstGeom prst="rect">
             <a:avLst/>
@@ -15449,19 +16405,19 @@
           <a:ln/>
         </p:spPr>
         <p:txBody>
-          <a:bodyPr wrap="square" lIns="0" tIns="0" rIns="0" bIns="0" rtlCol="0" anchor="ctr"/>
+          <a:bodyPr wrap="square" lIns="0" tIns="0" rIns="0" bIns="0" rtlCol="0" anchor="t"/>
           <a:lstStyle/>
           <a:p>
-            <a:pPr algn="ctr" indent="0" marL="0">
+            <a:pPr indent="0" marL="0">
               <a:buNone/>
             </a:pPr>
             <a:r>
               <a:rPr lang="en-US" sz="1500" b="1" dirty="0">
                 <a:solidFill>
-                  <a:schemeClr val="bg1"/>
+                  <a:schemeClr val="tx2"/>
                 </a:solidFill>
               </a:rPr>
-              <a:t>1</a:t>
+              <a:t>Appui hors équipe : environ 48 h</a:t>
             </a:r>
             <a:endParaRPr lang="en-US" sz="1500" dirty="0"/>
           </a:p>
@@ -15469,14 +16425,14 @@
       </p:sp>
       <p:sp>
         <p:nvSpPr>
-          <p:cNvPr id="6" name="Text 4"/>
+          <p:cNvPr id="6" name="Text 3"/>
           <p:cNvSpPr txBox="1"/>
           <p:nvPr/>
         </p:nvSpPr>
         <p:spPr>
           <a:xfrm>
-            <a:off x="1188720" y="1143000"/>
-            <a:ext cx="3200400" cy="640080"/>
+            <a:off x="594360" y="3456432"/>
+            <a:ext cx="3749040" cy="1005840"/>
           </a:xfrm>
           <a:prstGeom prst="rect">
             <a:avLst/>
@@ -15485,7 +16441,7 @@
           <a:ln/>
         </p:spPr>
         <p:txBody>
-          <a:bodyPr wrap="square" lIns="0" tIns="0" rIns="0" bIns="0" rtlCol="0" anchor="ctr"/>
+          <a:bodyPr wrap="square" lIns="0" tIns="0" rIns="0" bIns="0" rtlCol="0" anchor="t"/>
           <a:lstStyle/>
           <a:p>
             <a:pPr indent="0" marL="0">
@@ -15497,7 +16453,7 @@
                   <a:schemeClr val="tx1"/>
                 </a:solidFill>
               </a:rPr>
-              <a:t>Création libre bloquée en production</a:t>
+              <a:t>Sécurité ~20 h, gestion documentaire ~17 h, TI (administration) ~8 h, juridique ~3 h ; directions et sponsor aux rencontres.</a:t>
             </a:r>
             <a:endParaRPr lang="en-US" sz="1300" dirty="0"/>
           </a:p>
@@ -15511,12 +16467,12 @@
         </p:nvSpPr>
         <p:spPr>
           <a:xfrm>
-            <a:off x="4663440" y="1097280"/>
-            <a:ext cx="4023360" cy="731520"/>
+            <a:off x="4663440" y="3017520"/>
+            <a:ext cx="4023360" cy="1508760"/>
           </a:xfrm>
           <a:prstGeom prst="roundRect">
             <a:avLst>
-              <a:gd name="adj" fmla="val 10000"/>
+              <a:gd name="adj" fmla="val 4848"/>
             </a:avLst>
           </a:prstGeom>
           <a:solidFill>
@@ -15532,39 +16488,14 @@
       </p:sp>
       <p:sp>
         <p:nvSpPr>
-          <p:cNvPr id="8" name="Pastille"/>
-          <p:cNvSpPr/>
-          <p:nvPr/>
-        </p:nvSpPr>
-        <p:spPr>
-          <a:xfrm>
-            <a:off x="4800600" y="1234440"/>
-            <a:ext cx="457200" cy="457200"/>
-          </a:xfrm>
-          <a:prstGeom prst="ellipse">
-            <a:avLst/>
-          </a:prstGeom>
-          <a:solidFill>
-            <a:schemeClr val="accent1"/>
-          </a:solidFill>
-          <a:ln w="12700">
-            <a:solidFill>
-              <a:schemeClr val="accent1"/>
-            </a:solidFill>
-            <a:prstDash val="solid"/>
-          </a:ln>
-        </p:spPr>
-      </p:sp>
-      <p:sp>
-        <p:nvSpPr>
-          <p:cNvPr id="9" name="Text 7"/>
+          <p:cNvPr id="8" name="Text 5"/>
           <p:cNvSpPr txBox="1"/>
           <p:nvPr/>
         </p:nvSpPr>
         <p:spPr>
           <a:xfrm>
-            <a:off x="4800600" y="1234440"/>
-            <a:ext cx="457200" cy="457200"/>
+            <a:off x="4800600" y="3108960"/>
+            <a:ext cx="3749040" cy="320040"/>
           </a:xfrm>
           <a:prstGeom prst="rect">
             <a:avLst/>
@@ -15573,19 +16504,19 @@
           <a:ln/>
         </p:spPr>
         <p:txBody>
-          <a:bodyPr wrap="square" lIns="0" tIns="0" rIns="0" bIns="0" rtlCol="0" anchor="ctr"/>
+          <a:bodyPr wrap="square" lIns="0" tIns="0" rIns="0" bIns="0" rtlCol="0" anchor="t"/>
           <a:lstStyle/>
           <a:p>
-            <a:pPr algn="ctr" indent="0" marL="0">
+            <a:pPr indent="0" marL="0">
               <a:buNone/>
             </a:pPr>
             <a:r>
               <a:rPr lang="en-US" sz="1500" b="1" dirty="0">
                 <a:solidFill>
-                  <a:schemeClr val="bg1"/>
+                  <a:schemeClr val="accent3"/>
                 </a:solidFill>
               </a:rPr>
-              <a:t>2</a:t>
+              <a:t>Risque : marge de 5,5 h</a:t>
             </a:r>
             <a:endParaRPr lang="en-US" sz="1500" dirty="0"/>
           </a:p>
@@ -15593,14 +16524,14 @@
       </p:sp>
       <p:sp>
         <p:nvSpPr>
-          <p:cNvPr id="10" name="Text 8"/>
+          <p:cNvPr id="9" name="Text 6"/>
           <p:cNvSpPr txBox="1"/>
           <p:nvPr/>
         </p:nvSpPr>
         <p:spPr>
           <a:xfrm>
-            <a:off x="5394960" y="1143000"/>
-            <a:ext cx="3200400" cy="640080"/>
+            <a:off x="4800600" y="3456432"/>
+            <a:ext cx="3749040" cy="1005840"/>
           </a:xfrm>
           <a:prstGeom prst="rect">
             <a:avLst/>
@@ -15609,7 +16540,7 @@
           <a:ln/>
         </p:spPr>
         <p:txBody>
-          <a:bodyPr wrap="square" lIns="0" tIns="0" rIns="0" bIns="0" rtlCol="0" anchor="ctr"/>
+          <a:bodyPr wrap="square" lIns="0" tIns="0" rIns="0" bIns="0" rtlCol="0" anchor="t"/>
           <a:lstStyle/>
           <a:p>
             <a:pPr indent="0" marL="0">
@@ -15621,751 +16552,7 @@
                   <a:schemeClr val="tx1"/>
                 </a:solidFill>
               </a:rPr>
-              <a:t>Inventaire du tenant et rapport de surpartage priorisé</a:t>
-            </a:r>
-            <a:endParaRPr lang="en-US" sz="1300" dirty="0"/>
-          </a:p>
-        </p:txBody>
-      </p:sp>
-      <p:sp>
-        <p:nvSpPr>
-          <p:cNvPr id="11" name="Carte"/>
-          <p:cNvSpPr/>
-          <p:nvPr/>
-        </p:nvSpPr>
-        <p:spPr>
-          <a:xfrm>
-            <a:off x="457200" y="1938528"/>
-            <a:ext cx="4023360" cy="731520"/>
-          </a:xfrm>
-          <a:prstGeom prst="roundRect">
-            <a:avLst>
-              <a:gd name="adj" fmla="val 10000"/>
-            </a:avLst>
-          </a:prstGeom>
-          <a:solidFill>
-            <a:schemeClr val="bg2"/>
-          </a:solidFill>
-          <a:ln w="12700">
-            <a:solidFill>
-              <a:schemeClr val="bg2"/>
-            </a:solidFill>
-            <a:prstDash val="solid"/>
-          </a:ln>
-        </p:spPr>
-      </p:sp>
-      <p:sp>
-        <p:nvSpPr>
-          <p:cNvPr id="12" name="Pastille"/>
-          <p:cNvSpPr/>
-          <p:nvPr/>
-        </p:nvSpPr>
-        <p:spPr>
-          <a:xfrm>
-            <a:off x="594360" y="2075688"/>
-            <a:ext cx="457200" cy="457200"/>
-          </a:xfrm>
-          <a:prstGeom prst="ellipse">
-            <a:avLst/>
-          </a:prstGeom>
-          <a:solidFill>
-            <a:schemeClr val="tx2"/>
-          </a:solidFill>
-          <a:ln w="12700">
-            <a:solidFill>
-              <a:schemeClr val="tx2"/>
-            </a:solidFill>
-            <a:prstDash val="solid"/>
-          </a:ln>
-        </p:spPr>
-      </p:sp>
-      <p:sp>
-        <p:nvSpPr>
-          <p:cNvPr id="13" name="Text 11"/>
-          <p:cNvSpPr txBox="1"/>
-          <p:nvPr/>
-        </p:nvSpPr>
-        <p:spPr>
-          <a:xfrm>
-            <a:off x="594360" y="2075688"/>
-            <a:ext cx="457200" cy="457200"/>
-          </a:xfrm>
-          <a:prstGeom prst="rect">
-            <a:avLst/>
-          </a:prstGeom>
-          <a:noFill/>
-          <a:ln/>
-        </p:spPr>
-        <p:txBody>
-          <a:bodyPr wrap="square" lIns="0" tIns="0" rIns="0" bIns="0" rtlCol="0" anchor="ctr"/>
-          <a:lstStyle/>
-          <a:p>
-            <a:pPr algn="ctr" indent="0" marL="0">
-              <a:buNone/>
-            </a:pPr>
-            <a:r>
-              <a:rPr lang="en-US" sz="1500" b="1" dirty="0">
-                <a:solidFill>
-                  <a:schemeClr val="bg1"/>
-                </a:solidFill>
-              </a:rPr>
-              <a:t>3</a:t>
-            </a:r>
-            <a:endParaRPr lang="en-US" sz="1500" dirty="0"/>
-          </a:p>
-        </p:txBody>
-      </p:sp>
-      <p:sp>
-        <p:nvSpPr>
-          <p:cNvPr id="14" name="Text 12"/>
-          <p:cNvSpPr txBox="1"/>
-          <p:nvPr/>
-        </p:nvSpPr>
-        <p:spPr>
-          <a:xfrm>
-            <a:off x="1188720" y="1984248"/>
-            <a:ext cx="3200400" cy="640080"/>
-          </a:xfrm>
-          <a:prstGeom prst="rect">
-            <a:avLst/>
-          </a:prstGeom>
-          <a:noFill/>
-          <a:ln/>
-        </p:spPr>
-        <p:txBody>
-          <a:bodyPr wrap="square" lIns="0" tIns="0" rIns="0" bIns="0" rtlCol="0" anchor="ctr"/>
-          <a:lstStyle/>
-          <a:p>
-            <a:pPr indent="0" marL="0">
-              <a:buNone/>
-            </a:pPr>
-            <a:r>
-              <a:rPr lang="en-US" sz="1300" dirty="0">
-                <a:solidFill>
-                  <a:schemeClr val="tx1"/>
-                </a:solidFill>
-              </a:rPr>
-              <a:t>Prototype de portail fonctionnel, de la demande à l'espace créé</a:t>
-            </a:r>
-            <a:endParaRPr lang="en-US" sz="1300" dirty="0"/>
-          </a:p>
-        </p:txBody>
-      </p:sp>
-      <p:sp>
-        <p:nvSpPr>
-          <p:cNvPr id="15" name="Carte"/>
-          <p:cNvSpPr/>
-          <p:nvPr/>
-        </p:nvSpPr>
-        <p:spPr>
-          <a:xfrm>
-            <a:off x="4663440" y="1938528"/>
-            <a:ext cx="4023360" cy="731520"/>
-          </a:xfrm>
-          <a:prstGeom prst="roundRect">
-            <a:avLst>
-              <a:gd name="adj" fmla="val 10000"/>
-            </a:avLst>
-          </a:prstGeom>
-          <a:solidFill>
-            <a:schemeClr val="bg2"/>
-          </a:solidFill>
-          <a:ln w="12700">
-            <a:solidFill>
-              <a:schemeClr val="bg2"/>
-            </a:solidFill>
-            <a:prstDash val="solid"/>
-          </a:ln>
-        </p:spPr>
-      </p:sp>
-      <p:sp>
-        <p:nvSpPr>
-          <p:cNvPr id="16" name="Pastille"/>
-          <p:cNvSpPr/>
-          <p:nvPr/>
-        </p:nvSpPr>
-        <p:spPr>
-          <a:xfrm>
-            <a:off x="4800600" y="2075688"/>
-            <a:ext cx="457200" cy="457200"/>
-          </a:xfrm>
-          <a:prstGeom prst="ellipse">
-            <a:avLst/>
-          </a:prstGeom>
-          <a:solidFill>
-            <a:schemeClr val="accent1"/>
-          </a:solidFill>
-          <a:ln w="12700">
-            <a:solidFill>
-              <a:schemeClr val="accent1"/>
-            </a:solidFill>
-            <a:prstDash val="solid"/>
-          </a:ln>
-        </p:spPr>
-      </p:sp>
-      <p:sp>
-        <p:nvSpPr>
-          <p:cNvPr id="17" name="Text 15"/>
-          <p:cNvSpPr txBox="1"/>
-          <p:nvPr/>
-        </p:nvSpPr>
-        <p:spPr>
-          <a:xfrm>
-            <a:off x="4800600" y="2075688"/>
-            <a:ext cx="457200" cy="457200"/>
-          </a:xfrm>
-          <a:prstGeom prst="rect">
-            <a:avLst/>
-          </a:prstGeom>
-          <a:noFill/>
-          <a:ln/>
-        </p:spPr>
-        <p:txBody>
-          <a:bodyPr wrap="square" lIns="0" tIns="0" rIns="0" bIns="0" rtlCol="0" anchor="ctr"/>
-          <a:lstStyle/>
-          <a:p>
-            <a:pPr algn="ctr" indent="0" marL="0">
-              <a:buNone/>
-            </a:pPr>
-            <a:r>
-              <a:rPr lang="en-US" sz="1500" b="1" dirty="0">
-                <a:solidFill>
-                  <a:schemeClr val="bg1"/>
-                </a:solidFill>
-              </a:rPr>
-              <a:t>4</a:t>
-            </a:r>
-            <a:endParaRPr lang="en-US" sz="1500" dirty="0"/>
-          </a:p>
-        </p:txBody>
-      </p:sp>
-      <p:sp>
-        <p:nvSpPr>
-          <p:cNvPr id="18" name="Text 16"/>
-          <p:cNvSpPr txBox="1"/>
-          <p:nvPr/>
-        </p:nvSpPr>
-        <p:spPr>
-          <a:xfrm>
-            <a:off x="5394960" y="1984248"/>
-            <a:ext cx="3200400" cy="640080"/>
-          </a:xfrm>
-          <a:prstGeom prst="rect">
-            <a:avLst/>
-          </a:prstGeom>
-          <a:noFill/>
-          <a:ln/>
-        </p:spPr>
-        <p:txBody>
-          <a:bodyPr wrap="square" lIns="0" tIns="0" rIns="0" bIns="0" rtlCol="0" anchor="ctr"/>
-          <a:lstStyle/>
-          <a:p>
-            <a:pPr indent="0" marL="0">
-              <a:buNone/>
-            </a:pPr>
-            <a:r>
-              <a:rPr lang="en-US" sz="1300" dirty="0">
-                <a:solidFill>
-                  <a:schemeClr val="tx1"/>
-                </a:solidFill>
-              </a:rPr>
-              <a:t>Deux gabarits (Équipe, Projet) créés par code</a:t>
-            </a:r>
-            <a:endParaRPr lang="en-US" sz="1300" dirty="0"/>
-          </a:p>
-        </p:txBody>
-      </p:sp>
-      <p:sp>
-        <p:nvSpPr>
-          <p:cNvPr id="19" name="Carte"/>
-          <p:cNvSpPr/>
-          <p:nvPr/>
-        </p:nvSpPr>
-        <p:spPr>
-          <a:xfrm>
-            <a:off x="457200" y="2779776"/>
-            <a:ext cx="4023360" cy="731520"/>
-          </a:xfrm>
-          <a:prstGeom prst="roundRect">
-            <a:avLst>
-              <a:gd name="adj" fmla="val 10000"/>
-            </a:avLst>
-          </a:prstGeom>
-          <a:solidFill>
-            <a:schemeClr val="bg2"/>
-          </a:solidFill>
-          <a:ln w="12700">
-            <a:solidFill>
-              <a:schemeClr val="bg2"/>
-            </a:solidFill>
-            <a:prstDash val="solid"/>
-          </a:ln>
-        </p:spPr>
-      </p:sp>
-      <p:sp>
-        <p:nvSpPr>
-          <p:cNvPr id="20" name="Pastille"/>
-          <p:cNvSpPr/>
-          <p:nvPr/>
-        </p:nvSpPr>
-        <p:spPr>
-          <a:xfrm>
-            <a:off x="594360" y="2916936"/>
-            <a:ext cx="457200" cy="457200"/>
-          </a:xfrm>
-          <a:prstGeom prst="ellipse">
-            <a:avLst/>
-          </a:prstGeom>
-          <a:solidFill>
-            <a:schemeClr val="tx2"/>
-          </a:solidFill>
-          <a:ln w="12700">
-            <a:solidFill>
-              <a:schemeClr val="tx2"/>
-            </a:solidFill>
-            <a:prstDash val="solid"/>
-          </a:ln>
-        </p:spPr>
-      </p:sp>
-      <p:sp>
-        <p:nvSpPr>
-          <p:cNvPr id="21" name="Text 19"/>
-          <p:cNvSpPr txBox="1"/>
-          <p:nvPr/>
-        </p:nvSpPr>
-        <p:spPr>
-          <a:xfrm>
-            <a:off x="594360" y="2916936"/>
-            <a:ext cx="457200" cy="457200"/>
-          </a:xfrm>
-          <a:prstGeom prst="rect">
-            <a:avLst/>
-          </a:prstGeom>
-          <a:noFill/>
-          <a:ln/>
-        </p:spPr>
-        <p:txBody>
-          <a:bodyPr wrap="square" lIns="0" tIns="0" rIns="0" bIns="0" rtlCol="0" anchor="ctr"/>
-          <a:lstStyle/>
-          <a:p>
-            <a:pPr algn="ctr" indent="0" marL="0">
-              <a:buNone/>
-            </a:pPr>
-            <a:r>
-              <a:rPr lang="en-US" sz="1500" b="1" dirty="0">
-                <a:solidFill>
-                  <a:schemeClr val="bg1"/>
-                </a:solidFill>
-              </a:rPr>
-              <a:t>5</a:t>
-            </a:r>
-            <a:endParaRPr lang="en-US" sz="1500" dirty="0"/>
-          </a:p>
-        </p:txBody>
-      </p:sp>
-      <p:sp>
-        <p:nvSpPr>
-          <p:cNvPr id="22" name="Text 20"/>
-          <p:cNvSpPr txBox="1"/>
-          <p:nvPr/>
-        </p:nvSpPr>
-        <p:spPr>
-          <a:xfrm>
-            <a:off x="1188720" y="2825496"/>
-            <a:ext cx="3200400" cy="640080"/>
-          </a:xfrm>
-          <a:prstGeom prst="rect">
-            <a:avLst/>
-          </a:prstGeom>
-          <a:noFill/>
-          <a:ln/>
-        </p:spPr>
-        <p:txBody>
-          <a:bodyPr wrap="square" lIns="0" tIns="0" rIns="0" bIns="0" rtlCol="0" anchor="ctr"/>
-          <a:lstStyle/>
-          <a:p>
-            <a:pPr indent="0" marL="0">
-              <a:buNone/>
-            </a:pPr>
-            <a:r>
-              <a:rPr lang="en-US" sz="1300" dirty="0">
-                <a:solidFill>
-                  <a:schemeClr val="tx1"/>
-                </a:solidFill>
-              </a:rPr>
-              <a:t>Partage externe validé en test, processus invités documenté</a:t>
-            </a:r>
-            <a:endParaRPr lang="en-US" sz="1300" dirty="0"/>
-          </a:p>
-        </p:txBody>
-      </p:sp>
-      <p:sp>
-        <p:nvSpPr>
-          <p:cNvPr id="23" name="Carte"/>
-          <p:cNvSpPr/>
-          <p:nvPr/>
-        </p:nvSpPr>
-        <p:spPr>
-          <a:xfrm>
-            <a:off x="4663440" y="2779776"/>
-            <a:ext cx="4023360" cy="731520"/>
-          </a:xfrm>
-          <a:prstGeom prst="roundRect">
-            <a:avLst>
-              <a:gd name="adj" fmla="val 10000"/>
-            </a:avLst>
-          </a:prstGeom>
-          <a:solidFill>
-            <a:schemeClr val="bg2"/>
-          </a:solidFill>
-          <a:ln w="12700">
-            <a:solidFill>
-              <a:schemeClr val="bg2"/>
-            </a:solidFill>
-            <a:prstDash val="solid"/>
-          </a:ln>
-        </p:spPr>
-      </p:sp>
-      <p:sp>
-        <p:nvSpPr>
-          <p:cNvPr id="24" name="Pastille"/>
-          <p:cNvSpPr/>
-          <p:nvPr/>
-        </p:nvSpPr>
-        <p:spPr>
-          <a:xfrm>
-            <a:off x="4800600" y="2916936"/>
-            <a:ext cx="457200" cy="457200"/>
-          </a:xfrm>
-          <a:prstGeom prst="ellipse">
-            <a:avLst/>
-          </a:prstGeom>
-          <a:solidFill>
-            <a:schemeClr val="accent1"/>
-          </a:solidFill>
-          <a:ln w="12700">
-            <a:solidFill>
-              <a:schemeClr val="accent1"/>
-            </a:solidFill>
-            <a:prstDash val="solid"/>
-          </a:ln>
-        </p:spPr>
-      </p:sp>
-      <p:sp>
-        <p:nvSpPr>
-          <p:cNvPr id="25" name="Text 23"/>
-          <p:cNvSpPr txBox="1"/>
-          <p:nvPr/>
-        </p:nvSpPr>
-        <p:spPr>
-          <a:xfrm>
-            <a:off x="4800600" y="2916936"/>
-            <a:ext cx="457200" cy="457200"/>
-          </a:xfrm>
-          <a:prstGeom prst="rect">
-            <a:avLst/>
-          </a:prstGeom>
-          <a:noFill/>
-          <a:ln/>
-        </p:spPr>
-        <p:txBody>
-          <a:bodyPr wrap="square" lIns="0" tIns="0" rIns="0" bIns="0" rtlCol="0" anchor="ctr"/>
-          <a:lstStyle/>
-          <a:p>
-            <a:pPr algn="ctr" indent="0" marL="0">
-              <a:buNone/>
-            </a:pPr>
-            <a:r>
-              <a:rPr lang="en-US" sz="1500" b="1" dirty="0">
-                <a:solidFill>
-                  <a:schemeClr val="bg1"/>
-                </a:solidFill>
-              </a:rPr>
-              <a:t>6</a:t>
-            </a:r>
-            <a:endParaRPr lang="en-US" sz="1500" dirty="0"/>
-          </a:p>
-        </p:txBody>
-      </p:sp>
-      <p:sp>
-        <p:nvSpPr>
-          <p:cNvPr id="26" name="Text 24"/>
-          <p:cNvSpPr txBox="1"/>
-          <p:nvPr/>
-        </p:nvSpPr>
-        <p:spPr>
-          <a:xfrm>
-            <a:off x="5394960" y="2825496"/>
-            <a:ext cx="3200400" cy="640080"/>
-          </a:xfrm>
-          <a:prstGeom prst="rect">
-            <a:avLst/>
-          </a:prstGeom>
-          <a:noFill/>
-          <a:ln/>
-        </p:spPr>
-        <p:txBody>
-          <a:bodyPr wrap="square" lIns="0" tIns="0" rIns="0" bIns="0" rtlCol="0" anchor="ctr"/>
-          <a:lstStyle/>
-          <a:p>
-            <a:pPr indent="0" marL="0">
-              <a:buNone/>
-            </a:pPr>
-            <a:r>
-              <a:rPr lang="en-US" sz="1300" dirty="0">
-                <a:solidFill>
-                  <a:schemeClr val="tx1"/>
-                </a:solidFill>
-              </a:rPr>
-              <a:t>Étiquettes, DLP (simulation) et accès conditionnel (rapport) prêts à activer</a:t>
-            </a:r>
-            <a:endParaRPr lang="en-US" sz="1300" dirty="0"/>
-          </a:p>
-        </p:txBody>
-      </p:sp>
-      <p:sp>
-        <p:nvSpPr>
-          <p:cNvPr id="27" name="Carte"/>
-          <p:cNvSpPr/>
-          <p:nvPr/>
-        </p:nvSpPr>
-        <p:spPr>
-          <a:xfrm>
-            <a:off x="457200" y="3621024"/>
-            <a:ext cx="4023360" cy="731520"/>
-          </a:xfrm>
-          <a:prstGeom prst="roundRect">
-            <a:avLst>
-              <a:gd name="adj" fmla="val 10000"/>
-            </a:avLst>
-          </a:prstGeom>
-          <a:solidFill>
-            <a:schemeClr val="bg2"/>
-          </a:solidFill>
-          <a:ln w="12700">
-            <a:solidFill>
-              <a:schemeClr val="bg2"/>
-            </a:solidFill>
-            <a:prstDash val="solid"/>
-          </a:ln>
-        </p:spPr>
-      </p:sp>
-      <p:sp>
-        <p:nvSpPr>
-          <p:cNvPr id="28" name="Pastille"/>
-          <p:cNvSpPr/>
-          <p:nvPr/>
-        </p:nvSpPr>
-        <p:spPr>
-          <a:xfrm>
-            <a:off x="594360" y="3758184"/>
-            <a:ext cx="457200" cy="457200"/>
-          </a:xfrm>
-          <a:prstGeom prst="ellipse">
-            <a:avLst/>
-          </a:prstGeom>
-          <a:solidFill>
-            <a:schemeClr val="tx2"/>
-          </a:solidFill>
-          <a:ln w="12700">
-            <a:solidFill>
-              <a:schemeClr val="tx2"/>
-            </a:solidFill>
-            <a:prstDash val="solid"/>
-          </a:ln>
-        </p:spPr>
-      </p:sp>
-      <p:sp>
-        <p:nvSpPr>
-          <p:cNvPr id="29" name="Text 27"/>
-          <p:cNvSpPr txBox="1"/>
-          <p:nvPr/>
-        </p:nvSpPr>
-        <p:spPr>
-          <a:xfrm>
-            <a:off x="594360" y="3758184"/>
-            <a:ext cx="457200" cy="457200"/>
-          </a:xfrm>
-          <a:prstGeom prst="rect">
-            <a:avLst/>
-          </a:prstGeom>
-          <a:noFill/>
-          <a:ln/>
-        </p:spPr>
-        <p:txBody>
-          <a:bodyPr wrap="square" lIns="0" tIns="0" rIns="0" bIns="0" rtlCol="0" anchor="ctr"/>
-          <a:lstStyle/>
-          <a:p>
-            <a:pPr algn="ctr" indent="0" marL="0">
-              <a:buNone/>
-            </a:pPr>
-            <a:r>
-              <a:rPr lang="en-US" sz="1500" b="1" dirty="0">
-                <a:solidFill>
-                  <a:schemeClr val="bg1"/>
-                </a:solidFill>
-              </a:rPr>
-              <a:t>7</a:t>
-            </a:r>
-            <a:endParaRPr lang="en-US" sz="1500" dirty="0"/>
-          </a:p>
-        </p:txBody>
-      </p:sp>
-      <p:sp>
-        <p:nvSpPr>
-          <p:cNvPr id="30" name="Text 28"/>
-          <p:cNvSpPr txBox="1"/>
-          <p:nvPr/>
-        </p:nvSpPr>
-        <p:spPr>
-          <a:xfrm>
-            <a:off x="1188720" y="3666744"/>
-            <a:ext cx="3200400" cy="640080"/>
-          </a:xfrm>
-          <a:prstGeom prst="rect">
-            <a:avLst/>
-          </a:prstGeom>
-          <a:noFill/>
-          <a:ln/>
-        </p:spPr>
-        <p:txBody>
-          <a:bodyPr wrap="square" lIns="0" tIns="0" rIns="0" bIns="0" rtlCol="0" anchor="ctr"/>
-          <a:lstStyle/>
-          <a:p>
-            <a:pPr indent="0" marL="0">
-              <a:buNone/>
-            </a:pPr>
-            <a:r>
-              <a:rPr lang="en-US" sz="1300" dirty="0">
-                <a:solidFill>
-                  <a:schemeClr val="tx1"/>
-                </a:solidFill>
-              </a:rPr>
-              <a:t>Registre des espaces et détection automatique des orphelins</a:t>
-            </a:r>
-            <a:endParaRPr lang="en-US" sz="1300" dirty="0"/>
-          </a:p>
-        </p:txBody>
-      </p:sp>
-      <p:sp>
-        <p:nvSpPr>
-          <p:cNvPr id="31" name="Carte"/>
-          <p:cNvSpPr/>
-          <p:nvPr/>
-        </p:nvSpPr>
-        <p:spPr>
-          <a:xfrm>
-            <a:off x="4663440" y="3621024"/>
-            <a:ext cx="4023360" cy="731520"/>
-          </a:xfrm>
-          <a:prstGeom prst="roundRect">
-            <a:avLst>
-              <a:gd name="adj" fmla="val 10000"/>
-            </a:avLst>
-          </a:prstGeom>
-          <a:solidFill>
-            <a:schemeClr val="bg2"/>
-          </a:solidFill>
-          <a:ln w="12700">
-            <a:solidFill>
-              <a:schemeClr val="bg2"/>
-            </a:solidFill>
-            <a:prstDash val="solid"/>
-          </a:ln>
-        </p:spPr>
-      </p:sp>
-      <p:sp>
-        <p:nvSpPr>
-          <p:cNvPr id="32" name="Pastille"/>
-          <p:cNvSpPr/>
-          <p:nvPr/>
-        </p:nvSpPr>
-        <p:spPr>
-          <a:xfrm>
-            <a:off x="4800600" y="3758184"/>
-            <a:ext cx="457200" cy="457200"/>
-          </a:xfrm>
-          <a:prstGeom prst="ellipse">
-            <a:avLst/>
-          </a:prstGeom>
-          <a:solidFill>
-            <a:schemeClr val="accent1"/>
-          </a:solidFill>
-          <a:ln w="12700">
-            <a:solidFill>
-              <a:schemeClr val="accent1"/>
-            </a:solidFill>
-            <a:prstDash val="solid"/>
-          </a:ln>
-        </p:spPr>
-      </p:sp>
-      <p:sp>
-        <p:nvSpPr>
-          <p:cNvPr id="33" name="Text 31"/>
-          <p:cNvSpPr txBox="1"/>
-          <p:nvPr/>
-        </p:nvSpPr>
-        <p:spPr>
-          <a:xfrm>
-            <a:off x="4800600" y="3758184"/>
-            <a:ext cx="457200" cy="457200"/>
-          </a:xfrm>
-          <a:prstGeom prst="rect">
-            <a:avLst/>
-          </a:prstGeom>
-          <a:noFill/>
-          <a:ln/>
-        </p:spPr>
-        <p:txBody>
-          <a:bodyPr wrap="square" lIns="0" tIns="0" rIns="0" bIns="0" rtlCol="0" anchor="ctr"/>
-          <a:lstStyle/>
-          <a:p>
-            <a:pPr algn="ctr" indent="0" marL="0">
-              <a:buNone/>
-            </a:pPr>
-            <a:r>
-              <a:rPr lang="en-US" sz="1500" b="1" dirty="0">
-                <a:solidFill>
-                  <a:schemeClr val="bg1"/>
-                </a:solidFill>
-              </a:rPr>
-              <a:t>8</a:t>
-            </a:r>
-            <a:endParaRPr lang="en-US" sz="1500" dirty="0"/>
-          </a:p>
-        </p:txBody>
-      </p:sp>
-      <p:sp>
-        <p:nvSpPr>
-          <p:cNvPr id="34" name="Text 32"/>
-          <p:cNvSpPr txBox="1"/>
-          <p:nvPr/>
-        </p:nvSpPr>
-        <p:spPr>
-          <a:xfrm>
-            <a:off x="5394960" y="3666744"/>
-            <a:ext cx="3200400" cy="640080"/>
-          </a:xfrm>
-          <a:prstGeom prst="rect">
-            <a:avLst/>
-          </a:prstGeom>
-          <a:noFill/>
-          <a:ln/>
-        </p:spPr>
-        <p:txBody>
-          <a:bodyPr wrap="square" lIns="0" tIns="0" rIns="0" bIns="0" rtlCol="0" anchor="ctr"/>
-          <a:lstStyle/>
-          <a:p>
-            <a:pPr indent="0" marL="0">
-              <a:buNone/>
-            </a:pPr>
-            <a:r>
-              <a:rPr lang="en-US" sz="1300" dirty="0">
-                <a:solidFill>
-                  <a:schemeClr val="tx1"/>
-                </a:solidFill>
-              </a:rPr>
-              <a:t>RACI, charte du comité, plan d'exécution novembre à janvier</a:t>
+              <a:t>Un retard sur le prototype ou l'inventaire décale la démonstration du 27 octobre. Repli : reporter le lot 9 ou la recette.</a:t>
             </a:r>
             <a:endParaRPr lang="en-US" sz="1300" dirty="0"/>
           </a:p>
